--- a/deliverables/AEGIRA_Planner_User_Guide.pptx
+++ b/deliverables/AEGIRA_Planner_User_Guide.pptx
@@ -5507,1687 +5507,30 @@
           </a:prstGeom>
         </p:spPr>
       </p:pic>
-      <p:sp>
-        <p:nvSpPr>
-          <p:cNvPr id="36" name="Rounded Rectangle 35"/>
-          <p:cNvSpPr/>
-          <p:nvPr/>
-        </p:nvSpPr>
-        <p:spPr>
-          <a:xfrm>
-            <a:off x="5870448" y="1828800"/>
-            <a:ext cx="5468112" cy="3621024"/>
-          </a:xfrm>
-          <a:prstGeom prst="roundRect">
-            <a:avLst>
-              <a:gd name="adj" fmla="val 3500"/>
-            </a:avLst>
-          </a:prstGeom>
-          <a:solidFill>
-            <a:srgbClr val="FFFFFF"/>
-          </a:solidFill>
-          <a:ln w="15875">
-            <a:solidFill>
-              <a:srgbClr val="AFC6F0"/>
-            </a:solidFill>
-          </a:ln>
-          <a:effectLst/>
-        </p:spPr>
-        <p:style>
-          <a:lnRef idx="1">
-            <a:schemeClr val="accent1"/>
-          </a:lnRef>
-          <a:fillRef idx="3">
-            <a:schemeClr val="accent1"/>
-          </a:fillRef>
-          <a:effectRef idx="2">
-            <a:schemeClr val="accent1"/>
-          </a:effectRef>
-          <a:fontRef idx="minor">
-            <a:schemeClr val="lt1"/>
-          </a:fontRef>
-        </p:style>
-        <p:txBody>
-          <a:bodyPr rtlCol="0" anchor="ctr"/>
-          <a:lstStyle/>
-          <a:p>
-            <a:pPr algn="ctr"/>
-          </a:p>
-        </p:txBody>
-      </p:sp>
-      <p:sp>
-        <p:nvSpPr>
-          <p:cNvPr id="37" name="Rounded Rectangle 36"/>
-          <p:cNvSpPr/>
-          <p:nvPr/>
-        </p:nvSpPr>
-        <p:spPr>
-          <a:xfrm>
-            <a:off x="5870448" y="1828800"/>
-            <a:ext cx="5468112" cy="365760"/>
-          </a:xfrm>
-          <a:prstGeom prst="roundRect">
-            <a:avLst>
-              <a:gd name="adj" fmla="val 12000"/>
-            </a:avLst>
-          </a:prstGeom>
-          <a:solidFill>
-            <a:srgbClr val="1E2761"/>
-          </a:solidFill>
-          <a:ln>
-            <a:noFill/>
-          </a:ln>
-          <a:effectLst/>
-        </p:spPr>
-        <p:style>
-          <a:lnRef idx="1">
-            <a:schemeClr val="accent1"/>
-          </a:lnRef>
-          <a:fillRef idx="3">
-            <a:schemeClr val="accent1"/>
-          </a:fillRef>
-          <a:effectRef idx="2">
-            <a:schemeClr val="accent1"/>
-          </a:effectRef>
-          <a:fontRef idx="minor">
-            <a:schemeClr val="lt1"/>
-          </a:fontRef>
-        </p:style>
-        <p:txBody>
-          <a:bodyPr rtlCol="0" anchor="ctr"/>
-          <a:lstStyle/>
-          <a:p>
-            <a:pPr algn="ctr"/>
-          </a:p>
-        </p:txBody>
-      </p:sp>
-      <p:sp>
-        <p:nvSpPr>
-          <p:cNvPr id="38" name="Rectangle 37"/>
-          <p:cNvSpPr/>
-          <p:nvPr/>
-        </p:nvSpPr>
-        <p:spPr>
-          <a:xfrm>
-            <a:off x="5870448" y="2011680"/>
-            <a:ext cx="5468112" cy="182880"/>
-          </a:xfrm>
-          <a:prstGeom prst="rect">
-            <a:avLst/>
-          </a:prstGeom>
-          <a:solidFill>
-            <a:srgbClr val="1E2761"/>
-          </a:solidFill>
-          <a:ln>
-            <a:noFill/>
-          </a:ln>
-          <a:effectLst/>
-        </p:spPr>
-        <p:style>
-          <a:lnRef idx="1">
-            <a:schemeClr val="accent1"/>
-          </a:lnRef>
-          <a:fillRef idx="3">
-            <a:schemeClr val="accent1"/>
-          </a:fillRef>
-          <a:effectRef idx="2">
-            <a:schemeClr val="accent1"/>
-          </a:effectRef>
-          <a:fontRef idx="minor">
-            <a:schemeClr val="lt1"/>
-          </a:fontRef>
-        </p:style>
-        <p:txBody>
-          <a:bodyPr rtlCol="0" anchor="ctr"/>
-          <a:lstStyle/>
-          <a:p>
-            <a:pPr algn="ctr"/>
-          </a:p>
-        </p:txBody>
-      </p:sp>
-      <p:sp>
-        <p:nvSpPr>
-          <p:cNvPr id="39" name="Oval 38"/>
-          <p:cNvSpPr/>
-          <p:nvPr/>
-        </p:nvSpPr>
-        <p:spPr>
-          <a:xfrm>
-            <a:off x="6035040" y="1961388"/>
-            <a:ext cx="100584" cy="100584"/>
-          </a:xfrm>
-          <a:prstGeom prst="ellipse">
-            <a:avLst/>
-          </a:prstGeom>
-          <a:solidFill>
-            <a:srgbClr val="C3423F"/>
-          </a:solidFill>
-          <a:ln>
-            <a:noFill/>
-          </a:ln>
-          <a:effectLst/>
-        </p:spPr>
-        <p:style>
-          <a:lnRef idx="1">
-            <a:schemeClr val="accent1"/>
-          </a:lnRef>
-          <a:fillRef idx="3">
-            <a:schemeClr val="accent1"/>
-          </a:fillRef>
-          <a:effectRef idx="2">
-            <a:schemeClr val="accent1"/>
-          </a:effectRef>
-          <a:fontRef idx="minor">
-            <a:schemeClr val="lt1"/>
-          </a:fontRef>
-        </p:style>
-        <p:txBody>
-          <a:bodyPr rtlCol="0" anchor="ctr"/>
-          <a:lstStyle/>
-          <a:p>
-            <a:pPr algn="ctr"/>
-          </a:p>
-        </p:txBody>
-      </p:sp>
-      <p:sp>
-        <p:nvSpPr>
-          <p:cNvPr id="40" name="Oval 39"/>
-          <p:cNvSpPr/>
-          <p:nvPr/>
-        </p:nvSpPr>
-        <p:spPr>
-          <a:xfrm>
-            <a:off x="6217920" y="1961388"/>
-            <a:ext cx="100584" cy="100584"/>
-          </a:xfrm>
-          <a:prstGeom prst="ellipse">
-            <a:avLst/>
-          </a:prstGeom>
-          <a:solidFill>
-            <a:srgbClr val="F2B33D"/>
-          </a:solidFill>
-          <a:ln>
-            <a:noFill/>
-          </a:ln>
-          <a:effectLst/>
-        </p:spPr>
-        <p:style>
-          <a:lnRef idx="1">
-            <a:schemeClr val="accent1"/>
-          </a:lnRef>
-          <a:fillRef idx="3">
-            <a:schemeClr val="accent1"/>
-          </a:fillRef>
-          <a:effectRef idx="2">
-            <a:schemeClr val="accent1"/>
-          </a:effectRef>
-          <a:fontRef idx="minor">
-            <a:schemeClr val="lt1"/>
-          </a:fontRef>
-        </p:style>
-        <p:txBody>
-          <a:bodyPr rtlCol="0" anchor="ctr"/>
-          <a:lstStyle/>
-          <a:p>
-            <a:pPr algn="ctr"/>
-          </a:p>
-        </p:txBody>
-      </p:sp>
-      <p:sp>
-        <p:nvSpPr>
-          <p:cNvPr id="41" name="Oval 40"/>
-          <p:cNvSpPr/>
-          <p:nvPr/>
-        </p:nvSpPr>
-        <p:spPr>
-          <a:xfrm>
-            <a:off x="6400800" y="1961388"/>
-            <a:ext cx="100584" cy="100584"/>
-          </a:xfrm>
-          <a:prstGeom prst="ellipse">
-            <a:avLst/>
-          </a:prstGeom>
-          <a:solidFill>
-            <a:srgbClr val="5A9367"/>
-          </a:solidFill>
-          <a:ln>
-            <a:noFill/>
-          </a:ln>
-          <a:effectLst/>
-        </p:spPr>
-        <p:style>
-          <a:lnRef idx="1">
-            <a:schemeClr val="accent1"/>
-          </a:lnRef>
-          <a:fillRef idx="3">
-            <a:schemeClr val="accent1"/>
-          </a:fillRef>
-          <a:effectRef idx="2">
-            <a:schemeClr val="accent1"/>
-          </a:effectRef>
-          <a:fontRef idx="minor">
-            <a:schemeClr val="lt1"/>
-          </a:fontRef>
-        </p:style>
-        <p:txBody>
-          <a:bodyPr rtlCol="0" anchor="ctr"/>
-          <a:lstStyle/>
-          <a:p>
-            <a:pPr algn="ctr"/>
-          </a:p>
-        </p:txBody>
-      </p:sp>
-      <p:sp>
-        <p:nvSpPr>
-          <p:cNvPr id="42" name="Rounded Rectangle 41"/>
-          <p:cNvSpPr/>
-          <p:nvPr/>
-        </p:nvSpPr>
-        <p:spPr>
-          <a:xfrm>
-            <a:off x="6739128" y="1920240"/>
-            <a:ext cx="2926080" cy="182880"/>
-          </a:xfrm>
-          <a:prstGeom prst="roundRect">
-            <a:avLst>
-              <a:gd name="adj" fmla="val 50000"/>
-            </a:avLst>
-          </a:prstGeom>
-          <a:solidFill>
-            <a:srgbClr val="FFFFFF"/>
-          </a:solidFill>
-          <a:ln>
-            <a:noFill/>
-          </a:ln>
-          <a:effectLst/>
-        </p:spPr>
-        <p:style>
-          <a:lnRef idx="1">
-            <a:schemeClr val="accent1"/>
-          </a:lnRef>
-          <a:fillRef idx="3">
-            <a:schemeClr val="accent1"/>
-          </a:fillRef>
-          <a:effectRef idx="2">
-            <a:schemeClr val="accent1"/>
-          </a:effectRef>
-          <a:fontRef idx="minor">
-            <a:schemeClr val="lt1"/>
-          </a:fontRef>
-        </p:style>
-        <p:txBody>
-          <a:bodyPr rtlCol="0" anchor="ctr"/>
-          <a:lstStyle/>
-          <a:p>
-            <a:pPr algn="ctr"/>
-          </a:p>
-        </p:txBody>
-      </p:sp>
-      <p:sp>
-        <p:nvSpPr>
-          <p:cNvPr id="43" name="TextBox 42"/>
-          <p:cNvSpPr txBox="1"/>
-          <p:nvPr/>
-        </p:nvSpPr>
-        <p:spPr>
-          <a:xfrm>
-            <a:off x="6830568" y="1897380"/>
-            <a:ext cx="2834640" cy="201168"/>
-          </a:xfrm>
-          <a:prstGeom prst="rect">
-            <a:avLst/>
-          </a:prstGeom>
-          <a:noFill/>
-        </p:spPr>
-        <p:txBody>
-          <a:bodyPr wrap="square" anchor="ctr" lIns="0" rIns="0" tIns="0" bIns="0">
-            <a:noAutofit/>
-          </a:bodyPr>
-          <a:lstStyle/>
-          <a:p>
-            <a:pPr algn="l">
-              <a:lnSpc>
-                <a:spcPct val="100000"/>
-              </a:lnSpc>
-              <a:spcBef>
-                <a:spcPts val="0"/>
-              </a:spcBef>
-              <a:spcAft>
-                <a:spcPts val="400"/>
-              </a:spcAft>
-            </a:pPr>
-            <a:r>
-              <a:rPr sz="900" b="0" i="0">
-                <a:solidFill>
-                  <a:srgbClr val="5B6B85"/>
-                </a:solidFill>
-                <a:latin typeface="JetBrains Mono"/>
-                <a:cs typeface="JetBrains Mono"/>
-              </a:rPr>
-              <a:t>zgpm.aegira.ai/projects/…/verständnis</a:t>
-            </a:r>
-          </a:p>
-        </p:txBody>
-      </p:sp>
-      <p:sp>
-        <p:nvSpPr>
-          <p:cNvPr id="44" name="TextBox 43"/>
-          <p:cNvSpPr txBox="1"/>
-          <p:nvPr/>
-        </p:nvSpPr>
-        <p:spPr>
-          <a:xfrm>
-            <a:off x="6144768" y="2377440"/>
-            <a:ext cx="2743200" cy="274320"/>
-          </a:xfrm>
-          <a:prstGeom prst="rect">
-            <a:avLst/>
-          </a:prstGeom>
-          <a:noFill/>
-        </p:spPr>
-        <p:txBody>
-          <a:bodyPr wrap="square" anchor="t" lIns="0" rIns="0" tIns="0" bIns="0">
-            <a:noAutofit/>
-          </a:bodyPr>
-          <a:lstStyle/>
-          <a:p>
-            <a:pPr algn="l">
-              <a:lnSpc>
-                <a:spcPct val="100000"/>
-              </a:lnSpc>
-              <a:spcBef>
-                <a:spcPts val="0"/>
-              </a:spcBef>
-              <a:spcAft>
-                <a:spcPts val="400"/>
-              </a:spcAft>
-            </a:pPr>
-            <a:r>
-              <a:rPr sz="1100" b="1" i="0">
-                <a:solidFill>
-                  <a:srgbClr val="0E1735"/>
-                </a:solidFill>
-                <a:latin typeface="Inter"/>
-                <a:cs typeface="Inter"/>
-              </a:rPr>
-              <a:t>Projektverständnis (pre-final)</a:t>
-            </a:r>
-          </a:p>
-        </p:txBody>
-      </p:sp>
-      <p:sp>
-        <p:nvSpPr>
-          <p:cNvPr id="45" name="Oval 44"/>
-          <p:cNvSpPr/>
-          <p:nvPr/>
-        </p:nvSpPr>
-        <p:spPr>
-          <a:xfrm>
-            <a:off x="6163056" y="2761488"/>
-            <a:ext cx="91440" cy="91440"/>
-          </a:xfrm>
-          <a:prstGeom prst="ellipse">
-            <a:avLst/>
-          </a:prstGeom>
-          <a:solidFill>
-            <a:srgbClr val="5A9367"/>
-          </a:solidFill>
-          <a:ln>
-            <a:noFill/>
-          </a:ln>
-          <a:effectLst/>
-        </p:spPr>
-        <p:style>
-          <a:lnRef idx="1">
-            <a:schemeClr val="accent1"/>
-          </a:lnRef>
-          <a:fillRef idx="3">
-            <a:schemeClr val="accent1"/>
-          </a:fillRef>
-          <a:effectRef idx="2">
-            <a:schemeClr val="accent1"/>
-          </a:effectRef>
-          <a:fontRef idx="minor">
-            <a:schemeClr val="lt1"/>
-          </a:fontRef>
-        </p:style>
-        <p:txBody>
-          <a:bodyPr rtlCol="0" anchor="ctr"/>
-          <a:lstStyle/>
-          <a:p>
-            <a:pPr algn="ctr"/>
-          </a:p>
-        </p:txBody>
-      </p:sp>
-      <p:sp>
-        <p:nvSpPr>
-          <p:cNvPr id="46" name="TextBox 45"/>
-          <p:cNvSpPr txBox="1"/>
-          <p:nvPr/>
-        </p:nvSpPr>
-        <p:spPr>
-          <a:xfrm>
-            <a:off x="6345936" y="2651760"/>
-            <a:ext cx="2606040" cy="365760"/>
-          </a:xfrm>
-          <a:prstGeom prst="rect">
-            <a:avLst/>
-          </a:prstGeom>
-          <a:noFill/>
-        </p:spPr>
-        <p:txBody>
-          <a:bodyPr wrap="square" anchor="t" lIns="0" rIns="0" tIns="0" bIns="0">
-            <a:noAutofit/>
-          </a:bodyPr>
-          <a:lstStyle/>
-          <a:p>
-            <a:pPr algn="l">
-              <a:lnSpc>
-                <a:spcPct val="100000"/>
-              </a:lnSpc>
-              <a:spcBef>
-                <a:spcPts val="0"/>
-              </a:spcBef>
-              <a:spcAft>
-                <a:spcPts val="400"/>
-              </a:spcAft>
-            </a:pPr>
-            <a:r>
-              <a:rPr sz="950" b="0" i="0">
-                <a:solidFill>
-                  <a:srgbClr val="0E1735"/>
-                </a:solidFill>
-                <a:latin typeface="Inter"/>
-                <a:cs typeface="Inter"/>
-              </a:rPr>
-              <a:t>Ziel: wöchentlicher Newsletter, halb-automatisch</a:t>
-            </a:r>
-          </a:p>
-        </p:txBody>
-      </p:sp>
-      <p:sp>
-        <p:nvSpPr>
-          <p:cNvPr id="47" name="Oval 46"/>
-          <p:cNvSpPr/>
-          <p:nvPr/>
-        </p:nvSpPr>
-        <p:spPr>
-          <a:xfrm>
-            <a:off x="6163056" y="3145536"/>
-            <a:ext cx="91440" cy="91440"/>
-          </a:xfrm>
-          <a:prstGeom prst="ellipse">
-            <a:avLst/>
-          </a:prstGeom>
-          <a:solidFill>
-            <a:srgbClr val="5A9367"/>
-          </a:solidFill>
-          <a:ln>
-            <a:noFill/>
-          </a:ln>
-          <a:effectLst/>
-        </p:spPr>
-        <p:style>
-          <a:lnRef idx="1">
-            <a:schemeClr val="accent1"/>
-          </a:lnRef>
-          <a:fillRef idx="3">
-            <a:schemeClr val="accent1"/>
-          </a:fillRef>
-          <a:effectRef idx="2">
-            <a:schemeClr val="accent1"/>
-          </a:effectRef>
-          <a:fontRef idx="minor">
-            <a:schemeClr val="lt1"/>
-          </a:fontRef>
-        </p:style>
-        <p:txBody>
-          <a:bodyPr rtlCol="0" anchor="ctr"/>
-          <a:lstStyle/>
-          <a:p>
-            <a:pPr algn="ctr"/>
-          </a:p>
-        </p:txBody>
-      </p:sp>
-      <p:sp>
-        <p:nvSpPr>
-          <p:cNvPr id="48" name="TextBox 47"/>
-          <p:cNvSpPr txBox="1"/>
-          <p:nvPr/>
-        </p:nvSpPr>
-        <p:spPr>
-          <a:xfrm>
-            <a:off x="6345936" y="3035808"/>
-            <a:ext cx="2606040" cy="365760"/>
-          </a:xfrm>
-          <a:prstGeom prst="rect">
-            <a:avLst/>
-          </a:prstGeom>
-          <a:noFill/>
-        </p:spPr>
-        <p:txBody>
-          <a:bodyPr wrap="square" anchor="t" lIns="0" rIns="0" tIns="0" bIns="0">
-            <a:noAutofit/>
-          </a:bodyPr>
-          <a:lstStyle/>
-          <a:p>
-            <a:pPr algn="l">
-              <a:lnSpc>
-                <a:spcPct val="100000"/>
-              </a:lnSpc>
-              <a:spcBef>
-                <a:spcPts val="0"/>
-              </a:spcBef>
-              <a:spcAft>
-                <a:spcPts val="400"/>
-              </a:spcAft>
-            </a:pPr>
-            <a:r>
-              <a:rPr sz="950" b="0" i="0">
-                <a:solidFill>
-                  <a:srgbClr val="0E1735"/>
-                </a:solidFill>
-                <a:latin typeface="Inter"/>
-                <a:cs typeface="Inter"/>
-              </a:rPr>
-              <a:t>Art: Hybrid (Konzept + Technik)</a:t>
-            </a:r>
-          </a:p>
-        </p:txBody>
-      </p:sp>
-      <p:sp>
-        <p:nvSpPr>
-          <p:cNvPr id="49" name="Oval 48"/>
-          <p:cNvSpPr/>
-          <p:nvPr/>
-        </p:nvSpPr>
-        <p:spPr>
-          <a:xfrm>
-            <a:off x="6163056" y="3529584"/>
-            <a:ext cx="91440" cy="91440"/>
-          </a:xfrm>
-          <a:prstGeom prst="ellipse">
-            <a:avLst/>
-          </a:prstGeom>
-          <a:solidFill>
-            <a:srgbClr val="5A9367"/>
-          </a:solidFill>
-          <a:ln>
-            <a:noFill/>
-          </a:ln>
-          <a:effectLst/>
-        </p:spPr>
-        <p:style>
-          <a:lnRef idx="1">
-            <a:schemeClr val="accent1"/>
-          </a:lnRef>
-          <a:fillRef idx="3">
-            <a:schemeClr val="accent1"/>
-          </a:fillRef>
-          <a:effectRef idx="2">
-            <a:schemeClr val="accent1"/>
-          </a:effectRef>
-          <a:fontRef idx="minor">
-            <a:schemeClr val="lt1"/>
-          </a:fontRef>
-        </p:style>
-        <p:txBody>
-          <a:bodyPr rtlCol="0" anchor="ctr"/>
-          <a:lstStyle/>
-          <a:p>
-            <a:pPr algn="ctr"/>
-          </a:p>
-        </p:txBody>
-      </p:sp>
-      <p:sp>
-        <p:nvSpPr>
-          <p:cNvPr id="50" name="TextBox 49"/>
-          <p:cNvSpPr txBox="1"/>
-          <p:nvPr/>
-        </p:nvSpPr>
-        <p:spPr>
-          <a:xfrm>
-            <a:off x="6345936" y="3419856"/>
-            <a:ext cx="2606040" cy="365760"/>
-          </a:xfrm>
-          <a:prstGeom prst="rect">
-            <a:avLst/>
-          </a:prstGeom>
-          <a:noFill/>
-        </p:spPr>
-        <p:txBody>
-          <a:bodyPr wrap="square" anchor="t" lIns="0" rIns="0" tIns="0" bIns="0">
-            <a:noAutofit/>
-          </a:bodyPr>
-          <a:lstStyle/>
-          <a:p>
-            <a:pPr algn="l">
-              <a:lnSpc>
-                <a:spcPct val="100000"/>
-              </a:lnSpc>
-              <a:spcBef>
-                <a:spcPts val="0"/>
-              </a:spcBef>
-              <a:spcAft>
-                <a:spcPts val="400"/>
-              </a:spcAft>
-            </a:pPr>
-            <a:r>
-              <a:rPr sz="950" b="0" i="0">
-                <a:solidFill>
-                  <a:srgbClr val="0E1735"/>
-                </a:solidFill>
-                <a:latin typeface="Inter"/>
-                <a:cs typeface="Inter"/>
-              </a:rPr>
-              <a:t>5 Kernfähigkeiten identifiziert</a:t>
-            </a:r>
-          </a:p>
-        </p:txBody>
-      </p:sp>
-      <p:sp>
-        <p:nvSpPr>
-          <p:cNvPr id="51" name="Oval 50"/>
-          <p:cNvSpPr/>
-          <p:nvPr/>
-        </p:nvSpPr>
-        <p:spPr>
-          <a:xfrm>
-            <a:off x="6163056" y="3913632"/>
-            <a:ext cx="91440" cy="91440"/>
-          </a:xfrm>
-          <a:prstGeom prst="ellipse">
-            <a:avLst/>
-          </a:prstGeom>
-          <a:solidFill>
-            <a:srgbClr val="5A9367"/>
-          </a:solidFill>
-          <a:ln>
-            <a:noFill/>
-          </a:ln>
-          <a:effectLst/>
-        </p:spPr>
-        <p:style>
-          <a:lnRef idx="1">
-            <a:schemeClr val="accent1"/>
-          </a:lnRef>
-          <a:fillRef idx="3">
-            <a:schemeClr val="accent1"/>
-          </a:fillRef>
-          <a:effectRef idx="2">
-            <a:schemeClr val="accent1"/>
-          </a:effectRef>
-          <a:fontRef idx="minor">
-            <a:schemeClr val="lt1"/>
-          </a:fontRef>
-        </p:style>
-        <p:txBody>
-          <a:bodyPr rtlCol="0" anchor="ctr"/>
-          <a:lstStyle/>
-          <a:p>
-            <a:pPr algn="ctr"/>
-          </a:p>
-        </p:txBody>
-      </p:sp>
-      <p:sp>
-        <p:nvSpPr>
-          <p:cNvPr id="52" name="TextBox 51"/>
-          <p:cNvSpPr txBox="1"/>
-          <p:nvPr/>
-        </p:nvSpPr>
-        <p:spPr>
-          <a:xfrm>
-            <a:off x="6345936" y="3803904"/>
-            <a:ext cx="2606040" cy="365760"/>
-          </a:xfrm>
-          <a:prstGeom prst="rect">
-            <a:avLst/>
-          </a:prstGeom>
-          <a:noFill/>
-        </p:spPr>
-        <p:txBody>
-          <a:bodyPr wrap="square" anchor="t" lIns="0" rIns="0" tIns="0" bIns="0">
-            <a:noAutofit/>
-          </a:bodyPr>
-          <a:lstStyle/>
-          <a:p>
-            <a:pPr algn="l">
-              <a:lnSpc>
-                <a:spcPct val="100000"/>
-              </a:lnSpc>
-              <a:spcBef>
-                <a:spcPts val="0"/>
-              </a:spcBef>
-              <a:spcAft>
-                <a:spcPts val="400"/>
-              </a:spcAft>
-            </a:pPr>
-            <a:r>
-              <a:rPr sz="950" b="0" i="0">
-                <a:solidFill>
-                  <a:srgbClr val="0E1735"/>
-                </a:solidFill>
-                <a:latin typeface="Inter"/>
-                <a:cs typeface="Inter"/>
-              </a:rPr>
-              <a:t>Freigabe durch Mensch zwingend</a:t>
-            </a:r>
-          </a:p>
-        </p:txBody>
-      </p:sp>
-      <p:cxnSp>
-        <p:nvCxnSpPr>
-          <p:cNvPr id="53" name="Connector 52"/>
-          <p:cNvCxnSpPr/>
-          <p:nvPr/>
-        </p:nvCxnSpPr>
-        <p:spPr>
-          <a:xfrm>
-            <a:off x="9116567" y="2377440"/>
-            <a:ext cx="0" cy="2880360"/>
-          </a:xfrm>
-          <a:prstGeom prst="bentConnector3">
-            <a:avLst/>
-          </a:prstGeom>
-          <a:ln w="12700">
-            <a:solidFill>
-              <a:srgbClr val="E3E6EC"/>
-            </a:solidFill>
-          </a:ln>
-        </p:spPr>
-        <p:style>
-          <a:lnRef idx="2">
-            <a:schemeClr val="accent1"/>
-          </a:lnRef>
-          <a:fillRef idx="0">
-            <a:schemeClr val="accent1"/>
-          </a:fillRef>
-          <a:effectRef idx="1">
-            <a:schemeClr val="accent1"/>
-          </a:effectRef>
-          <a:fontRef idx="minor">
-            <a:schemeClr val="tx1"/>
-          </a:fontRef>
-        </p:style>
-      </p:cxnSp>
-      <p:sp>
-        <p:nvSpPr>
-          <p:cNvPr id="54" name="TextBox 53"/>
-          <p:cNvSpPr txBox="1"/>
-          <p:nvPr/>
-        </p:nvSpPr>
-        <p:spPr>
-          <a:xfrm>
-            <a:off x="9299448" y="2377440"/>
-            <a:ext cx="2011680" cy="274320"/>
-          </a:xfrm>
-          <a:prstGeom prst="rect">
-            <a:avLst/>
-          </a:prstGeom>
-          <a:noFill/>
-        </p:spPr>
-        <p:txBody>
-          <a:bodyPr wrap="square" anchor="t" lIns="0" rIns="0" tIns="0" bIns="0">
-            <a:noAutofit/>
-          </a:bodyPr>
-          <a:lstStyle/>
-          <a:p>
-            <a:pPr algn="l">
-              <a:lnSpc>
-                <a:spcPct val="100000"/>
-              </a:lnSpc>
-              <a:spcBef>
-                <a:spcPts val="0"/>
-              </a:spcBef>
-              <a:spcAft>
-                <a:spcPts val="400"/>
-              </a:spcAft>
-            </a:pPr>
-            <a:r>
-              <a:rPr sz="1100" b="1" i="0">
-                <a:solidFill>
-                  <a:srgbClr val="0E1735"/>
-                </a:solidFill>
-                <a:latin typeface="Inter"/>
-                <a:cs typeface="Inter"/>
-              </a:rPr>
-              <a:t>Vorgeschlagene Agenten</a:t>
-            </a:r>
-          </a:p>
-        </p:txBody>
-      </p:sp>
-      <p:sp>
-        <p:nvSpPr>
-          <p:cNvPr id="55" name="Rounded Rectangle 54"/>
-          <p:cNvSpPr/>
-          <p:nvPr/>
-        </p:nvSpPr>
-        <p:spPr>
-          <a:xfrm>
-            <a:off x="9299448" y="2761488"/>
-            <a:ext cx="1874519" cy="347472"/>
-          </a:xfrm>
-          <a:prstGeom prst="roundRect">
-            <a:avLst>
-              <a:gd name="adj" fmla="val 12000"/>
-            </a:avLst>
-          </a:prstGeom>
-          <a:solidFill>
-            <a:srgbClr val="FFFFFF"/>
-          </a:solidFill>
-          <a:ln w="12700">
-            <a:solidFill>
-              <a:srgbClr val="AFC6F0"/>
-            </a:solidFill>
-          </a:ln>
-          <a:effectLst/>
-        </p:spPr>
-        <p:style>
-          <a:lnRef idx="1">
-            <a:schemeClr val="accent1"/>
-          </a:lnRef>
-          <a:fillRef idx="3">
-            <a:schemeClr val="accent1"/>
-          </a:fillRef>
-          <a:effectRef idx="2">
-            <a:schemeClr val="accent1"/>
-          </a:effectRef>
-          <a:fontRef idx="minor">
-            <a:schemeClr val="lt1"/>
-          </a:fontRef>
-        </p:style>
-        <p:txBody>
-          <a:bodyPr rtlCol="0" anchor="ctr"/>
-          <a:lstStyle/>
-          <a:p>
-            <a:pPr algn="ctr"/>
-          </a:p>
-        </p:txBody>
-      </p:sp>
-      <p:sp>
-        <p:nvSpPr>
-          <p:cNvPr id="56" name="Oval 55"/>
-          <p:cNvSpPr/>
-          <p:nvPr/>
-        </p:nvSpPr>
-        <p:spPr>
-          <a:xfrm>
-            <a:off x="9400032" y="2852928"/>
-            <a:ext cx="164592" cy="164592"/>
-          </a:xfrm>
-          <a:prstGeom prst="ellipse">
-            <a:avLst/>
-          </a:prstGeom>
-          <a:solidFill>
-            <a:srgbClr val="1E2761"/>
-          </a:solidFill>
-          <a:ln>
-            <a:noFill/>
-          </a:ln>
-          <a:effectLst/>
-        </p:spPr>
-        <p:style>
-          <a:lnRef idx="1">
-            <a:schemeClr val="accent1"/>
-          </a:lnRef>
-          <a:fillRef idx="3">
-            <a:schemeClr val="accent1"/>
-          </a:fillRef>
-          <a:effectRef idx="2">
-            <a:schemeClr val="accent1"/>
-          </a:effectRef>
-          <a:fontRef idx="minor">
-            <a:schemeClr val="lt1"/>
-          </a:fontRef>
-        </p:style>
-        <p:txBody>
-          <a:bodyPr rtlCol="0" anchor="ctr"/>
-          <a:lstStyle/>
-          <a:p>
-            <a:pPr algn="ctr"/>
-          </a:p>
-        </p:txBody>
-      </p:sp>
-      <p:sp>
-        <p:nvSpPr>
-          <p:cNvPr id="57" name="TextBox 56"/>
-          <p:cNvSpPr txBox="1"/>
-          <p:nvPr/>
-        </p:nvSpPr>
-        <p:spPr>
-          <a:xfrm>
-            <a:off x="9637776" y="2752344"/>
-            <a:ext cx="1554480" cy="347472"/>
-          </a:xfrm>
-          <a:prstGeom prst="rect">
-            <a:avLst/>
-          </a:prstGeom>
-          <a:noFill/>
-        </p:spPr>
-        <p:txBody>
-          <a:bodyPr wrap="square" anchor="ctr" lIns="0" rIns="0" tIns="0" bIns="0">
-            <a:noAutofit/>
-          </a:bodyPr>
-          <a:lstStyle/>
-          <a:p>
-            <a:pPr algn="l">
-              <a:lnSpc>
-                <a:spcPct val="100000"/>
-              </a:lnSpc>
-              <a:spcBef>
-                <a:spcPts val="0"/>
-              </a:spcBef>
-              <a:spcAft>
-                <a:spcPts val="400"/>
-              </a:spcAft>
-            </a:pPr>
-            <a:r>
-              <a:rPr sz="950" b="1" i="0">
-                <a:solidFill>
-                  <a:srgbClr val="0E1735"/>
-                </a:solidFill>
-                <a:latin typeface="Inter"/>
-                <a:cs typeface="Inter"/>
-              </a:rPr>
-              <a:t>PMO  </a:t>
-            </a:r>
-            <a:r>
-              <a:rPr sz="850" b="0" i="0">
-                <a:solidFill>
-                  <a:srgbClr val="5B6B85"/>
-                </a:solidFill>
-                <a:latin typeface="Inter"/>
-                <a:cs typeface="Inter"/>
-              </a:rPr>
-              <a:t>Orchestrierung</a:t>
-            </a:r>
-          </a:p>
-        </p:txBody>
-      </p:sp>
-      <p:sp>
-        <p:nvSpPr>
-          <p:cNvPr id="58" name="Rounded Rectangle 57"/>
-          <p:cNvSpPr/>
-          <p:nvPr/>
-        </p:nvSpPr>
-        <p:spPr>
-          <a:xfrm>
-            <a:off x="9299448" y="3182112"/>
-            <a:ext cx="1874519" cy="347472"/>
-          </a:xfrm>
-          <a:prstGeom prst="roundRect">
-            <a:avLst>
-              <a:gd name="adj" fmla="val 12000"/>
-            </a:avLst>
-          </a:prstGeom>
-          <a:solidFill>
-            <a:srgbClr val="FFFFFF"/>
-          </a:solidFill>
-          <a:ln w="12700">
-            <a:solidFill>
-              <a:srgbClr val="AFC6F0"/>
-            </a:solidFill>
-          </a:ln>
-          <a:effectLst/>
-        </p:spPr>
-        <p:style>
-          <a:lnRef idx="1">
-            <a:schemeClr val="accent1"/>
-          </a:lnRef>
-          <a:fillRef idx="3">
-            <a:schemeClr val="accent1"/>
-          </a:fillRef>
-          <a:effectRef idx="2">
-            <a:schemeClr val="accent1"/>
-          </a:effectRef>
-          <a:fontRef idx="minor">
-            <a:schemeClr val="lt1"/>
-          </a:fontRef>
-        </p:style>
-        <p:txBody>
-          <a:bodyPr rtlCol="0" anchor="ctr"/>
-          <a:lstStyle/>
-          <a:p>
-            <a:pPr algn="ctr"/>
-          </a:p>
-        </p:txBody>
-      </p:sp>
-      <p:sp>
-        <p:nvSpPr>
-          <p:cNvPr id="59" name="Oval 58"/>
-          <p:cNvSpPr/>
-          <p:nvPr/>
-        </p:nvSpPr>
-        <p:spPr>
-          <a:xfrm>
-            <a:off x="9400032" y="3273552"/>
-            <a:ext cx="164592" cy="164592"/>
-          </a:xfrm>
-          <a:prstGeom prst="ellipse">
-            <a:avLst/>
-          </a:prstGeom>
-          <a:solidFill>
-            <a:srgbClr val="1E2761"/>
-          </a:solidFill>
-          <a:ln>
-            <a:noFill/>
-          </a:ln>
-          <a:effectLst/>
-        </p:spPr>
-        <p:style>
-          <a:lnRef idx="1">
-            <a:schemeClr val="accent1"/>
-          </a:lnRef>
-          <a:fillRef idx="3">
-            <a:schemeClr val="accent1"/>
-          </a:fillRef>
-          <a:effectRef idx="2">
-            <a:schemeClr val="accent1"/>
-          </a:effectRef>
-          <a:fontRef idx="minor">
-            <a:schemeClr val="lt1"/>
-          </a:fontRef>
-        </p:style>
-        <p:txBody>
-          <a:bodyPr rtlCol="0" anchor="ctr"/>
-          <a:lstStyle/>
-          <a:p>
-            <a:pPr algn="ctr"/>
-          </a:p>
-        </p:txBody>
-      </p:sp>
-      <p:sp>
-        <p:nvSpPr>
-          <p:cNvPr id="60" name="TextBox 59"/>
-          <p:cNvSpPr txBox="1"/>
-          <p:nvPr/>
-        </p:nvSpPr>
-        <p:spPr>
-          <a:xfrm>
-            <a:off x="9637776" y="3172968"/>
-            <a:ext cx="1554480" cy="347472"/>
-          </a:xfrm>
-          <a:prstGeom prst="rect">
-            <a:avLst/>
-          </a:prstGeom>
-          <a:noFill/>
-        </p:spPr>
-        <p:txBody>
-          <a:bodyPr wrap="square" anchor="ctr" lIns="0" rIns="0" tIns="0" bIns="0">
-            <a:noAutofit/>
-          </a:bodyPr>
-          <a:lstStyle/>
-          <a:p>
-            <a:pPr algn="l">
-              <a:lnSpc>
-                <a:spcPct val="100000"/>
-              </a:lnSpc>
-              <a:spcBef>
-                <a:spcPts val="0"/>
-              </a:spcBef>
-              <a:spcAft>
-                <a:spcPts val="400"/>
-              </a:spcAft>
-            </a:pPr>
-            <a:r>
-              <a:rPr sz="950" b="1" i="0">
-                <a:solidFill>
-                  <a:srgbClr val="0E1735"/>
-                </a:solidFill>
-                <a:latin typeface="Inter"/>
-                <a:cs typeface="Inter"/>
-              </a:rPr>
-              <a:t>Architecture  </a:t>
-            </a:r>
-            <a:r>
-              <a:rPr sz="850" b="0" i="0">
-                <a:solidFill>
-                  <a:srgbClr val="5B6B85"/>
-                </a:solidFill>
-                <a:latin typeface="Inter"/>
-                <a:cs typeface="Inter"/>
-              </a:rPr>
-              <a:t>Rollen &amp; PVM</a:t>
-            </a:r>
-          </a:p>
-        </p:txBody>
-      </p:sp>
-      <p:sp>
-        <p:nvSpPr>
-          <p:cNvPr id="61" name="Rounded Rectangle 60"/>
-          <p:cNvSpPr/>
-          <p:nvPr/>
-        </p:nvSpPr>
-        <p:spPr>
-          <a:xfrm>
-            <a:off x="9299448" y="3602736"/>
-            <a:ext cx="1874519" cy="347472"/>
-          </a:xfrm>
-          <a:prstGeom prst="roundRect">
-            <a:avLst>
-              <a:gd name="adj" fmla="val 12000"/>
-            </a:avLst>
-          </a:prstGeom>
-          <a:solidFill>
-            <a:srgbClr val="FFFFFF"/>
-          </a:solidFill>
-          <a:ln w="12700">
-            <a:solidFill>
-              <a:srgbClr val="AFC6F0"/>
-            </a:solidFill>
-          </a:ln>
-          <a:effectLst/>
-        </p:spPr>
-        <p:style>
-          <a:lnRef idx="1">
-            <a:schemeClr val="accent1"/>
-          </a:lnRef>
-          <a:fillRef idx="3">
-            <a:schemeClr val="accent1"/>
-          </a:fillRef>
-          <a:effectRef idx="2">
-            <a:schemeClr val="accent1"/>
-          </a:effectRef>
-          <a:fontRef idx="minor">
-            <a:schemeClr val="lt1"/>
-          </a:fontRef>
-        </p:style>
-        <p:txBody>
-          <a:bodyPr rtlCol="0" anchor="ctr"/>
-          <a:lstStyle/>
-          <a:p>
-            <a:pPr algn="ctr"/>
-          </a:p>
-        </p:txBody>
-      </p:sp>
-      <p:sp>
-        <p:nvSpPr>
-          <p:cNvPr id="62" name="Oval 61"/>
-          <p:cNvSpPr/>
-          <p:nvPr/>
-        </p:nvSpPr>
-        <p:spPr>
-          <a:xfrm>
-            <a:off x="9400032" y="3694176"/>
-            <a:ext cx="164592" cy="164592"/>
-          </a:xfrm>
-          <a:prstGeom prst="ellipse">
-            <a:avLst/>
-          </a:prstGeom>
-          <a:solidFill>
-            <a:srgbClr val="5B6B85"/>
-          </a:solidFill>
-          <a:ln>
-            <a:noFill/>
-          </a:ln>
-          <a:effectLst/>
-        </p:spPr>
-        <p:style>
-          <a:lnRef idx="1">
-            <a:schemeClr val="accent1"/>
-          </a:lnRef>
-          <a:fillRef idx="3">
-            <a:schemeClr val="accent1"/>
-          </a:fillRef>
-          <a:effectRef idx="2">
-            <a:schemeClr val="accent1"/>
-          </a:effectRef>
-          <a:fontRef idx="minor">
-            <a:schemeClr val="lt1"/>
-          </a:fontRef>
-        </p:style>
-        <p:txBody>
-          <a:bodyPr rtlCol="0" anchor="ctr"/>
-          <a:lstStyle/>
-          <a:p>
-            <a:pPr algn="ctr"/>
-          </a:p>
-        </p:txBody>
-      </p:sp>
-      <p:sp>
-        <p:nvSpPr>
-          <p:cNvPr id="63" name="TextBox 62"/>
-          <p:cNvSpPr txBox="1"/>
-          <p:nvPr/>
-        </p:nvSpPr>
-        <p:spPr>
-          <a:xfrm>
-            <a:off x="9637776" y="3593592"/>
-            <a:ext cx="1554480" cy="347472"/>
-          </a:xfrm>
-          <a:prstGeom prst="rect">
-            <a:avLst/>
-          </a:prstGeom>
-          <a:noFill/>
-        </p:spPr>
-        <p:txBody>
-          <a:bodyPr wrap="square" anchor="ctr" lIns="0" rIns="0" tIns="0" bIns="0">
-            <a:noAutofit/>
-          </a:bodyPr>
-          <a:lstStyle/>
-          <a:p>
-            <a:pPr algn="l">
-              <a:lnSpc>
-                <a:spcPct val="100000"/>
-              </a:lnSpc>
-              <a:spcBef>
-                <a:spcPts val="0"/>
-              </a:spcBef>
-              <a:spcAft>
-                <a:spcPts val="400"/>
-              </a:spcAft>
-            </a:pPr>
-            <a:r>
-              <a:rPr sz="950" b="1" i="0">
-                <a:solidFill>
-                  <a:srgbClr val="0E1735"/>
-                </a:solidFill>
-                <a:latin typeface="Inter"/>
-                <a:cs typeface="Inter"/>
-              </a:rPr>
-              <a:t>Skill-Mapping  </a:t>
-            </a:r>
-            <a:r>
-              <a:rPr sz="850" b="0" i="0">
-                <a:solidFill>
-                  <a:srgbClr val="5B6B85"/>
-                </a:solidFill>
-                <a:latin typeface="Inter"/>
-                <a:cs typeface="Inter"/>
-              </a:rPr>
-              <a:t>Fähigkeiten</a:t>
-            </a:r>
-          </a:p>
-        </p:txBody>
-      </p:sp>
-      <p:sp>
-        <p:nvSpPr>
-          <p:cNvPr id="64" name="Rounded Rectangle 63"/>
-          <p:cNvSpPr/>
-          <p:nvPr/>
-        </p:nvSpPr>
-        <p:spPr>
-          <a:xfrm>
-            <a:off x="9299448" y="4023360"/>
-            <a:ext cx="1874519" cy="347472"/>
-          </a:xfrm>
-          <a:prstGeom prst="roundRect">
-            <a:avLst>
-              <a:gd name="adj" fmla="val 12000"/>
-            </a:avLst>
-          </a:prstGeom>
-          <a:solidFill>
-            <a:srgbClr val="FFFFFF"/>
-          </a:solidFill>
-          <a:ln w="12700">
-            <a:solidFill>
-              <a:srgbClr val="AFC6F0"/>
-            </a:solidFill>
-          </a:ln>
-          <a:effectLst/>
-        </p:spPr>
-        <p:style>
-          <a:lnRef idx="1">
-            <a:schemeClr val="accent1"/>
-          </a:lnRef>
-          <a:fillRef idx="3">
-            <a:schemeClr val="accent1"/>
-          </a:fillRef>
-          <a:effectRef idx="2">
-            <a:schemeClr val="accent1"/>
-          </a:effectRef>
-          <a:fontRef idx="minor">
-            <a:schemeClr val="lt1"/>
-          </a:fontRef>
-        </p:style>
-        <p:txBody>
-          <a:bodyPr rtlCol="0" anchor="ctr"/>
-          <a:lstStyle/>
-          <a:p>
-            <a:pPr algn="ctr"/>
-          </a:p>
-        </p:txBody>
-      </p:sp>
-      <p:sp>
-        <p:nvSpPr>
-          <p:cNvPr id="65" name="Oval 64"/>
-          <p:cNvSpPr/>
-          <p:nvPr/>
-        </p:nvSpPr>
-        <p:spPr>
-          <a:xfrm>
-            <a:off x="9400032" y="4114800"/>
-            <a:ext cx="164592" cy="164592"/>
-          </a:xfrm>
-          <a:prstGeom prst="ellipse">
-            <a:avLst/>
-          </a:prstGeom>
-          <a:solidFill>
-            <a:srgbClr val="5B6B85"/>
-          </a:solidFill>
-          <a:ln>
-            <a:noFill/>
-          </a:ln>
-          <a:effectLst/>
-        </p:spPr>
-        <p:style>
-          <a:lnRef idx="1">
-            <a:schemeClr val="accent1"/>
-          </a:lnRef>
-          <a:fillRef idx="3">
-            <a:schemeClr val="accent1"/>
-          </a:fillRef>
-          <a:effectRef idx="2">
-            <a:schemeClr val="accent1"/>
-          </a:effectRef>
-          <a:fontRef idx="minor">
-            <a:schemeClr val="lt1"/>
-          </a:fontRef>
-        </p:style>
-        <p:txBody>
-          <a:bodyPr rtlCol="0" anchor="ctr"/>
-          <a:lstStyle/>
-          <a:p>
-            <a:pPr algn="ctr"/>
-          </a:p>
-        </p:txBody>
-      </p:sp>
-      <p:sp>
-        <p:nvSpPr>
-          <p:cNvPr id="66" name="TextBox 65"/>
-          <p:cNvSpPr txBox="1"/>
-          <p:nvPr/>
-        </p:nvSpPr>
-        <p:spPr>
-          <a:xfrm>
-            <a:off x="9637776" y="4014216"/>
-            <a:ext cx="1554480" cy="347472"/>
-          </a:xfrm>
-          <a:prstGeom prst="rect">
-            <a:avLst/>
-          </a:prstGeom>
-          <a:noFill/>
-        </p:spPr>
-        <p:txBody>
-          <a:bodyPr wrap="square" anchor="ctr" lIns="0" rIns="0" tIns="0" bIns="0">
-            <a:noAutofit/>
-          </a:bodyPr>
-          <a:lstStyle/>
-          <a:p>
-            <a:pPr algn="l">
-              <a:lnSpc>
-                <a:spcPct val="100000"/>
-              </a:lnSpc>
-              <a:spcBef>
-                <a:spcPts val="0"/>
-              </a:spcBef>
-              <a:spcAft>
-                <a:spcPts val="400"/>
-              </a:spcAft>
-            </a:pPr>
-            <a:r>
-              <a:rPr sz="950" b="1" i="0">
-                <a:solidFill>
-                  <a:srgbClr val="0E1735"/>
-                </a:solidFill>
-                <a:latin typeface="Inter"/>
-                <a:cs typeface="Inter"/>
-              </a:rPr>
-              <a:t>Risk  </a:t>
-            </a:r>
-            <a:r>
-              <a:rPr sz="850" b="0" i="0">
-                <a:solidFill>
-                  <a:srgbClr val="5B6B85"/>
-                </a:solidFill>
-                <a:latin typeface="Inter"/>
-                <a:cs typeface="Inter"/>
-              </a:rPr>
-              <a:t>Risiken</a:t>
-            </a:r>
-          </a:p>
-        </p:txBody>
-      </p:sp>
-      <p:sp>
-        <p:nvSpPr>
-          <p:cNvPr id="67" name="Rounded Rectangle 66"/>
-          <p:cNvSpPr/>
-          <p:nvPr/>
-        </p:nvSpPr>
-        <p:spPr>
-          <a:xfrm>
-            <a:off x="9299448" y="4443984"/>
-            <a:ext cx="1874519" cy="347472"/>
-          </a:xfrm>
-          <a:prstGeom prst="roundRect">
-            <a:avLst>
-              <a:gd name="adj" fmla="val 12000"/>
-            </a:avLst>
-          </a:prstGeom>
-          <a:solidFill>
-            <a:srgbClr val="FFFFFF"/>
-          </a:solidFill>
-          <a:ln w="12700">
-            <a:solidFill>
-              <a:srgbClr val="AFC6F0"/>
-            </a:solidFill>
-          </a:ln>
-          <a:effectLst/>
-        </p:spPr>
-        <p:style>
-          <a:lnRef idx="1">
-            <a:schemeClr val="accent1"/>
-          </a:lnRef>
-          <a:fillRef idx="3">
-            <a:schemeClr val="accent1"/>
-          </a:fillRef>
-          <a:effectRef idx="2">
-            <a:schemeClr val="accent1"/>
-          </a:effectRef>
-          <a:fontRef idx="minor">
-            <a:schemeClr val="lt1"/>
-          </a:fontRef>
-        </p:style>
-        <p:txBody>
-          <a:bodyPr rtlCol="0" anchor="ctr"/>
-          <a:lstStyle/>
-          <a:p>
-            <a:pPr algn="ctr"/>
-          </a:p>
-        </p:txBody>
-      </p:sp>
-      <p:sp>
-        <p:nvSpPr>
-          <p:cNvPr id="68" name="Oval 67"/>
-          <p:cNvSpPr/>
-          <p:nvPr/>
-        </p:nvSpPr>
-        <p:spPr>
-          <a:xfrm>
-            <a:off x="9400032" y="4535424"/>
-            <a:ext cx="164592" cy="164592"/>
-          </a:xfrm>
-          <a:prstGeom prst="ellipse">
-            <a:avLst/>
-          </a:prstGeom>
-          <a:solidFill>
-            <a:srgbClr val="5B6B85"/>
-          </a:solidFill>
-          <a:ln>
-            <a:noFill/>
-          </a:ln>
-          <a:effectLst/>
-        </p:spPr>
-        <p:style>
-          <a:lnRef idx="1">
-            <a:schemeClr val="accent1"/>
-          </a:lnRef>
-          <a:fillRef idx="3">
-            <a:schemeClr val="accent1"/>
-          </a:fillRef>
-          <a:effectRef idx="2">
-            <a:schemeClr val="accent1"/>
-          </a:effectRef>
-          <a:fontRef idx="minor">
-            <a:schemeClr val="lt1"/>
-          </a:fontRef>
-        </p:style>
-        <p:txBody>
-          <a:bodyPr rtlCol="0" anchor="ctr"/>
-          <a:lstStyle/>
-          <a:p>
-            <a:pPr algn="ctr"/>
-          </a:p>
-        </p:txBody>
-      </p:sp>
-      <p:sp>
-        <p:nvSpPr>
-          <p:cNvPr id="69" name="TextBox 68"/>
-          <p:cNvSpPr txBox="1"/>
-          <p:nvPr/>
-        </p:nvSpPr>
-        <p:spPr>
-          <a:xfrm>
-            <a:off x="9637776" y="4434840"/>
-            <a:ext cx="1554480" cy="347472"/>
-          </a:xfrm>
-          <a:prstGeom prst="rect">
-            <a:avLst/>
-          </a:prstGeom>
-          <a:noFill/>
-        </p:spPr>
-        <p:txBody>
-          <a:bodyPr wrap="square" anchor="ctr" lIns="0" rIns="0" tIns="0" bIns="0">
-            <a:noAutofit/>
-          </a:bodyPr>
-          <a:lstStyle/>
-          <a:p>
-            <a:pPr algn="l">
-              <a:lnSpc>
-                <a:spcPct val="100000"/>
-              </a:lnSpc>
-              <a:spcBef>
-                <a:spcPts val="0"/>
-              </a:spcBef>
-              <a:spcAft>
-                <a:spcPts val="400"/>
-              </a:spcAft>
-            </a:pPr>
-            <a:r>
-              <a:rPr sz="950" b="1" i="0">
-                <a:solidFill>
-                  <a:srgbClr val="0E1735"/>
-                </a:solidFill>
-                <a:latin typeface="Inter"/>
-                <a:cs typeface="Inter"/>
-              </a:rPr>
-              <a:t>Reviewer  </a:t>
-            </a:r>
-            <a:r>
-              <a:rPr sz="850" b="0" i="0">
-                <a:solidFill>
-                  <a:srgbClr val="5B6B85"/>
-                </a:solidFill>
-                <a:latin typeface="Inter"/>
-                <a:cs typeface="Inter"/>
-              </a:rPr>
-              <a:t>Konsistenz</a:t>
-            </a:r>
-          </a:p>
-        </p:txBody>
-      </p:sp>
-      <p:sp>
-        <p:nvSpPr>
-          <p:cNvPr id="70" name="Rounded Rectangle 69"/>
-          <p:cNvSpPr/>
-          <p:nvPr/>
-        </p:nvSpPr>
-        <p:spPr>
-          <a:xfrm>
-            <a:off x="9646920" y="4983479"/>
-            <a:ext cx="1417320" cy="329184"/>
-          </a:xfrm>
-          <a:prstGeom prst="roundRect">
-            <a:avLst>
-              <a:gd name="adj" fmla="val 50000"/>
-            </a:avLst>
-          </a:prstGeom>
-          <a:solidFill>
-            <a:srgbClr val="E8703A"/>
-          </a:solidFill>
-          <a:ln>
-            <a:noFill/>
-          </a:ln>
-          <a:effectLst/>
-        </p:spPr>
-        <p:style>
-          <a:lnRef idx="1">
-            <a:schemeClr val="accent1"/>
-          </a:lnRef>
-          <a:fillRef idx="3">
-            <a:schemeClr val="accent1"/>
-          </a:fillRef>
-          <a:effectRef idx="2">
-            <a:schemeClr val="accent1"/>
-          </a:effectRef>
-          <a:fontRef idx="minor">
-            <a:schemeClr val="lt1"/>
-          </a:fontRef>
-        </p:style>
-        <p:txBody>
-          <a:bodyPr rtlCol="0" anchor="ctr"/>
-          <a:lstStyle/>
-          <a:p>
-            <a:pPr algn="ctr"/>
-          </a:p>
-        </p:txBody>
-      </p:sp>
-      <p:sp>
-        <p:nvSpPr>
-          <p:cNvPr id="71" name="TextBox 70"/>
-          <p:cNvSpPr txBox="1"/>
-          <p:nvPr/>
-        </p:nvSpPr>
-        <p:spPr>
-          <a:xfrm>
-            <a:off x="9646920" y="4978907"/>
-            <a:ext cx="1417320" cy="329184"/>
-          </a:xfrm>
-          <a:prstGeom prst="rect">
-            <a:avLst/>
-          </a:prstGeom>
-          <a:noFill/>
-        </p:spPr>
-        <p:txBody>
-          <a:bodyPr wrap="square" anchor="ctr" lIns="0" rIns="0" tIns="0" bIns="0">
-            <a:noAutofit/>
-          </a:bodyPr>
-          <a:lstStyle/>
-          <a:p>
-            <a:pPr algn="ctr">
-              <a:lnSpc>
-                <a:spcPct val="100000"/>
-              </a:lnSpc>
-              <a:spcBef>
-                <a:spcPts val="0"/>
-              </a:spcBef>
-              <a:spcAft>
-                <a:spcPts val="400"/>
-              </a:spcAft>
-            </a:pPr>
-            <a:r>
-              <a:rPr sz="1100" b="1" i="0">
-                <a:solidFill>
-                  <a:srgbClr val="FFFFFF"/>
-                </a:solidFill>
-                <a:latin typeface="Inter"/>
-                <a:cs typeface="Inter"/>
-              </a:rPr>
-              <a:t>Freigeben  ✓</a:t>
-            </a:r>
-          </a:p>
-        </p:txBody>
-      </p:sp>
+      <p:pic>
+        <p:nvPicPr>
+          <p:cNvPr id="36" name="Picture 35" descr="g_01_overview.png"/>
+          <p:cNvPicPr>
+            <a:picLocks noChangeAspect="1"/>
+          </p:cNvPicPr>
+          <p:nvPr/>
+        </p:nvPicPr>
+        <p:blipFill>
+          <a:blip r:embed="rId3"/>
+          <a:stretch>
+            <a:fillRect/>
+          </a:stretch>
+        </p:blipFill>
+        <p:spPr>
+          <a:xfrm>
+            <a:off x="5870448" y="1930527"/>
+            <a:ext cx="5468112" cy="3417570"/>
+          </a:xfrm>
+          <a:prstGeom prst="rect">
+            <a:avLst/>
+          </a:prstGeom>
+        </p:spPr>
+      </p:pic>
     </p:spTree>
   </p:cSld>
   <p:clrMapOvr>
@@ -8728,2928 +7071,30 @@
           </a:prstGeom>
         </p:spPr>
       </p:pic>
-      <p:sp>
-        <p:nvSpPr>
-          <p:cNvPr id="36" name="Rounded Rectangle 35"/>
-          <p:cNvSpPr/>
-          <p:nvPr/>
-        </p:nvSpPr>
-        <p:spPr>
-          <a:xfrm>
-            <a:off x="5870448" y="1828800"/>
-            <a:ext cx="5468112" cy="3621024"/>
-          </a:xfrm>
-          <a:prstGeom prst="roundRect">
-            <a:avLst>
-              <a:gd name="adj" fmla="val 3500"/>
-            </a:avLst>
-          </a:prstGeom>
-          <a:solidFill>
-            <a:srgbClr val="FFFFFF"/>
-          </a:solidFill>
-          <a:ln w="15875">
-            <a:solidFill>
-              <a:srgbClr val="AFC6F0"/>
-            </a:solidFill>
-          </a:ln>
-          <a:effectLst/>
-        </p:spPr>
-        <p:style>
-          <a:lnRef idx="1">
-            <a:schemeClr val="accent1"/>
-          </a:lnRef>
-          <a:fillRef idx="3">
-            <a:schemeClr val="accent1"/>
-          </a:fillRef>
-          <a:effectRef idx="2">
-            <a:schemeClr val="accent1"/>
-          </a:effectRef>
-          <a:fontRef idx="minor">
-            <a:schemeClr val="lt1"/>
-          </a:fontRef>
-        </p:style>
-        <p:txBody>
-          <a:bodyPr rtlCol="0" anchor="ctr"/>
-          <a:lstStyle/>
-          <a:p>
-            <a:pPr algn="ctr"/>
-          </a:p>
-        </p:txBody>
-      </p:sp>
-      <p:sp>
-        <p:nvSpPr>
-          <p:cNvPr id="37" name="Rounded Rectangle 36"/>
-          <p:cNvSpPr/>
-          <p:nvPr/>
-        </p:nvSpPr>
-        <p:spPr>
-          <a:xfrm>
-            <a:off x="5870448" y="1828800"/>
-            <a:ext cx="5468112" cy="365760"/>
-          </a:xfrm>
-          <a:prstGeom prst="roundRect">
-            <a:avLst>
-              <a:gd name="adj" fmla="val 12000"/>
-            </a:avLst>
-          </a:prstGeom>
-          <a:solidFill>
-            <a:srgbClr val="1E2761"/>
-          </a:solidFill>
-          <a:ln>
-            <a:noFill/>
-          </a:ln>
-          <a:effectLst/>
-        </p:spPr>
-        <p:style>
-          <a:lnRef idx="1">
-            <a:schemeClr val="accent1"/>
-          </a:lnRef>
-          <a:fillRef idx="3">
-            <a:schemeClr val="accent1"/>
-          </a:fillRef>
-          <a:effectRef idx="2">
-            <a:schemeClr val="accent1"/>
-          </a:effectRef>
-          <a:fontRef idx="minor">
-            <a:schemeClr val="lt1"/>
-          </a:fontRef>
-        </p:style>
-        <p:txBody>
-          <a:bodyPr rtlCol="0" anchor="ctr"/>
-          <a:lstStyle/>
-          <a:p>
-            <a:pPr algn="ctr"/>
-          </a:p>
-        </p:txBody>
-      </p:sp>
-      <p:sp>
-        <p:nvSpPr>
-          <p:cNvPr id="38" name="Rectangle 37"/>
-          <p:cNvSpPr/>
-          <p:nvPr/>
-        </p:nvSpPr>
-        <p:spPr>
-          <a:xfrm>
-            <a:off x="5870448" y="2011680"/>
-            <a:ext cx="5468112" cy="182880"/>
-          </a:xfrm>
-          <a:prstGeom prst="rect">
-            <a:avLst/>
-          </a:prstGeom>
-          <a:solidFill>
-            <a:srgbClr val="1E2761"/>
-          </a:solidFill>
-          <a:ln>
-            <a:noFill/>
-          </a:ln>
-          <a:effectLst/>
-        </p:spPr>
-        <p:style>
-          <a:lnRef idx="1">
-            <a:schemeClr val="accent1"/>
-          </a:lnRef>
-          <a:fillRef idx="3">
-            <a:schemeClr val="accent1"/>
-          </a:fillRef>
-          <a:effectRef idx="2">
-            <a:schemeClr val="accent1"/>
-          </a:effectRef>
-          <a:fontRef idx="minor">
-            <a:schemeClr val="lt1"/>
-          </a:fontRef>
-        </p:style>
-        <p:txBody>
-          <a:bodyPr rtlCol="0" anchor="ctr"/>
-          <a:lstStyle/>
-          <a:p>
-            <a:pPr algn="ctr"/>
-          </a:p>
-        </p:txBody>
-      </p:sp>
-      <p:sp>
-        <p:nvSpPr>
-          <p:cNvPr id="39" name="Oval 38"/>
-          <p:cNvSpPr/>
-          <p:nvPr/>
-        </p:nvSpPr>
-        <p:spPr>
-          <a:xfrm>
-            <a:off x="6035040" y="1961388"/>
-            <a:ext cx="100584" cy="100584"/>
-          </a:xfrm>
-          <a:prstGeom prst="ellipse">
-            <a:avLst/>
-          </a:prstGeom>
-          <a:solidFill>
-            <a:srgbClr val="C3423F"/>
-          </a:solidFill>
-          <a:ln>
-            <a:noFill/>
-          </a:ln>
-          <a:effectLst/>
-        </p:spPr>
-        <p:style>
-          <a:lnRef idx="1">
-            <a:schemeClr val="accent1"/>
-          </a:lnRef>
-          <a:fillRef idx="3">
-            <a:schemeClr val="accent1"/>
-          </a:fillRef>
-          <a:effectRef idx="2">
-            <a:schemeClr val="accent1"/>
-          </a:effectRef>
-          <a:fontRef idx="minor">
-            <a:schemeClr val="lt1"/>
-          </a:fontRef>
-        </p:style>
-        <p:txBody>
-          <a:bodyPr rtlCol="0" anchor="ctr"/>
-          <a:lstStyle/>
-          <a:p>
-            <a:pPr algn="ctr"/>
-          </a:p>
-        </p:txBody>
-      </p:sp>
-      <p:sp>
-        <p:nvSpPr>
-          <p:cNvPr id="40" name="Oval 39"/>
-          <p:cNvSpPr/>
-          <p:nvPr/>
-        </p:nvSpPr>
-        <p:spPr>
-          <a:xfrm>
-            <a:off x="6217920" y="1961388"/>
-            <a:ext cx="100584" cy="100584"/>
-          </a:xfrm>
-          <a:prstGeom prst="ellipse">
-            <a:avLst/>
-          </a:prstGeom>
-          <a:solidFill>
-            <a:srgbClr val="F2B33D"/>
-          </a:solidFill>
-          <a:ln>
-            <a:noFill/>
-          </a:ln>
-          <a:effectLst/>
-        </p:spPr>
-        <p:style>
-          <a:lnRef idx="1">
-            <a:schemeClr val="accent1"/>
-          </a:lnRef>
-          <a:fillRef idx="3">
-            <a:schemeClr val="accent1"/>
-          </a:fillRef>
-          <a:effectRef idx="2">
-            <a:schemeClr val="accent1"/>
-          </a:effectRef>
-          <a:fontRef idx="minor">
-            <a:schemeClr val="lt1"/>
-          </a:fontRef>
-        </p:style>
-        <p:txBody>
-          <a:bodyPr rtlCol="0" anchor="ctr"/>
-          <a:lstStyle/>
-          <a:p>
-            <a:pPr algn="ctr"/>
-          </a:p>
-        </p:txBody>
-      </p:sp>
-      <p:sp>
-        <p:nvSpPr>
-          <p:cNvPr id="41" name="Oval 40"/>
-          <p:cNvSpPr/>
-          <p:nvPr/>
-        </p:nvSpPr>
-        <p:spPr>
-          <a:xfrm>
-            <a:off x="6400800" y="1961388"/>
-            <a:ext cx="100584" cy="100584"/>
-          </a:xfrm>
-          <a:prstGeom prst="ellipse">
-            <a:avLst/>
-          </a:prstGeom>
-          <a:solidFill>
-            <a:srgbClr val="5A9367"/>
-          </a:solidFill>
-          <a:ln>
-            <a:noFill/>
-          </a:ln>
-          <a:effectLst/>
-        </p:spPr>
-        <p:style>
-          <a:lnRef idx="1">
-            <a:schemeClr val="accent1"/>
-          </a:lnRef>
-          <a:fillRef idx="3">
-            <a:schemeClr val="accent1"/>
-          </a:fillRef>
-          <a:effectRef idx="2">
-            <a:schemeClr val="accent1"/>
-          </a:effectRef>
-          <a:fontRef idx="minor">
-            <a:schemeClr val="lt1"/>
-          </a:fontRef>
-        </p:style>
-        <p:txBody>
-          <a:bodyPr rtlCol="0" anchor="ctr"/>
-          <a:lstStyle/>
-          <a:p>
-            <a:pPr algn="ctr"/>
-          </a:p>
-        </p:txBody>
-      </p:sp>
-      <p:sp>
-        <p:nvSpPr>
-          <p:cNvPr id="42" name="Rounded Rectangle 41"/>
-          <p:cNvSpPr/>
-          <p:nvPr/>
-        </p:nvSpPr>
-        <p:spPr>
-          <a:xfrm>
-            <a:off x="6739128" y="1920240"/>
-            <a:ext cx="2926080" cy="182880"/>
-          </a:xfrm>
-          <a:prstGeom prst="roundRect">
-            <a:avLst>
-              <a:gd name="adj" fmla="val 50000"/>
-            </a:avLst>
-          </a:prstGeom>
-          <a:solidFill>
-            <a:srgbClr val="FFFFFF"/>
-          </a:solidFill>
-          <a:ln>
-            <a:noFill/>
-          </a:ln>
-          <a:effectLst/>
-        </p:spPr>
-        <p:style>
-          <a:lnRef idx="1">
-            <a:schemeClr val="accent1"/>
-          </a:lnRef>
-          <a:fillRef idx="3">
-            <a:schemeClr val="accent1"/>
-          </a:fillRef>
-          <a:effectRef idx="2">
-            <a:schemeClr val="accent1"/>
-          </a:effectRef>
-          <a:fontRef idx="minor">
-            <a:schemeClr val="lt1"/>
-          </a:fontRef>
-        </p:style>
-        <p:txBody>
-          <a:bodyPr rtlCol="0" anchor="ctr"/>
-          <a:lstStyle/>
-          <a:p>
-            <a:pPr algn="ctr"/>
-          </a:p>
-        </p:txBody>
-      </p:sp>
-      <p:sp>
-        <p:nvSpPr>
-          <p:cNvPr id="43" name="TextBox 42"/>
-          <p:cNvSpPr txBox="1"/>
-          <p:nvPr/>
-        </p:nvSpPr>
-        <p:spPr>
-          <a:xfrm>
-            <a:off x="6830568" y="1897380"/>
-            <a:ext cx="2834640" cy="201168"/>
-          </a:xfrm>
-          <a:prstGeom prst="rect">
-            <a:avLst/>
-          </a:prstGeom>
-          <a:noFill/>
-        </p:spPr>
-        <p:txBody>
-          <a:bodyPr wrap="square" anchor="ctr" lIns="0" rIns="0" tIns="0" bIns="0">
-            <a:noAutofit/>
-          </a:bodyPr>
-          <a:lstStyle/>
-          <a:p>
-            <a:pPr algn="l">
-              <a:lnSpc>
-                <a:spcPct val="100000"/>
-              </a:lnSpc>
-              <a:spcBef>
-                <a:spcPts val="0"/>
-              </a:spcBef>
-              <a:spcAft>
-                <a:spcPts val="400"/>
-              </a:spcAft>
-            </a:pPr>
-            <a:r>
-              <a:rPr sz="900" b="0" i="0">
-                <a:solidFill>
-                  <a:srgbClr val="5B6B85"/>
-                </a:solidFill>
-                <a:latin typeface="JetBrains Mono"/>
-                <a:cs typeface="JetBrains Mono"/>
-              </a:rPr>
-              <a:t>zgpm.aegira.ai  ·  Meine Projekte</a:t>
-            </a:r>
-          </a:p>
-        </p:txBody>
-      </p:sp>
-      <p:sp>
-        <p:nvSpPr>
-          <p:cNvPr id="44" name="TextBox 43"/>
-          <p:cNvSpPr txBox="1"/>
-          <p:nvPr/>
-        </p:nvSpPr>
-        <p:spPr>
-          <a:xfrm>
-            <a:off x="6144768" y="2377440"/>
-            <a:ext cx="2743200" cy="274320"/>
-          </a:xfrm>
-          <a:prstGeom prst="rect">
-            <a:avLst/>
-          </a:prstGeom>
-          <a:noFill/>
-        </p:spPr>
-        <p:txBody>
-          <a:bodyPr wrap="square" anchor="t" lIns="0" rIns="0" tIns="0" bIns="0">
-            <a:noAutofit/>
-          </a:bodyPr>
-          <a:lstStyle/>
-          <a:p>
-            <a:pPr algn="l">
-              <a:lnSpc>
-                <a:spcPct val="100000"/>
-              </a:lnSpc>
-              <a:spcBef>
-                <a:spcPts val="0"/>
-              </a:spcBef>
-              <a:spcAft>
-                <a:spcPts val="400"/>
-              </a:spcAft>
-            </a:pPr>
-            <a:r>
-              <a:rPr sz="1300" b="1" i="0">
-                <a:solidFill>
-                  <a:srgbClr val="0E1735"/>
-                </a:solidFill>
-                <a:latin typeface="Inter"/>
-                <a:cs typeface="Inter"/>
-              </a:rPr>
-              <a:t>Meine Projekte</a:t>
-            </a:r>
-          </a:p>
-        </p:txBody>
-      </p:sp>
-      <p:sp>
-        <p:nvSpPr>
-          <p:cNvPr id="45" name="Rounded Rectangle 44"/>
-          <p:cNvSpPr/>
-          <p:nvPr/>
-        </p:nvSpPr>
-        <p:spPr>
-          <a:xfrm>
-            <a:off x="9875520" y="2359152"/>
-            <a:ext cx="1188720" cy="292608"/>
-          </a:xfrm>
-          <a:prstGeom prst="roundRect">
-            <a:avLst>
-              <a:gd name="adj" fmla="val 50000"/>
-            </a:avLst>
-          </a:prstGeom>
-          <a:solidFill>
-            <a:srgbClr val="E8703A"/>
-          </a:solidFill>
-          <a:ln>
-            <a:noFill/>
-          </a:ln>
-          <a:effectLst/>
-        </p:spPr>
-        <p:style>
-          <a:lnRef idx="1">
-            <a:schemeClr val="accent1"/>
-          </a:lnRef>
-          <a:fillRef idx="3">
-            <a:schemeClr val="accent1"/>
-          </a:fillRef>
-          <a:effectRef idx="2">
-            <a:schemeClr val="accent1"/>
-          </a:effectRef>
-          <a:fontRef idx="minor">
-            <a:schemeClr val="lt1"/>
-          </a:fontRef>
-        </p:style>
-        <p:txBody>
-          <a:bodyPr rtlCol="0" anchor="ctr"/>
-          <a:lstStyle/>
-          <a:p>
-            <a:pPr algn="ctr"/>
-          </a:p>
-        </p:txBody>
-      </p:sp>
-      <p:sp>
-        <p:nvSpPr>
-          <p:cNvPr id="46" name="TextBox 45"/>
-          <p:cNvSpPr txBox="1"/>
-          <p:nvPr/>
-        </p:nvSpPr>
-        <p:spPr>
-          <a:xfrm>
-            <a:off x="9875520" y="2354580"/>
-            <a:ext cx="1188720" cy="292608"/>
-          </a:xfrm>
-          <a:prstGeom prst="rect">
-            <a:avLst/>
-          </a:prstGeom>
-          <a:noFill/>
-        </p:spPr>
-        <p:txBody>
-          <a:bodyPr wrap="square" anchor="ctr" lIns="0" rIns="0" tIns="0" bIns="0">
-            <a:noAutofit/>
-          </a:bodyPr>
-          <a:lstStyle/>
-          <a:p>
-            <a:pPr algn="ctr">
-              <a:lnSpc>
-                <a:spcPct val="100000"/>
-              </a:lnSpc>
-              <a:spcBef>
-                <a:spcPts val="0"/>
-              </a:spcBef>
-              <a:spcAft>
-                <a:spcPts val="400"/>
-              </a:spcAft>
-            </a:pPr>
-            <a:r>
-              <a:rPr sz="1000" b="1" i="0">
-                <a:solidFill>
-                  <a:srgbClr val="FFFFFF"/>
-                </a:solidFill>
-                <a:latin typeface="Inter"/>
-                <a:cs typeface="Inter"/>
-              </a:rPr>
-              <a:t>+ Neu</a:t>
-            </a:r>
-          </a:p>
-        </p:txBody>
-      </p:sp>
-      <p:sp>
-        <p:nvSpPr>
-          <p:cNvPr id="47" name="Rounded Rectangle 46"/>
-          <p:cNvSpPr/>
-          <p:nvPr/>
-        </p:nvSpPr>
-        <p:spPr>
-          <a:xfrm>
-            <a:off x="6144768" y="2834639"/>
-            <a:ext cx="4919472" cy="457200"/>
-          </a:xfrm>
-          <a:prstGeom prst="roundRect">
-            <a:avLst>
-              <a:gd name="adj" fmla="val 10000"/>
-            </a:avLst>
-          </a:prstGeom>
-          <a:solidFill>
-            <a:srgbClr val="FFFFFF"/>
-          </a:solidFill>
-          <a:ln w="12700">
-            <a:solidFill>
-              <a:srgbClr val="E3E6EC"/>
-            </a:solidFill>
-          </a:ln>
-          <a:effectLst/>
-        </p:spPr>
-        <p:style>
-          <a:lnRef idx="1">
-            <a:schemeClr val="accent1"/>
-          </a:lnRef>
-          <a:fillRef idx="3">
-            <a:schemeClr val="accent1"/>
-          </a:fillRef>
-          <a:effectRef idx="2">
-            <a:schemeClr val="accent1"/>
-          </a:effectRef>
-          <a:fontRef idx="minor">
-            <a:schemeClr val="lt1"/>
-          </a:fontRef>
-        </p:style>
-        <p:txBody>
-          <a:bodyPr rtlCol="0" anchor="ctr"/>
-          <a:lstStyle/>
-          <a:p>
-            <a:pPr algn="ctr"/>
-          </a:p>
-        </p:txBody>
-      </p:sp>
-      <p:sp>
-        <p:nvSpPr>
-          <p:cNvPr id="48" name="TextBox 47"/>
-          <p:cNvSpPr txBox="1"/>
-          <p:nvPr/>
-        </p:nvSpPr>
-        <p:spPr>
-          <a:xfrm>
-            <a:off x="6309360" y="2834639"/>
-            <a:ext cx="2514600" cy="457200"/>
-          </a:xfrm>
-          <a:prstGeom prst="rect">
-            <a:avLst/>
-          </a:prstGeom>
-          <a:noFill/>
-        </p:spPr>
-        <p:txBody>
-          <a:bodyPr wrap="square" anchor="ctr" lIns="0" rIns="0" tIns="0" bIns="0">
-            <a:noAutofit/>
-          </a:bodyPr>
-          <a:lstStyle/>
-          <a:p>
-            <a:pPr algn="l">
-              <a:lnSpc>
-                <a:spcPct val="100000"/>
-              </a:lnSpc>
-              <a:spcBef>
-                <a:spcPts val="0"/>
-              </a:spcBef>
-              <a:spcAft>
-                <a:spcPts val="400"/>
-              </a:spcAft>
-            </a:pPr>
-            <a:r>
-              <a:rPr sz="1000" b="1" i="0">
-                <a:solidFill>
-                  <a:srgbClr val="0E1735"/>
-                </a:solidFill>
-                <a:latin typeface="Inter"/>
-                <a:cs typeface="Inter"/>
-              </a:rPr>
-              <a:t>Newsletter-Automatisierung</a:t>
-            </a:r>
-          </a:p>
-        </p:txBody>
-      </p:sp>
-      <p:sp>
-        <p:nvSpPr>
-          <p:cNvPr id="49" name="Rounded Rectangle 48"/>
-          <p:cNvSpPr/>
-          <p:nvPr/>
-        </p:nvSpPr>
-        <p:spPr>
-          <a:xfrm>
-            <a:off x="8933688" y="2935223"/>
-            <a:ext cx="1051560" cy="274320"/>
-          </a:xfrm>
-          <a:prstGeom prst="roundRect">
-            <a:avLst>
-              <a:gd name="adj" fmla="val 50000"/>
-            </a:avLst>
-          </a:prstGeom>
-          <a:solidFill>
-            <a:srgbClr val="CADCFC"/>
-          </a:solidFill>
-          <a:ln>
-            <a:noFill/>
-          </a:ln>
-          <a:effectLst/>
-        </p:spPr>
-        <p:style>
-          <a:lnRef idx="1">
-            <a:schemeClr val="accent1"/>
-          </a:lnRef>
-          <a:fillRef idx="3">
-            <a:schemeClr val="accent1"/>
-          </a:fillRef>
-          <a:effectRef idx="2">
-            <a:schemeClr val="accent1"/>
-          </a:effectRef>
-          <a:fontRef idx="minor">
-            <a:schemeClr val="lt1"/>
-          </a:fontRef>
-        </p:style>
-        <p:txBody>
-          <a:bodyPr rtlCol="0" anchor="ctr"/>
-          <a:lstStyle/>
-          <a:p>
-            <a:pPr algn="ctr"/>
-          </a:p>
-        </p:txBody>
-      </p:sp>
-      <p:sp>
-        <p:nvSpPr>
-          <p:cNvPr id="50" name="TextBox 49"/>
-          <p:cNvSpPr txBox="1"/>
-          <p:nvPr/>
-        </p:nvSpPr>
-        <p:spPr>
-          <a:xfrm>
-            <a:off x="8933688" y="2930651"/>
-            <a:ext cx="1051560" cy="274320"/>
-          </a:xfrm>
-          <a:prstGeom prst="rect">
-            <a:avLst/>
-          </a:prstGeom>
-          <a:noFill/>
-        </p:spPr>
-        <p:txBody>
-          <a:bodyPr wrap="square" anchor="ctr" lIns="0" rIns="0" tIns="0" bIns="0">
-            <a:noAutofit/>
-          </a:bodyPr>
-          <a:lstStyle/>
-          <a:p>
-            <a:pPr algn="ctr">
-              <a:lnSpc>
-                <a:spcPct val="100000"/>
-              </a:lnSpc>
-              <a:spcBef>
-                <a:spcPts val="0"/>
-              </a:spcBef>
-              <a:spcAft>
-                <a:spcPts val="400"/>
-              </a:spcAft>
-            </a:pPr>
-            <a:r>
-              <a:rPr sz="950" b="1" i="0">
-                <a:solidFill>
-                  <a:srgbClr val="1E2761"/>
-                </a:solidFill>
-                <a:latin typeface="Inter"/>
-                <a:cs typeface="Inter"/>
-              </a:rPr>
-              <a:t>planning</a:t>
-            </a:r>
-          </a:p>
-        </p:txBody>
-      </p:sp>
-      <p:sp>
-        <p:nvSpPr>
-          <p:cNvPr id="51" name="Oval 50"/>
-          <p:cNvSpPr/>
-          <p:nvPr/>
-        </p:nvSpPr>
-        <p:spPr>
-          <a:xfrm>
-            <a:off x="10186416" y="2935223"/>
-            <a:ext cx="256032" cy="256032"/>
-          </a:xfrm>
-          <a:prstGeom prst="ellipse">
-            <a:avLst/>
-          </a:prstGeom>
-          <a:solidFill>
-            <a:srgbClr val="FFFFFF"/>
-          </a:solidFill>
-          <a:ln>
-            <a:noFill/>
-          </a:ln>
-          <a:effectLst/>
-        </p:spPr>
-        <p:style>
-          <a:lnRef idx="1">
-            <a:schemeClr val="accent1"/>
-          </a:lnRef>
-          <a:fillRef idx="3">
-            <a:schemeClr val="accent1"/>
-          </a:fillRef>
-          <a:effectRef idx="2">
-            <a:schemeClr val="accent1"/>
-          </a:effectRef>
-          <a:fontRef idx="minor">
-            <a:schemeClr val="lt1"/>
-          </a:fontRef>
-        </p:style>
-        <p:txBody>
-          <a:bodyPr rtlCol="0" anchor="ctr"/>
-          <a:lstStyle/>
-          <a:p>
-            <a:pPr algn="ctr"/>
-          </a:p>
-        </p:txBody>
-      </p:sp>
-      <p:sp>
-        <p:nvSpPr>
-          <p:cNvPr id="52" name="TextBox 51"/>
-          <p:cNvSpPr txBox="1"/>
-          <p:nvPr/>
-        </p:nvSpPr>
-        <p:spPr>
-          <a:xfrm>
-            <a:off x="10186416" y="2935223"/>
-            <a:ext cx="256032" cy="256032"/>
-          </a:xfrm>
-          <a:prstGeom prst="rect">
-            <a:avLst/>
-          </a:prstGeom>
-          <a:noFill/>
-        </p:spPr>
-        <p:txBody>
-          <a:bodyPr wrap="square" anchor="ctr" lIns="0" rIns="0" tIns="0" bIns="0">
-            <a:noAutofit/>
-          </a:bodyPr>
-          <a:lstStyle/>
-          <a:p>
-            <a:pPr algn="ctr">
-              <a:lnSpc>
-                <a:spcPct val="100000"/>
-              </a:lnSpc>
-              <a:spcBef>
-                <a:spcPts val="0"/>
-              </a:spcBef>
-              <a:spcAft>
-                <a:spcPts val="400"/>
-              </a:spcAft>
-            </a:pPr>
-            <a:r>
-              <a:rPr sz="1000" b="1" i="0">
-                <a:solidFill>
-                  <a:srgbClr val="1E2761"/>
-                </a:solidFill>
-                <a:latin typeface="Inter"/>
-                <a:cs typeface="Inter"/>
-              </a:rPr>
-              <a:t>→</a:t>
-            </a:r>
-          </a:p>
-        </p:txBody>
-      </p:sp>
-      <p:sp>
-        <p:nvSpPr>
-          <p:cNvPr id="53" name="Rounded Rectangle 52"/>
-          <p:cNvSpPr/>
-          <p:nvPr/>
-        </p:nvSpPr>
-        <p:spPr>
-          <a:xfrm>
-            <a:off x="10186416" y="2935223"/>
-            <a:ext cx="256032" cy="256032"/>
-          </a:xfrm>
-          <a:prstGeom prst="roundRect">
-            <a:avLst>
-              <a:gd name="adj" fmla="val 50000"/>
-            </a:avLst>
-          </a:prstGeom>
-          <a:noFill/>
-          <a:ln w="12700">
-            <a:solidFill>
-              <a:srgbClr val="AFC6F0"/>
-            </a:solidFill>
-          </a:ln>
-          <a:effectLst/>
-        </p:spPr>
-        <p:style>
-          <a:lnRef idx="1">
-            <a:schemeClr val="accent1"/>
-          </a:lnRef>
-          <a:fillRef idx="3">
-            <a:schemeClr val="accent1"/>
-          </a:fillRef>
-          <a:effectRef idx="2">
-            <a:schemeClr val="accent1"/>
-          </a:effectRef>
-          <a:fontRef idx="minor">
-            <a:schemeClr val="lt1"/>
-          </a:fontRef>
-        </p:style>
-        <p:txBody>
-          <a:bodyPr rtlCol="0" anchor="ctr"/>
-          <a:lstStyle/>
-          <a:p>
-            <a:pPr algn="ctr"/>
-          </a:p>
-        </p:txBody>
-      </p:sp>
-      <p:sp>
-        <p:nvSpPr>
-          <p:cNvPr id="54" name="Oval 53"/>
-          <p:cNvSpPr/>
-          <p:nvPr/>
-        </p:nvSpPr>
-        <p:spPr>
-          <a:xfrm>
-            <a:off x="10488168" y="2935223"/>
-            <a:ext cx="256032" cy="256032"/>
-          </a:xfrm>
-          <a:prstGeom prst="ellipse">
-            <a:avLst/>
-          </a:prstGeom>
-          <a:solidFill>
-            <a:srgbClr val="FFFFFF"/>
-          </a:solidFill>
-          <a:ln>
-            <a:noFill/>
-          </a:ln>
-          <a:effectLst/>
-        </p:spPr>
-        <p:style>
-          <a:lnRef idx="1">
-            <a:schemeClr val="accent1"/>
-          </a:lnRef>
-          <a:fillRef idx="3">
-            <a:schemeClr val="accent1"/>
-          </a:fillRef>
-          <a:effectRef idx="2">
-            <a:schemeClr val="accent1"/>
-          </a:effectRef>
-          <a:fontRef idx="minor">
-            <a:schemeClr val="lt1"/>
-          </a:fontRef>
-        </p:style>
-        <p:txBody>
-          <a:bodyPr rtlCol="0" anchor="ctr"/>
-          <a:lstStyle/>
-          <a:p>
-            <a:pPr algn="ctr"/>
-          </a:p>
-        </p:txBody>
-      </p:sp>
-      <p:sp>
-        <p:nvSpPr>
-          <p:cNvPr id="55" name="TextBox 54"/>
-          <p:cNvSpPr txBox="1"/>
-          <p:nvPr/>
-        </p:nvSpPr>
-        <p:spPr>
-          <a:xfrm>
-            <a:off x="10488168" y="2935223"/>
-            <a:ext cx="256032" cy="256032"/>
-          </a:xfrm>
-          <a:prstGeom prst="rect">
-            <a:avLst/>
-          </a:prstGeom>
-          <a:noFill/>
-        </p:spPr>
-        <p:txBody>
-          <a:bodyPr wrap="square" anchor="ctr" lIns="0" rIns="0" tIns="0" bIns="0">
-            <a:noAutofit/>
-          </a:bodyPr>
-          <a:lstStyle/>
-          <a:p>
-            <a:pPr algn="ctr">
-              <a:lnSpc>
-                <a:spcPct val="100000"/>
-              </a:lnSpc>
-              <a:spcBef>
-                <a:spcPts val="0"/>
-              </a:spcBef>
-              <a:spcAft>
-                <a:spcPts val="400"/>
-              </a:spcAft>
-            </a:pPr>
-            <a:r>
-              <a:rPr sz="1000" b="1" i="0">
-                <a:solidFill>
-                  <a:srgbClr val="5B6B85"/>
-                </a:solidFill>
-                <a:latin typeface="Inter"/>
-                <a:cs typeface="Inter"/>
-              </a:rPr>
-              <a:t>⧉</a:t>
-            </a:r>
-          </a:p>
-        </p:txBody>
-      </p:sp>
-      <p:sp>
-        <p:nvSpPr>
-          <p:cNvPr id="56" name="Rounded Rectangle 55"/>
-          <p:cNvSpPr/>
-          <p:nvPr/>
-        </p:nvSpPr>
-        <p:spPr>
-          <a:xfrm>
-            <a:off x="10488168" y="2935223"/>
-            <a:ext cx="256032" cy="256032"/>
-          </a:xfrm>
-          <a:prstGeom prst="roundRect">
-            <a:avLst>
-              <a:gd name="adj" fmla="val 50000"/>
-            </a:avLst>
-          </a:prstGeom>
-          <a:noFill/>
-          <a:ln w="12700">
-            <a:solidFill>
-              <a:srgbClr val="AFC6F0"/>
-            </a:solidFill>
-          </a:ln>
-          <a:effectLst/>
-        </p:spPr>
-        <p:style>
-          <a:lnRef idx="1">
-            <a:schemeClr val="accent1"/>
-          </a:lnRef>
-          <a:fillRef idx="3">
-            <a:schemeClr val="accent1"/>
-          </a:fillRef>
-          <a:effectRef idx="2">
-            <a:schemeClr val="accent1"/>
-          </a:effectRef>
-          <a:fontRef idx="minor">
-            <a:schemeClr val="lt1"/>
-          </a:fontRef>
-        </p:style>
-        <p:txBody>
-          <a:bodyPr rtlCol="0" anchor="ctr"/>
-          <a:lstStyle/>
-          <a:p>
-            <a:pPr algn="ctr"/>
-          </a:p>
-        </p:txBody>
-      </p:sp>
-      <p:sp>
-        <p:nvSpPr>
-          <p:cNvPr id="57" name="Oval 56"/>
-          <p:cNvSpPr/>
-          <p:nvPr/>
-        </p:nvSpPr>
-        <p:spPr>
-          <a:xfrm>
-            <a:off x="10789920" y="2935223"/>
-            <a:ext cx="256032" cy="256032"/>
-          </a:xfrm>
-          <a:prstGeom prst="ellipse">
-            <a:avLst/>
-          </a:prstGeom>
-          <a:solidFill>
-            <a:srgbClr val="FFFFFF"/>
-          </a:solidFill>
-          <a:ln>
-            <a:noFill/>
-          </a:ln>
-          <a:effectLst/>
-        </p:spPr>
-        <p:style>
-          <a:lnRef idx="1">
-            <a:schemeClr val="accent1"/>
-          </a:lnRef>
-          <a:fillRef idx="3">
-            <a:schemeClr val="accent1"/>
-          </a:fillRef>
-          <a:effectRef idx="2">
-            <a:schemeClr val="accent1"/>
-          </a:effectRef>
-          <a:fontRef idx="minor">
-            <a:schemeClr val="lt1"/>
-          </a:fontRef>
-        </p:style>
-        <p:txBody>
-          <a:bodyPr rtlCol="0" anchor="ctr"/>
-          <a:lstStyle/>
-          <a:p>
-            <a:pPr algn="ctr"/>
-          </a:p>
-        </p:txBody>
-      </p:sp>
-      <p:sp>
-        <p:nvSpPr>
-          <p:cNvPr id="58" name="TextBox 57"/>
-          <p:cNvSpPr txBox="1"/>
-          <p:nvPr/>
-        </p:nvSpPr>
-        <p:spPr>
-          <a:xfrm>
-            <a:off x="10789920" y="2935223"/>
-            <a:ext cx="256032" cy="256032"/>
-          </a:xfrm>
-          <a:prstGeom prst="rect">
-            <a:avLst/>
-          </a:prstGeom>
-          <a:noFill/>
-        </p:spPr>
-        <p:txBody>
-          <a:bodyPr wrap="square" anchor="ctr" lIns="0" rIns="0" tIns="0" bIns="0">
-            <a:noAutofit/>
-          </a:bodyPr>
-          <a:lstStyle/>
-          <a:p>
-            <a:pPr algn="ctr">
-              <a:lnSpc>
-                <a:spcPct val="100000"/>
-              </a:lnSpc>
-              <a:spcBef>
-                <a:spcPts val="0"/>
-              </a:spcBef>
-              <a:spcAft>
-                <a:spcPts val="400"/>
-              </a:spcAft>
-            </a:pPr>
-            <a:r>
-              <a:rPr sz="1000" b="1" i="0">
-                <a:solidFill>
-                  <a:srgbClr val="C3423F"/>
-                </a:solidFill>
-                <a:latin typeface="Inter"/>
-                <a:cs typeface="Inter"/>
-              </a:rPr>
-              <a:t>✕</a:t>
-            </a:r>
-          </a:p>
-        </p:txBody>
-      </p:sp>
-      <p:sp>
-        <p:nvSpPr>
-          <p:cNvPr id="59" name="Rounded Rectangle 58"/>
-          <p:cNvSpPr/>
-          <p:nvPr/>
-        </p:nvSpPr>
-        <p:spPr>
-          <a:xfrm>
-            <a:off x="10789920" y="2935223"/>
-            <a:ext cx="256032" cy="256032"/>
-          </a:xfrm>
-          <a:prstGeom prst="roundRect">
-            <a:avLst>
-              <a:gd name="adj" fmla="val 50000"/>
-            </a:avLst>
-          </a:prstGeom>
-          <a:noFill/>
-          <a:ln w="12700">
-            <a:solidFill>
-              <a:srgbClr val="AFC6F0"/>
-            </a:solidFill>
-          </a:ln>
-          <a:effectLst/>
-        </p:spPr>
-        <p:style>
-          <a:lnRef idx="1">
-            <a:schemeClr val="accent1"/>
-          </a:lnRef>
-          <a:fillRef idx="3">
-            <a:schemeClr val="accent1"/>
-          </a:fillRef>
-          <a:effectRef idx="2">
-            <a:schemeClr val="accent1"/>
-          </a:effectRef>
-          <a:fontRef idx="minor">
-            <a:schemeClr val="lt1"/>
-          </a:fontRef>
-        </p:style>
-        <p:txBody>
-          <a:bodyPr rtlCol="0" anchor="ctr"/>
-          <a:lstStyle/>
-          <a:p>
-            <a:pPr algn="ctr"/>
-          </a:p>
-        </p:txBody>
-      </p:sp>
-      <p:sp>
-        <p:nvSpPr>
-          <p:cNvPr id="60" name="Rounded Rectangle 59"/>
-          <p:cNvSpPr/>
-          <p:nvPr/>
-        </p:nvSpPr>
-        <p:spPr>
-          <a:xfrm>
-            <a:off x="6144768" y="3383279"/>
-            <a:ext cx="4919472" cy="457200"/>
-          </a:xfrm>
-          <a:prstGeom prst="roundRect">
-            <a:avLst>
-              <a:gd name="adj" fmla="val 10000"/>
-            </a:avLst>
-          </a:prstGeom>
-          <a:solidFill>
-            <a:srgbClr val="FFFFFF"/>
-          </a:solidFill>
-          <a:ln w="12700">
-            <a:solidFill>
-              <a:srgbClr val="E3E6EC"/>
-            </a:solidFill>
-          </a:ln>
-          <a:effectLst/>
-        </p:spPr>
-        <p:style>
-          <a:lnRef idx="1">
-            <a:schemeClr val="accent1"/>
-          </a:lnRef>
-          <a:fillRef idx="3">
-            <a:schemeClr val="accent1"/>
-          </a:fillRef>
-          <a:effectRef idx="2">
-            <a:schemeClr val="accent1"/>
-          </a:effectRef>
-          <a:fontRef idx="minor">
-            <a:schemeClr val="lt1"/>
-          </a:fontRef>
-        </p:style>
-        <p:txBody>
-          <a:bodyPr rtlCol="0" anchor="ctr"/>
-          <a:lstStyle/>
-          <a:p>
-            <a:pPr algn="ctr"/>
-          </a:p>
-        </p:txBody>
-      </p:sp>
-      <p:sp>
-        <p:nvSpPr>
-          <p:cNvPr id="61" name="TextBox 60"/>
-          <p:cNvSpPr txBox="1"/>
-          <p:nvPr/>
-        </p:nvSpPr>
-        <p:spPr>
-          <a:xfrm>
-            <a:off x="6309360" y="3383279"/>
-            <a:ext cx="2514600" cy="457200"/>
-          </a:xfrm>
-          <a:prstGeom prst="rect">
-            <a:avLst/>
-          </a:prstGeom>
-          <a:noFill/>
-        </p:spPr>
-        <p:txBody>
-          <a:bodyPr wrap="square" anchor="ctr" lIns="0" rIns="0" tIns="0" bIns="0">
-            <a:noAutofit/>
-          </a:bodyPr>
-          <a:lstStyle/>
-          <a:p>
-            <a:pPr algn="l">
-              <a:lnSpc>
-                <a:spcPct val="100000"/>
-              </a:lnSpc>
-              <a:spcBef>
-                <a:spcPts val="0"/>
-              </a:spcBef>
-              <a:spcAft>
-                <a:spcPts val="400"/>
-              </a:spcAft>
-            </a:pPr>
-            <a:r>
-              <a:rPr sz="1000" b="1" i="0">
-                <a:solidFill>
-                  <a:srgbClr val="0E1735"/>
-                </a:solidFill>
-                <a:latin typeface="Inter"/>
-                <a:cs typeface="Inter"/>
-              </a:rPr>
-              <a:t>Onboarding-Assistent</a:t>
-            </a:r>
-          </a:p>
-        </p:txBody>
-      </p:sp>
-      <p:sp>
-        <p:nvSpPr>
-          <p:cNvPr id="62" name="Rounded Rectangle 61"/>
-          <p:cNvSpPr/>
-          <p:nvPr/>
-        </p:nvSpPr>
-        <p:spPr>
-          <a:xfrm>
-            <a:off x="8933688" y="3483863"/>
-            <a:ext cx="1051560" cy="274320"/>
-          </a:xfrm>
-          <a:prstGeom prst="roundRect">
-            <a:avLst>
-              <a:gd name="adj" fmla="val 50000"/>
-            </a:avLst>
-          </a:prstGeom>
-          <a:solidFill>
-            <a:srgbClr val="E8A33A"/>
-          </a:solidFill>
-          <a:ln>
-            <a:noFill/>
-          </a:ln>
-          <a:effectLst/>
-        </p:spPr>
-        <p:style>
-          <a:lnRef idx="1">
-            <a:schemeClr val="accent1"/>
-          </a:lnRef>
-          <a:fillRef idx="3">
-            <a:schemeClr val="accent1"/>
-          </a:fillRef>
-          <a:effectRef idx="2">
-            <a:schemeClr val="accent1"/>
-          </a:effectRef>
-          <a:fontRef idx="minor">
-            <a:schemeClr val="lt1"/>
-          </a:fontRef>
-        </p:style>
-        <p:txBody>
-          <a:bodyPr rtlCol="0" anchor="ctr"/>
-          <a:lstStyle/>
-          <a:p>
-            <a:pPr algn="ctr"/>
-          </a:p>
-        </p:txBody>
-      </p:sp>
-      <p:sp>
-        <p:nvSpPr>
-          <p:cNvPr id="63" name="TextBox 62"/>
-          <p:cNvSpPr txBox="1"/>
-          <p:nvPr/>
-        </p:nvSpPr>
-        <p:spPr>
-          <a:xfrm>
-            <a:off x="8933688" y="3479291"/>
-            <a:ext cx="1051560" cy="274320"/>
-          </a:xfrm>
-          <a:prstGeom prst="rect">
-            <a:avLst/>
-          </a:prstGeom>
-          <a:noFill/>
-        </p:spPr>
-        <p:txBody>
-          <a:bodyPr wrap="square" anchor="ctr" lIns="0" rIns="0" tIns="0" bIns="0">
-            <a:noAutofit/>
-          </a:bodyPr>
-          <a:lstStyle/>
-          <a:p>
-            <a:pPr algn="ctr">
-              <a:lnSpc>
-                <a:spcPct val="100000"/>
-              </a:lnSpc>
-              <a:spcBef>
-                <a:spcPts val="0"/>
-              </a:spcBef>
-              <a:spcAft>
-                <a:spcPts val="400"/>
-              </a:spcAft>
-            </a:pPr>
-            <a:r>
-              <a:rPr sz="950" b="1" i="0">
-                <a:solidFill>
-                  <a:srgbClr val="0E1735"/>
-                </a:solidFill>
-                <a:latin typeface="Inter"/>
-                <a:cs typeface="Inter"/>
-              </a:rPr>
-              <a:t>reviewing</a:t>
-            </a:r>
-          </a:p>
-        </p:txBody>
-      </p:sp>
-      <p:sp>
-        <p:nvSpPr>
-          <p:cNvPr id="64" name="Oval 63"/>
-          <p:cNvSpPr/>
-          <p:nvPr/>
-        </p:nvSpPr>
-        <p:spPr>
-          <a:xfrm>
-            <a:off x="10186416" y="3483863"/>
-            <a:ext cx="256032" cy="256032"/>
-          </a:xfrm>
-          <a:prstGeom prst="ellipse">
-            <a:avLst/>
-          </a:prstGeom>
-          <a:solidFill>
-            <a:srgbClr val="FFFFFF"/>
-          </a:solidFill>
-          <a:ln>
-            <a:noFill/>
-          </a:ln>
-          <a:effectLst/>
-        </p:spPr>
-        <p:style>
-          <a:lnRef idx="1">
-            <a:schemeClr val="accent1"/>
-          </a:lnRef>
-          <a:fillRef idx="3">
-            <a:schemeClr val="accent1"/>
-          </a:fillRef>
-          <a:effectRef idx="2">
-            <a:schemeClr val="accent1"/>
-          </a:effectRef>
-          <a:fontRef idx="minor">
-            <a:schemeClr val="lt1"/>
-          </a:fontRef>
-        </p:style>
-        <p:txBody>
-          <a:bodyPr rtlCol="0" anchor="ctr"/>
-          <a:lstStyle/>
-          <a:p>
-            <a:pPr algn="ctr"/>
-          </a:p>
-        </p:txBody>
-      </p:sp>
-      <p:sp>
-        <p:nvSpPr>
-          <p:cNvPr id="65" name="TextBox 64"/>
-          <p:cNvSpPr txBox="1"/>
-          <p:nvPr/>
-        </p:nvSpPr>
-        <p:spPr>
-          <a:xfrm>
-            <a:off x="10186416" y="3483863"/>
-            <a:ext cx="256032" cy="256032"/>
-          </a:xfrm>
-          <a:prstGeom prst="rect">
-            <a:avLst/>
-          </a:prstGeom>
-          <a:noFill/>
-        </p:spPr>
-        <p:txBody>
-          <a:bodyPr wrap="square" anchor="ctr" lIns="0" rIns="0" tIns="0" bIns="0">
-            <a:noAutofit/>
-          </a:bodyPr>
-          <a:lstStyle/>
-          <a:p>
-            <a:pPr algn="ctr">
-              <a:lnSpc>
-                <a:spcPct val="100000"/>
-              </a:lnSpc>
-              <a:spcBef>
-                <a:spcPts val="0"/>
-              </a:spcBef>
-              <a:spcAft>
-                <a:spcPts val="400"/>
-              </a:spcAft>
-            </a:pPr>
-            <a:r>
-              <a:rPr sz="1000" b="1" i="0">
-                <a:solidFill>
-                  <a:srgbClr val="1E2761"/>
-                </a:solidFill>
-                <a:latin typeface="Inter"/>
-                <a:cs typeface="Inter"/>
-              </a:rPr>
-              <a:t>→</a:t>
-            </a:r>
-          </a:p>
-        </p:txBody>
-      </p:sp>
-      <p:sp>
-        <p:nvSpPr>
-          <p:cNvPr id="66" name="Rounded Rectangle 65"/>
-          <p:cNvSpPr/>
-          <p:nvPr/>
-        </p:nvSpPr>
-        <p:spPr>
-          <a:xfrm>
-            <a:off x="10186416" y="3483863"/>
-            <a:ext cx="256032" cy="256032"/>
-          </a:xfrm>
-          <a:prstGeom prst="roundRect">
-            <a:avLst>
-              <a:gd name="adj" fmla="val 50000"/>
-            </a:avLst>
-          </a:prstGeom>
-          <a:noFill/>
-          <a:ln w="12700">
-            <a:solidFill>
-              <a:srgbClr val="AFC6F0"/>
-            </a:solidFill>
-          </a:ln>
-          <a:effectLst/>
-        </p:spPr>
-        <p:style>
-          <a:lnRef idx="1">
-            <a:schemeClr val="accent1"/>
-          </a:lnRef>
-          <a:fillRef idx="3">
-            <a:schemeClr val="accent1"/>
-          </a:fillRef>
-          <a:effectRef idx="2">
-            <a:schemeClr val="accent1"/>
-          </a:effectRef>
-          <a:fontRef idx="minor">
-            <a:schemeClr val="lt1"/>
-          </a:fontRef>
-        </p:style>
-        <p:txBody>
-          <a:bodyPr rtlCol="0" anchor="ctr"/>
-          <a:lstStyle/>
-          <a:p>
-            <a:pPr algn="ctr"/>
-          </a:p>
-        </p:txBody>
-      </p:sp>
-      <p:sp>
-        <p:nvSpPr>
-          <p:cNvPr id="67" name="Oval 66"/>
-          <p:cNvSpPr/>
-          <p:nvPr/>
-        </p:nvSpPr>
-        <p:spPr>
-          <a:xfrm>
-            <a:off x="10488168" y="3483863"/>
-            <a:ext cx="256032" cy="256032"/>
-          </a:xfrm>
-          <a:prstGeom prst="ellipse">
-            <a:avLst/>
-          </a:prstGeom>
-          <a:solidFill>
-            <a:srgbClr val="FFFFFF"/>
-          </a:solidFill>
-          <a:ln>
-            <a:noFill/>
-          </a:ln>
-          <a:effectLst/>
-        </p:spPr>
-        <p:style>
-          <a:lnRef idx="1">
-            <a:schemeClr val="accent1"/>
-          </a:lnRef>
-          <a:fillRef idx="3">
-            <a:schemeClr val="accent1"/>
-          </a:fillRef>
-          <a:effectRef idx="2">
-            <a:schemeClr val="accent1"/>
-          </a:effectRef>
-          <a:fontRef idx="minor">
-            <a:schemeClr val="lt1"/>
-          </a:fontRef>
-        </p:style>
-        <p:txBody>
-          <a:bodyPr rtlCol="0" anchor="ctr"/>
-          <a:lstStyle/>
-          <a:p>
-            <a:pPr algn="ctr"/>
-          </a:p>
-        </p:txBody>
-      </p:sp>
-      <p:sp>
-        <p:nvSpPr>
-          <p:cNvPr id="68" name="TextBox 67"/>
-          <p:cNvSpPr txBox="1"/>
-          <p:nvPr/>
-        </p:nvSpPr>
-        <p:spPr>
-          <a:xfrm>
-            <a:off x="10488168" y="3483863"/>
-            <a:ext cx="256032" cy="256032"/>
-          </a:xfrm>
-          <a:prstGeom prst="rect">
-            <a:avLst/>
-          </a:prstGeom>
-          <a:noFill/>
-        </p:spPr>
-        <p:txBody>
-          <a:bodyPr wrap="square" anchor="ctr" lIns="0" rIns="0" tIns="0" bIns="0">
-            <a:noAutofit/>
-          </a:bodyPr>
-          <a:lstStyle/>
-          <a:p>
-            <a:pPr algn="ctr">
-              <a:lnSpc>
-                <a:spcPct val="100000"/>
-              </a:lnSpc>
-              <a:spcBef>
-                <a:spcPts val="0"/>
-              </a:spcBef>
-              <a:spcAft>
-                <a:spcPts val="400"/>
-              </a:spcAft>
-            </a:pPr>
-            <a:r>
-              <a:rPr sz="1000" b="1" i="0">
-                <a:solidFill>
-                  <a:srgbClr val="5B6B85"/>
-                </a:solidFill>
-                <a:latin typeface="Inter"/>
-                <a:cs typeface="Inter"/>
-              </a:rPr>
-              <a:t>⧉</a:t>
-            </a:r>
-          </a:p>
-        </p:txBody>
-      </p:sp>
-      <p:sp>
-        <p:nvSpPr>
-          <p:cNvPr id="69" name="Rounded Rectangle 68"/>
-          <p:cNvSpPr/>
-          <p:nvPr/>
-        </p:nvSpPr>
-        <p:spPr>
-          <a:xfrm>
-            <a:off x="10488168" y="3483863"/>
-            <a:ext cx="256032" cy="256032"/>
-          </a:xfrm>
-          <a:prstGeom prst="roundRect">
-            <a:avLst>
-              <a:gd name="adj" fmla="val 50000"/>
-            </a:avLst>
-          </a:prstGeom>
-          <a:noFill/>
-          <a:ln w="12700">
-            <a:solidFill>
-              <a:srgbClr val="AFC6F0"/>
-            </a:solidFill>
-          </a:ln>
-          <a:effectLst/>
-        </p:spPr>
-        <p:style>
-          <a:lnRef idx="1">
-            <a:schemeClr val="accent1"/>
-          </a:lnRef>
-          <a:fillRef idx="3">
-            <a:schemeClr val="accent1"/>
-          </a:fillRef>
-          <a:effectRef idx="2">
-            <a:schemeClr val="accent1"/>
-          </a:effectRef>
-          <a:fontRef idx="minor">
-            <a:schemeClr val="lt1"/>
-          </a:fontRef>
-        </p:style>
-        <p:txBody>
-          <a:bodyPr rtlCol="0" anchor="ctr"/>
-          <a:lstStyle/>
-          <a:p>
-            <a:pPr algn="ctr"/>
-          </a:p>
-        </p:txBody>
-      </p:sp>
-      <p:sp>
-        <p:nvSpPr>
-          <p:cNvPr id="70" name="Oval 69"/>
-          <p:cNvSpPr/>
-          <p:nvPr/>
-        </p:nvSpPr>
-        <p:spPr>
-          <a:xfrm>
-            <a:off x="10789920" y="3483863"/>
-            <a:ext cx="256032" cy="256032"/>
-          </a:xfrm>
-          <a:prstGeom prst="ellipse">
-            <a:avLst/>
-          </a:prstGeom>
-          <a:solidFill>
-            <a:srgbClr val="FFFFFF"/>
-          </a:solidFill>
-          <a:ln>
-            <a:noFill/>
-          </a:ln>
-          <a:effectLst/>
-        </p:spPr>
-        <p:style>
-          <a:lnRef idx="1">
-            <a:schemeClr val="accent1"/>
-          </a:lnRef>
-          <a:fillRef idx="3">
-            <a:schemeClr val="accent1"/>
-          </a:fillRef>
-          <a:effectRef idx="2">
-            <a:schemeClr val="accent1"/>
-          </a:effectRef>
-          <a:fontRef idx="minor">
-            <a:schemeClr val="lt1"/>
-          </a:fontRef>
-        </p:style>
-        <p:txBody>
-          <a:bodyPr rtlCol="0" anchor="ctr"/>
-          <a:lstStyle/>
-          <a:p>
-            <a:pPr algn="ctr"/>
-          </a:p>
-        </p:txBody>
-      </p:sp>
-      <p:sp>
-        <p:nvSpPr>
-          <p:cNvPr id="71" name="TextBox 70"/>
-          <p:cNvSpPr txBox="1"/>
-          <p:nvPr/>
-        </p:nvSpPr>
-        <p:spPr>
-          <a:xfrm>
-            <a:off x="10789920" y="3483863"/>
-            <a:ext cx="256032" cy="256032"/>
-          </a:xfrm>
-          <a:prstGeom prst="rect">
-            <a:avLst/>
-          </a:prstGeom>
-          <a:noFill/>
-        </p:spPr>
-        <p:txBody>
-          <a:bodyPr wrap="square" anchor="ctr" lIns="0" rIns="0" tIns="0" bIns="0">
-            <a:noAutofit/>
-          </a:bodyPr>
-          <a:lstStyle/>
-          <a:p>
-            <a:pPr algn="ctr">
-              <a:lnSpc>
-                <a:spcPct val="100000"/>
-              </a:lnSpc>
-              <a:spcBef>
-                <a:spcPts val="0"/>
-              </a:spcBef>
-              <a:spcAft>
-                <a:spcPts val="400"/>
-              </a:spcAft>
-            </a:pPr>
-            <a:r>
-              <a:rPr sz="1000" b="1" i="0">
-                <a:solidFill>
-                  <a:srgbClr val="C3423F"/>
-                </a:solidFill>
-                <a:latin typeface="Inter"/>
-                <a:cs typeface="Inter"/>
-              </a:rPr>
-              <a:t>✕</a:t>
-            </a:r>
-          </a:p>
-        </p:txBody>
-      </p:sp>
-      <p:sp>
-        <p:nvSpPr>
-          <p:cNvPr id="72" name="Rounded Rectangle 71"/>
-          <p:cNvSpPr/>
-          <p:nvPr/>
-        </p:nvSpPr>
-        <p:spPr>
-          <a:xfrm>
-            <a:off x="10789920" y="3483863"/>
-            <a:ext cx="256032" cy="256032"/>
-          </a:xfrm>
-          <a:prstGeom prst="roundRect">
-            <a:avLst>
-              <a:gd name="adj" fmla="val 50000"/>
-            </a:avLst>
-          </a:prstGeom>
-          <a:noFill/>
-          <a:ln w="12700">
-            <a:solidFill>
-              <a:srgbClr val="AFC6F0"/>
-            </a:solidFill>
-          </a:ln>
-          <a:effectLst/>
-        </p:spPr>
-        <p:style>
-          <a:lnRef idx="1">
-            <a:schemeClr val="accent1"/>
-          </a:lnRef>
-          <a:fillRef idx="3">
-            <a:schemeClr val="accent1"/>
-          </a:fillRef>
-          <a:effectRef idx="2">
-            <a:schemeClr val="accent1"/>
-          </a:effectRef>
-          <a:fontRef idx="minor">
-            <a:schemeClr val="lt1"/>
-          </a:fontRef>
-        </p:style>
-        <p:txBody>
-          <a:bodyPr rtlCol="0" anchor="ctr"/>
-          <a:lstStyle/>
-          <a:p>
-            <a:pPr algn="ctr"/>
-          </a:p>
-        </p:txBody>
-      </p:sp>
-      <p:sp>
-        <p:nvSpPr>
-          <p:cNvPr id="73" name="Rounded Rectangle 72"/>
-          <p:cNvSpPr/>
-          <p:nvPr/>
-        </p:nvSpPr>
-        <p:spPr>
-          <a:xfrm>
-            <a:off x="6144768" y="3931920"/>
-            <a:ext cx="4919472" cy="457200"/>
-          </a:xfrm>
-          <a:prstGeom prst="roundRect">
-            <a:avLst>
-              <a:gd name="adj" fmla="val 10000"/>
-            </a:avLst>
-          </a:prstGeom>
-          <a:solidFill>
-            <a:srgbClr val="FFFFFF"/>
-          </a:solidFill>
-          <a:ln w="12700">
-            <a:solidFill>
-              <a:srgbClr val="E3E6EC"/>
-            </a:solidFill>
-          </a:ln>
-          <a:effectLst/>
-        </p:spPr>
-        <p:style>
-          <a:lnRef idx="1">
-            <a:schemeClr val="accent1"/>
-          </a:lnRef>
-          <a:fillRef idx="3">
-            <a:schemeClr val="accent1"/>
-          </a:fillRef>
-          <a:effectRef idx="2">
-            <a:schemeClr val="accent1"/>
-          </a:effectRef>
-          <a:fontRef idx="minor">
-            <a:schemeClr val="lt1"/>
-          </a:fontRef>
-        </p:style>
-        <p:txBody>
-          <a:bodyPr rtlCol="0" anchor="ctr"/>
-          <a:lstStyle/>
-          <a:p>
-            <a:pPr algn="ctr"/>
-          </a:p>
-        </p:txBody>
-      </p:sp>
-      <p:sp>
-        <p:nvSpPr>
-          <p:cNvPr id="74" name="TextBox 73"/>
-          <p:cNvSpPr txBox="1"/>
-          <p:nvPr/>
-        </p:nvSpPr>
-        <p:spPr>
-          <a:xfrm>
-            <a:off x="6309360" y="3931920"/>
-            <a:ext cx="2514600" cy="457200"/>
-          </a:xfrm>
-          <a:prstGeom prst="rect">
-            <a:avLst/>
-          </a:prstGeom>
-          <a:noFill/>
-        </p:spPr>
-        <p:txBody>
-          <a:bodyPr wrap="square" anchor="ctr" lIns="0" rIns="0" tIns="0" bIns="0">
-            <a:noAutofit/>
-          </a:bodyPr>
-          <a:lstStyle/>
-          <a:p>
-            <a:pPr algn="l">
-              <a:lnSpc>
-                <a:spcPct val="100000"/>
-              </a:lnSpc>
-              <a:spcBef>
-                <a:spcPts val="0"/>
-              </a:spcBef>
-              <a:spcAft>
-                <a:spcPts val="400"/>
-              </a:spcAft>
-            </a:pPr>
-            <a:r>
-              <a:rPr sz="1000" b="1" i="0">
-                <a:solidFill>
-                  <a:srgbClr val="0E1735"/>
-                </a:solidFill>
-                <a:latin typeface="Inter"/>
-                <a:cs typeface="Inter"/>
-              </a:rPr>
-              <a:t>Vertrags-Prüfer</a:t>
-            </a:r>
-          </a:p>
-        </p:txBody>
-      </p:sp>
-      <p:sp>
-        <p:nvSpPr>
-          <p:cNvPr id="75" name="Rounded Rectangle 74"/>
-          <p:cNvSpPr/>
-          <p:nvPr/>
-        </p:nvSpPr>
-        <p:spPr>
-          <a:xfrm>
-            <a:off x="8933688" y="4032504"/>
-            <a:ext cx="1051560" cy="274320"/>
-          </a:xfrm>
-          <a:prstGeom prst="roundRect">
-            <a:avLst>
-              <a:gd name="adj" fmla="val 50000"/>
-            </a:avLst>
-          </a:prstGeom>
-          <a:solidFill>
-            <a:srgbClr val="5A9367"/>
-          </a:solidFill>
-          <a:ln>
-            <a:noFill/>
-          </a:ln>
-          <a:effectLst/>
-        </p:spPr>
-        <p:style>
-          <a:lnRef idx="1">
-            <a:schemeClr val="accent1"/>
-          </a:lnRef>
-          <a:fillRef idx="3">
-            <a:schemeClr val="accent1"/>
-          </a:fillRef>
-          <a:effectRef idx="2">
-            <a:schemeClr val="accent1"/>
-          </a:effectRef>
-          <a:fontRef idx="minor">
-            <a:schemeClr val="lt1"/>
-          </a:fontRef>
-        </p:style>
-        <p:txBody>
-          <a:bodyPr rtlCol="0" anchor="ctr"/>
-          <a:lstStyle/>
-          <a:p>
-            <a:pPr algn="ctr"/>
-          </a:p>
-        </p:txBody>
-      </p:sp>
-      <p:sp>
-        <p:nvSpPr>
-          <p:cNvPr id="76" name="TextBox 75"/>
-          <p:cNvSpPr txBox="1"/>
-          <p:nvPr/>
-        </p:nvSpPr>
-        <p:spPr>
-          <a:xfrm>
-            <a:off x="8933688" y="4027932"/>
-            <a:ext cx="1051560" cy="274320"/>
-          </a:xfrm>
-          <a:prstGeom prst="rect">
-            <a:avLst/>
-          </a:prstGeom>
-          <a:noFill/>
-        </p:spPr>
-        <p:txBody>
-          <a:bodyPr wrap="square" anchor="ctr" lIns="0" rIns="0" tIns="0" bIns="0">
-            <a:noAutofit/>
-          </a:bodyPr>
-          <a:lstStyle/>
-          <a:p>
-            <a:pPr algn="ctr">
-              <a:lnSpc>
-                <a:spcPct val="100000"/>
-              </a:lnSpc>
-              <a:spcBef>
-                <a:spcPts val="0"/>
-              </a:spcBef>
-              <a:spcAft>
-                <a:spcPts val="400"/>
-              </a:spcAft>
-            </a:pPr>
-            <a:r>
-              <a:rPr sz="950" b="1" i="0">
-                <a:solidFill>
-                  <a:srgbClr val="FFFFFF"/>
-                </a:solidFill>
-                <a:latin typeface="Inter"/>
-                <a:cs typeface="Inter"/>
-              </a:rPr>
-              <a:t>approved</a:t>
-            </a:r>
-          </a:p>
-        </p:txBody>
-      </p:sp>
-      <p:sp>
-        <p:nvSpPr>
-          <p:cNvPr id="77" name="Oval 76"/>
-          <p:cNvSpPr/>
-          <p:nvPr/>
-        </p:nvSpPr>
-        <p:spPr>
-          <a:xfrm>
-            <a:off x="10186416" y="4032504"/>
-            <a:ext cx="256032" cy="256032"/>
-          </a:xfrm>
-          <a:prstGeom prst="ellipse">
-            <a:avLst/>
-          </a:prstGeom>
-          <a:solidFill>
-            <a:srgbClr val="FFFFFF"/>
-          </a:solidFill>
-          <a:ln>
-            <a:noFill/>
-          </a:ln>
-          <a:effectLst/>
-        </p:spPr>
-        <p:style>
-          <a:lnRef idx="1">
-            <a:schemeClr val="accent1"/>
-          </a:lnRef>
-          <a:fillRef idx="3">
-            <a:schemeClr val="accent1"/>
-          </a:fillRef>
-          <a:effectRef idx="2">
-            <a:schemeClr val="accent1"/>
-          </a:effectRef>
-          <a:fontRef idx="minor">
-            <a:schemeClr val="lt1"/>
-          </a:fontRef>
-        </p:style>
-        <p:txBody>
-          <a:bodyPr rtlCol="0" anchor="ctr"/>
-          <a:lstStyle/>
-          <a:p>
-            <a:pPr algn="ctr"/>
-          </a:p>
-        </p:txBody>
-      </p:sp>
-      <p:sp>
-        <p:nvSpPr>
-          <p:cNvPr id="78" name="TextBox 77"/>
-          <p:cNvSpPr txBox="1"/>
-          <p:nvPr/>
-        </p:nvSpPr>
-        <p:spPr>
-          <a:xfrm>
-            <a:off x="10186416" y="4032504"/>
-            <a:ext cx="256032" cy="256032"/>
-          </a:xfrm>
-          <a:prstGeom prst="rect">
-            <a:avLst/>
-          </a:prstGeom>
-          <a:noFill/>
-        </p:spPr>
-        <p:txBody>
-          <a:bodyPr wrap="square" anchor="ctr" lIns="0" rIns="0" tIns="0" bIns="0">
-            <a:noAutofit/>
-          </a:bodyPr>
-          <a:lstStyle/>
-          <a:p>
-            <a:pPr algn="ctr">
-              <a:lnSpc>
-                <a:spcPct val="100000"/>
-              </a:lnSpc>
-              <a:spcBef>
-                <a:spcPts val="0"/>
-              </a:spcBef>
-              <a:spcAft>
-                <a:spcPts val="400"/>
-              </a:spcAft>
-            </a:pPr>
-            <a:r>
-              <a:rPr sz="1000" b="1" i="0">
-                <a:solidFill>
-                  <a:srgbClr val="1E2761"/>
-                </a:solidFill>
-                <a:latin typeface="Inter"/>
-                <a:cs typeface="Inter"/>
-              </a:rPr>
-              <a:t>→</a:t>
-            </a:r>
-          </a:p>
-        </p:txBody>
-      </p:sp>
-      <p:sp>
-        <p:nvSpPr>
-          <p:cNvPr id="79" name="Rounded Rectangle 78"/>
-          <p:cNvSpPr/>
-          <p:nvPr/>
-        </p:nvSpPr>
-        <p:spPr>
-          <a:xfrm>
-            <a:off x="10186416" y="4032504"/>
-            <a:ext cx="256032" cy="256032"/>
-          </a:xfrm>
-          <a:prstGeom prst="roundRect">
-            <a:avLst>
-              <a:gd name="adj" fmla="val 50000"/>
-            </a:avLst>
-          </a:prstGeom>
-          <a:noFill/>
-          <a:ln w="12700">
-            <a:solidFill>
-              <a:srgbClr val="AFC6F0"/>
-            </a:solidFill>
-          </a:ln>
-          <a:effectLst/>
-        </p:spPr>
-        <p:style>
-          <a:lnRef idx="1">
-            <a:schemeClr val="accent1"/>
-          </a:lnRef>
-          <a:fillRef idx="3">
-            <a:schemeClr val="accent1"/>
-          </a:fillRef>
-          <a:effectRef idx="2">
-            <a:schemeClr val="accent1"/>
-          </a:effectRef>
-          <a:fontRef idx="minor">
-            <a:schemeClr val="lt1"/>
-          </a:fontRef>
-        </p:style>
-        <p:txBody>
-          <a:bodyPr rtlCol="0" anchor="ctr"/>
-          <a:lstStyle/>
-          <a:p>
-            <a:pPr algn="ctr"/>
-          </a:p>
-        </p:txBody>
-      </p:sp>
-      <p:sp>
-        <p:nvSpPr>
-          <p:cNvPr id="80" name="Oval 79"/>
-          <p:cNvSpPr/>
-          <p:nvPr/>
-        </p:nvSpPr>
-        <p:spPr>
-          <a:xfrm>
-            <a:off x="10488168" y="4032504"/>
-            <a:ext cx="256032" cy="256032"/>
-          </a:xfrm>
-          <a:prstGeom prst="ellipse">
-            <a:avLst/>
-          </a:prstGeom>
-          <a:solidFill>
-            <a:srgbClr val="FFFFFF"/>
-          </a:solidFill>
-          <a:ln>
-            <a:noFill/>
-          </a:ln>
-          <a:effectLst/>
-        </p:spPr>
-        <p:style>
-          <a:lnRef idx="1">
-            <a:schemeClr val="accent1"/>
-          </a:lnRef>
-          <a:fillRef idx="3">
-            <a:schemeClr val="accent1"/>
-          </a:fillRef>
-          <a:effectRef idx="2">
-            <a:schemeClr val="accent1"/>
-          </a:effectRef>
-          <a:fontRef idx="minor">
-            <a:schemeClr val="lt1"/>
-          </a:fontRef>
-        </p:style>
-        <p:txBody>
-          <a:bodyPr rtlCol="0" anchor="ctr"/>
-          <a:lstStyle/>
-          <a:p>
-            <a:pPr algn="ctr"/>
-          </a:p>
-        </p:txBody>
-      </p:sp>
-      <p:sp>
-        <p:nvSpPr>
-          <p:cNvPr id="81" name="TextBox 80"/>
-          <p:cNvSpPr txBox="1"/>
-          <p:nvPr/>
-        </p:nvSpPr>
-        <p:spPr>
-          <a:xfrm>
-            <a:off x="10488168" y="4032504"/>
-            <a:ext cx="256032" cy="256032"/>
-          </a:xfrm>
-          <a:prstGeom prst="rect">
-            <a:avLst/>
-          </a:prstGeom>
-          <a:noFill/>
-        </p:spPr>
-        <p:txBody>
-          <a:bodyPr wrap="square" anchor="ctr" lIns="0" rIns="0" tIns="0" bIns="0">
-            <a:noAutofit/>
-          </a:bodyPr>
-          <a:lstStyle/>
-          <a:p>
-            <a:pPr algn="ctr">
-              <a:lnSpc>
-                <a:spcPct val="100000"/>
-              </a:lnSpc>
-              <a:spcBef>
-                <a:spcPts val="0"/>
-              </a:spcBef>
-              <a:spcAft>
-                <a:spcPts val="400"/>
-              </a:spcAft>
-            </a:pPr>
-            <a:r>
-              <a:rPr sz="1000" b="1" i="0">
-                <a:solidFill>
-                  <a:srgbClr val="5B6B85"/>
-                </a:solidFill>
-                <a:latin typeface="Inter"/>
-                <a:cs typeface="Inter"/>
-              </a:rPr>
-              <a:t>⧉</a:t>
-            </a:r>
-          </a:p>
-        </p:txBody>
-      </p:sp>
-      <p:sp>
-        <p:nvSpPr>
-          <p:cNvPr id="82" name="Rounded Rectangle 81"/>
-          <p:cNvSpPr/>
-          <p:nvPr/>
-        </p:nvSpPr>
-        <p:spPr>
-          <a:xfrm>
-            <a:off x="10488168" y="4032504"/>
-            <a:ext cx="256032" cy="256032"/>
-          </a:xfrm>
-          <a:prstGeom prst="roundRect">
-            <a:avLst>
-              <a:gd name="adj" fmla="val 50000"/>
-            </a:avLst>
-          </a:prstGeom>
-          <a:noFill/>
-          <a:ln w="12700">
-            <a:solidFill>
-              <a:srgbClr val="AFC6F0"/>
-            </a:solidFill>
-          </a:ln>
-          <a:effectLst/>
-        </p:spPr>
-        <p:style>
-          <a:lnRef idx="1">
-            <a:schemeClr val="accent1"/>
-          </a:lnRef>
-          <a:fillRef idx="3">
-            <a:schemeClr val="accent1"/>
-          </a:fillRef>
-          <a:effectRef idx="2">
-            <a:schemeClr val="accent1"/>
-          </a:effectRef>
-          <a:fontRef idx="minor">
-            <a:schemeClr val="lt1"/>
-          </a:fontRef>
-        </p:style>
-        <p:txBody>
-          <a:bodyPr rtlCol="0" anchor="ctr"/>
-          <a:lstStyle/>
-          <a:p>
-            <a:pPr algn="ctr"/>
-          </a:p>
-        </p:txBody>
-      </p:sp>
-      <p:sp>
-        <p:nvSpPr>
-          <p:cNvPr id="83" name="Oval 82"/>
-          <p:cNvSpPr/>
-          <p:nvPr/>
-        </p:nvSpPr>
-        <p:spPr>
-          <a:xfrm>
-            <a:off x="10789920" y="4032504"/>
-            <a:ext cx="256032" cy="256032"/>
-          </a:xfrm>
-          <a:prstGeom prst="ellipse">
-            <a:avLst/>
-          </a:prstGeom>
-          <a:solidFill>
-            <a:srgbClr val="FFFFFF"/>
-          </a:solidFill>
-          <a:ln>
-            <a:noFill/>
-          </a:ln>
-          <a:effectLst/>
-        </p:spPr>
-        <p:style>
-          <a:lnRef idx="1">
-            <a:schemeClr val="accent1"/>
-          </a:lnRef>
-          <a:fillRef idx="3">
-            <a:schemeClr val="accent1"/>
-          </a:fillRef>
-          <a:effectRef idx="2">
-            <a:schemeClr val="accent1"/>
-          </a:effectRef>
-          <a:fontRef idx="minor">
-            <a:schemeClr val="lt1"/>
-          </a:fontRef>
-        </p:style>
-        <p:txBody>
-          <a:bodyPr rtlCol="0" anchor="ctr"/>
-          <a:lstStyle/>
-          <a:p>
-            <a:pPr algn="ctr"/>
-          </a:p>
-        </p:txBody>
-      </p:sp>
-      <p:sp>
-        <p:nvSpPr>
-          <p:cNvPr id="84" name="TextBox 83"/>
-          <p:cNvSpPr txBox="1"/>
-          <p:nvPr/>
-        </p:nvSpPr>
-        <p:spPr>
-          <a:xfrm>
-            <a:off x="10789920" y="4032504"/>
-            <a:ext cx="256032" cy="256032"/>
-          </a:xfrm>
-          <a:prstGeom prst="rect">
-            <a:avLst/>
-          </a:prstGeom>
-          <a:noFill/>
-        </p:spPr>
-        <p:txBody>
-          <a:bodyPr wrap="square" anchor="ctr" lIns="0" rIns="0" tIns="0" bIns="0">
-            <a:noAutofit/>
-          </a:bodyPr>
-          <a:lstStyle/>
-          <a:p>
-            <a:pPr algn="ctr">
-              <a:lnSpc>
-                <a:spcPct val="100000"/>
-              </a:lnSpc>
-              <a:spcBef>
-                <a:spcPts val="0"/>
-              </a:spcBef>
-              <a:spcAft>
-                <a:spcPts val="400"/>
-              </a:spcAft>
-            </a:pPr>
-            <a:r>
-              <a:rPr sz="1000" b="1" i="0">
-                <a:solidFill>
-                  <a:srgbClr val="C3423F"/>
-                </a:solidFill>
-                <a:latin typeface="Inter"/>
-                <a:cs typeface="Inter"/>
-              </a:rPr>
-              <a:t>✕</a:t>
-            </a:r>
-          </a:p>
-        </p:txBody>
-      </p:sp>
-      <p:sp>
-        <p:nvSpPr>
-          <p:cNvPr id="85" name="Rounded Rectangle 84"/>
-          <p:cNvSpPr/>
-          <p:nvPr/>
-        </p:nvSpPr>
-        <p:spPr>
-          <a:xfrm>
-            <a:off x="10789920" y="4032504"/>
-            <a:ext cx="256032" cy="256032"/>
-          </a:xfrm>
-          <a:prstGeom prst="roundRect">
-            <a:avLst>
-              <a:gd name="adj" fmla="val 50000"/>
-            </a:avLst>
-          </a:prstGeom>
-          <a:noFill/>
-          <a:ln w="12700">
-            <a:solidFill>
-              <a:srgbClr val="AFC6F0"/>
-            </a:solidFill>
-          </a:ln>
-          <a:effectLst/>
-        </p:spPr>
-        <p:style>
-          <a:lnRef idx="1">
-            <a:schemeClr val="accent1"/>
-          </a:lnRef>
-          <a:fillRef idx="3">
-            <a:schemeClr val="accent1"/>
-          </a:fillRef>
-          <a:effectRef idx="2">
-            <a:schemeClr val="accent1"/>
-          </a:effectRef>
-          <a:fontRef idx="minor">
-            <a:schemeClr val="lt1"/>
-          </a:fontRef>
-        </p:style>
-        <p:txBody>
-          <a:bodyPr rtlCol="0" anchor="ctr"/>
-          <a:lstStyle/>
-          <a:p>
-            <a:pPr algn="ctr"/>
-          </a:p>
-        </p:txBody>
-      </p:sp>
-      <p:sp>
-        <p:nvSpPr>
-          <p:cNvPr id="86" name="Rounded Rectangle 85"/>
-          <p:cNvSpPr/>
-          <p:nvPr/>
-        </p:nvSpPr>
-        <p:spPr>
-          <a:xfrm>
-            <a:off x="6144768" y="4480559"/>
-            <a:ext cx="4919472" cy="457200"/>
-          </a:xfrm>
-          <a:prstGeom prst="roundRect">
-            <a:avLst>
-              <a:gd name="adj" fmla="val 10000"/>
-            </a:avLst>
-          </a:prstGeom>
-          <a:solidFill>
-            <a:srgbClr val="FFFFFF"/>
-          </a:solidFill>
-          <a:ln w="12700">
-            <a:solidFill>
-              <a:srgbClr val="E3E6EC"/>
-            </a:solidFill>
-          </a:ln>
-          <a:effectLst/>
-        </p:spPr>
-        <p:style>
-          <a:lnRef idx="1">
-            <a:schemeClr val="accent1"/>
-          </a:lnRef>
-          <a:fillRef idx="3">
-            <a:schemeClr val="accent1"/>
-          </a:fillRef>
-          <a:effectRef idx="2">
-            <a:schemeClr val="accent1"/>
-          </a:effectRef>
-          <a:fontRef idx="minor">
-            <a:schemeClr val="lt1"/>
-          </a:fontRef>
-        </p:style>
-        <p:txBody>
-          <a:bodyPr rtlCol="0" anchor="ctr"/>
-          <a:lstStyle/>
-          <a:p>
-            <a:pPr algn="ctr"/>
-          </a:p>
-        </p:txBody>
-      </p:sp>
-      <p:sp>
-        <p:nvSpPr>
-          <p:cNvPr id="87" name="TextBox 86"/>
-          <p:cNvSpPr txBox="1"/>
-          <p:nvPr/>
-        </p:nvSpPr>
-        <p:spPr>
-          <a:xfrm>
-            <a:off x="6309360" y="4480559"/>
-            <a:ext cx="2514600" cy="457200"/>
-          </a:xfrm>
-          <a:prstGeom prst="rect">
-            <a:avLst/>
-          </a:prstGeom>
-          <a:noFill/>
-        </p:spPr>
-        <p:txBody>
-          <a:bodyPr wrap="square" anchor="ctr" lIns="0" rIns="0" tIns="0" bIns="0">
-            <a:noAutofit/>
-          </a:bodyPr>
-          <a:lstStyle/>
-          <a:p>
-            <a:pPr algn="l">
-              <a:lnSpc>
-                <a:spcPct val="100000"/>
-              </a:lnSpc>
-              <a:spcBef>
-                <a:spcPts val="0"/>
-              </a:spcBef>
-              <a:spcAft>
-                <a:spcPts val="400"/>
-              </a:spcAft>
-            </a:pPr>
-            <a:r>
-              <a:rPr sz="1000" b="1" i="0">
-                <a:solidFill>
-                  <a:srgbClr val="0E1735"/>
-                </a:solidFill>
-                <a:latin typeface="Inter"/>
-                <a:cs typeface="Inter"/>
-              </a:rPr>
-              <a:t>Markt-Report Bot</a:t>
-            </a:r>
-          </a:p>
-        </p:txBody>
-      </p:sp>
-      <p:sp>
-        <p:nvSpPr>
-          <p:cNvPr id="88" name="Rounded Rectangle 87"/>
-          <p:cNvSpPr/>
-          <p:nvPr/>
-        </p:nvSpPr>
-        <p:spPr>
-          <a:xfrm>
-            <a:off x="8933688" y="4581144"/>
-            <a:ext cx="1051560" cy="274320"/>
-          </a:xfrm>
-          <a:prstGeom prst="roundRect">
-            <a:avLst>
-              <a:gd name="adj" fmla="val 50000"/>
-            </a:avLst>
-          </a:prstGeom>
-          <a:solidFill>
-            <a:srgbClr val="1E2761"/>
-          </a:solidFill>
-          <a:ln>
-            <a:noFill/>
-          </a:ln>
-          <a:effectLst/>
-        </p:spPr>
-        <p:style>
-          <a:lnRef idx="1">
-            <a:schemeClr val="accent1"/>
-          </a:lnRef>
-          <a:fillRef idx="3">
-            <a:schemeClr val="accent1"/>
-          </a:fillRef>
-          <a:effectRef idx="2">
-            <a:schemeClr val="accent1"/>
-          </a:effectRef>
-          <a:fontRef idx="minor">
-            <a:schemeClr val="lt1"/>
-          </a:fontRef>
-        </p:style>
-        <p:txBody>
-          <a:bodyPr rtlCol="0" anchor="ctr"/>
-          <a:lstStyle/>
-          <a:p>
-            <a:pPr algn="ctr"/>
-          </a:p>
-        </p:txBody>
-      </p:sp>
-      <p:sp>
-        <p:nvSpPr>
-          <p:cNvPr id="89" name="TextBox 88"/>
-          <p:cNvSpPr txBox="1"/>
-          <p:nvPr/>
-        </p:nvSpPr>
-        <p:spPr>
-          <a:xfrm>
-            <a:off x="8933688" y="4576572"/>
-            <a:ext cx="1051560" cy="274320"/>
-          </a:xfrm>
-          <a:prstGeom prst="rect">
-            <a:avLst/>
-          </a:prstGeom>
-          <a:noFill/>
-        </p:spPr>
-        <p:txBody>
-          <a:bodyPr wrap="square" anchor="ctr" lIns="0" rIns="0" tIns="0" bIns="0">
-            <a:noAutofit/>
-          </a:bodyPr>
-          <a:lstStyle/>
-          <a:p>
-            <a:pPr algn="ctr">
-              <a:lnSpc>
-                <a:spcPct val="100000"/>
-              </a:lnSpc>
-              <a:spcBef>
-                <a:spcPts val="0"/>
-              </a:spcBef>
-              <a:spcAft>
-                <a:spcPts val="400"/>
-              </a:spcAft>
-            </a:pPr>
-            <a:r>
-              <a:rPr sz="950" b="1" i="0">
-                <a:solidFill>
-                  <a:srgbClr val="FFFFFF"/>
-                </a:solidFill>
-                <a:latin typeface="Inter"/>
-                <a:cs typeface="Inter"/>
-              </a:rPr>
-              <a:t>compiled</a:t>
-            </a:r>
-          </a:p>
-        </p:txBody>
-      </p:sp>
-      <p:sp>
-        <p:nvSpPr>
-          <p:cNvPr id="90" name="Oval 89"/>
-          <p:cNvSpPr/>
-          <p:nvPr/>
-        </p:nvSpPr>
-        <p:spPr>
-          <a:xfrm>
-            <a:off x="10186416" y="4581144"/>
-            <a:ext cx="256032" cy="256032"/>
-          </a:xfrm>
-          <a:prstGeom prst="ellipse">
-            <a:avLst/>
-          </a:prstGeom>
-          <a:solidFill>
-            <a:srgbClr val="FFFFFF"/>
-          </a:solidFill>
-          <a:ln>
-            <a:noFill/>
-          </a:ln>
-          <a:effectLst/>
-        </p:spPr>
-        <p:style>
-          <a:lnRef idx="1">
-            <a:schemeClr val="accent1"/>
-          </a:lnRef>
-          <a:fillRef idx="3">
-            <a:schemeClr val="accent1"/>
-          </a:fillRef>
-          <a:effectRef idx="2">
-            <a:schemeClr val="accent1"/>
-          </a:effectRef>
-          <a:fontRef idx="minor">
-            <a:schemeClr val="lt1"/>
-          </a:fontRef>
-        </p:style>
-        <p:txBody>
-          <a:bodyPr rtlCol="0" anchor="ctr"/>
-          <a:lstStyle/>
-          <a:p>
-            <a:pPr algn="ctr"/>
-          </a:p>
-        </p:txBody>
-      </p:sp>
-      <p:sp>
-        <p:nvSpPr>
-          <p:cNvPr id="91" name="TextBox 90"/>
-          <p:cNvSpPr txBox="1"/>
-          <p:nvPr/>
-        </p:nvSpPr>
-        <p:spPr>
-          <a:xfrm>
-            <a:off x="10186416" y="4581144"/>
-            <a:ext cx="256032" cy="256032"/>
-          </a:xfrm>
-          <a:prstGeom prst="rect">
-            <a:avLst/>
-          </a:prstGeom>
-          <a:noFill/>
-        </p:spPr>
-        <p:txBody>
-          <a:bodyPr wrap="square" anchor="ctr" lIns="0" rIns="0" tIns="0" bIns="0">
-            <a:noAutofit/>
-          </a:bodyPr>
-          <a:lstStyle/>
-          <a:p>
-            <a:pPr algn="ctr">
-              <a:lnSpc>
-                <a:spcPct val="100000"/>
-              </a:lnSpc>
-              <a:spcBef>
-                <a:spcPts val="0"/>
-              </a:spcBef>
-              <a:spcAft>
-                <a:spcPts val="400"/>
-              </a:spcAft>
-            </a:pPr>
-            <a:r>
-              <a:rPr sz="1000" b="1" i="0">
-                <a:solidFill>
-                  <a:srgbClr val="1E2761"/>
-                </a:solidFill>
-                <a:latin typeface="Inter"/>
-                <a:cs typeface="Inter"/>
-              </a:rPr>
-              <a:t>→</a:t>
-            </a:r>
-          </a:p>
-        </p:txBody>
-      </p:sp>
-      <p:sp>
-        <p:nvSpPr>
-          <p:cNvPr id="92" name="Rounded Rectangle 91"/>
-          <p:cNvSpPr/>
-          <p:nvPr/>
-        </p:nvSpPr>
-        <p:spPr>
-          <a:xfrm>
-            <a:off x="10186416" y="4581144"/>
-            <a:ext cx="256032" cy="256032"/>
-          </a:xfrm>
-          <a:prstGeom prst="roundRect">
-            <a:avLst>
-              <a:gd name="adj" fmla="val 50000"/>
-            </a:avLst>
-          </a:prstGeom>
-          <a:noFill/>
-          <a:ln w="12700">
-            <a:solidFill>
-              <a:srgbClr val="AFC6F0"/>
-            </a:solidFill>
-          </a:ln>
-          <a:effectLst/>
-        </p:spPr>
-        <p:style>
-          <a:lnRef idx="1">
-            <a:schemeClr val="accent1"/>
-          </a:lnRef>
-          <a:fillRef idx="3">
-            <a:schemeClr val="accent1"/>
-          </a:fillRef>
-          <a:effectRef idx="2">
-            <a:schemeClr val="accent1"/>
-          </a:effectRef>
-          <a:fontRef idx="minor">
-            <a:schemeClr val="lt1"/>
-          </a:fontRef>
-        </p:style>
-        <p:txBody>
-          <a:bodyPr rtlCol="0" anchor="ctr"/>
-          <a:lstStyle/>
-          <a:p>
-            <a:pPr algn="ctr"/>
-          </a:p>
-        </p:txBody>
-      </p:sp>
-      <p:sp>
-        <p:nvSpPr>
-          <p:cNvPr id="93" name="Oval 92"/>
-          <p:cNvSpPr/>
-          <p:nvPr/>
-        </p:nvSpPr>
-        <p:spPr>
-          <a:xfrm>
-            <a:off x="10488168" y="4581144"/>
-            <a:ext cx="256032" cy="256032"/>
-          </a:xfrm>
-          <a:prstGeom prst="ellipse">
-            <a:avLst/>
-          </a:prstGeom>
-          <a:solidFill>
-            <a:srgbClr val="FFFFFF"/>
-          </a:solidFill>
-          <a:ln>
-            <a:noFill/>
-          </a:ln>
-          <a:effectLst/>
-        </p:spPr>
-        <p:style>
-          <a:lnRef idx="1">
-            <a:schemeClr val="accent1"/>
-          </a:lnRef>
-          <a:fillRef idx="3">
-            <a:schemeClr val="accent1"/>
-          </a:fillRef>
-          <a:effectRef idx="2">
-            <a:schemeClr val="accent1"/>
-          </a:effectRef>
-          <a:fontRef idx="minor">
-            <a:schemeClr val="lt1"/>
-          </a:fontRef>
-        </p:style>
-        <p:txBody>
-          <a:bodyPr rtlCol="0" anchor="ctr"/>
-          <a:lstStyle/>
-          <a:p>
-            <a:pPr algn="ctr"/>
-          </a:p>
-        </p:txBody>
-      </p:sp>
-      <p:sp>
-        <p:nvSpPr>
-          <p:cNvPr id="94" name="TextBox 93"/>
-          <p:cNvSpPr txBox="1"/>
-          <p:nvPr/>
-        </p:nvSpPr>
-        <p:spPr>
-          <a:xfrm>
-            <a:off x="10488168" y="4581144"/>
-            <a:ext cx="256032" cy="256032"/>
-          </a:xfrm>
-          <a:prstGeom prst="rect">
-            <a:avLst/>
-          </a:prstGeom>
-          <a:noFill/>
-        </p:spPr>
-        <p:txBody>
-          <a:bodyPr wrap="square" anchor="ctr" lIns="0" rIns="0" tIns="0" bIns="0">
-            <a:noAutofit/>
-          </a:bodyPr>
-          <a:lstStyle/>
-          <a:p>
-            <a:pPr algn="ctr">
-              <a:lnSpc>
-                <a:spcPct val="100000"/>
-              </a:lnSpc>
-              <a:spcBef>
-                <a:spcPts val="0"/>
-              </a:spcBef>
-              <a:spcAft>
-                <a:spcPts val="400"/>
-              </a:spcAft>
-            </a:pPr>
-            <a:r>
-              <a:rPr sz="1000" b="1" i="0">
-                <a:solidFill>
-                  <a:srgbClr val="5B6B85"/>
-                </a:solidFill>
-                <a:latin typeface="Inter"/>
-                <a:cs typeface="Inter"/>
-              </a:rPr>
-              <a:t>⧉</a:t>
-            </a:r>
-          </a:p>
-        </p:txBody>
-      </p:sp>
-      <p:sp>
-        <p:nvSpPr>
-          <p:cNvPr id="95" name="Rounded Rectangle 94"/>
-          <p:cNvSpPr/>
-          <p:nvPr/>
-        </p:nvSpPr>
-        <p:spPr>
-          <a:xfrm>
-            <a:off x="10488168" y="4581144"/>
-            <a:ext cx="256032" cy="256032"/>
-          </a:xfrm>
-          <a:prstGeom prst="roundRect">
-            <a:avLst>
-              <a:gd name="adj" fmla="val 50000"/>
-            </a:avLst>
-          </a:prstGeom>
-          <a:noFill/>
-          <a:ln w="12700">
-            <a:solidFill>
-              <a:srgbClr val="AFC6F0"/>
-            </a:solidFill>
-          </a:ln>
-          <a:effectLst/>
-        </p:spPr>
-        <p:style>
-          <a:lnRef idx="1">
-            <a:schemeClr val="accent1"/>
-          </a:lnRef>
-          <a:fillRef idx="3">
-            <a:schemeClr val="accent1"/>
-          </a:fillRef>
-          <a:effectRef idx="2">
-            <a:schemeClr val="accent1"/>
-          </a:effectRef>
-          <a:fontRef idx="minor">
-            <a:schemeClr val="lt1"/>
-          </a:fontRef>
-        </p:style>
-        <p:txBody>
-          <a:bodyPr rtlCol="0" anchor="ctr"/>
-          <a:lstStyle/>
-          <a:p>
-            <a:pPr algn="ctr"/>
-          </a:p>
-        </p:txBody>
-      </p:sp>
-      <p:sp>
-        <p:nvSpPr>
-          <p:cNvPr id="96" name="Oval 95"/>
-          <p:cNvSpPr/>
-          <p:nvPr/>
-        </p:nvSpPr>
-        <p:spPr>
-          <a:xfrm>
-            <a:off x="10789920" y="4581144"/>
-            <a:ext cx="256032" cy="256032"/>
-          </a:xfrm>
-          <a:prstGeom prst="ellipse">
-            <a:avLst/>
-          </a:prstGeom>
-          <a:solidFill>
-            <a:srgbClr val="FFFFFF"/>
-          </a:solidFill>
-          <a:ln>
-            <a:noFill/>
-          </a:ln>
-          <a:effectLst/>
-        </p:spPr>
-        <p:style>
-          <a:lnRef idx="1">
-            <a:schemeClr val="accent1"/>
-          </a:lnRef>
-          <a:fillRef idx="3">
-            <a:schemeClr val="accent1"/>
-          </a:fillRef>
-          <a:effectRef idx="2">
-            <a:schemeClr val="accent1"/>
-          </a:effectRef>
-          <a:fontRef idx="minor">
-            <a:schemeClr val="lt1"/>
-          </a:fontRef>
-        </p:style>
-        <p:txBody>
-          <a:bodyPr rtlCol="0" anchor="ctr"/>
-          <a:lstStyle/>
-          <a:p>
-            <a:pPr algn="ctr"/>
-          </a:p>
-        </p:txBody>
-      </p:sp>
-      <p:sp>
-        <p:nvSpPr>
-          <p:cNvPr id="97" name="TextBox 96"/>
-          <p:cNvSpPr txBox="1"/>
-          <p:nvPr/>
-        </p:nvSpPr>
-        <p:spPr>
-          <a:xfrm>
-            <a:off x="10789920" y="4581144"/>
-            <a:ext cx="256032" cy="256032"/>
-          </a:xfrm>
-          <a:prstGeom prst="rect">
-            <a:avLst/>
-          </a:prstGeom>
-          <a:noFill/>
-        </p:spPr>
-        <p:txBody>
-          <a:bodyPr wrap="square" anchor="ctr" lIns="0" rIns="0" tIns="0" bIns="0">
-            <a:noAutofit/>
-          </a:bodyPr>
-          <a:lstStyle/>
-          <a:p>
-            <a:pPr algn="ctr">
-              <a:lnSpc>
-                <a:spcPct val="100000"/>
-              </a:lnSpc>
-              <a:spcBef>
-                <a:spcPts val="0"/>
-              </a:spcBef>
-              <a:spcAft>
-                <a:spcPts val="400"/>
-              </a:spcAft>
-            </a:pPr>
-            <a:r>
-              <a:rPr sz="1000" b="1" i="0">
-                <a:solidFill>
-                  <a:srgbClr val="C3423F"/>
-                </a:solidFill>
-                <a:latin typeface="Inter"/>
-                <a:cs typeface="Inter"/>
-              </a:rPr>
-              <a:t>✕</a:t>
-            </a:r>
-          </a:p>
-        </p:txBody>
-      </p:sp>
-      <p:sp>
-        <p:nvSpPr>
-          <p:cNvPr id="98" name="Rounded Rectangle 97"/>
-          <p:cNvSpPr/>
-          <p:nvPr/>
-        </p:nvSpPr>
-        <p:spPr>
-          <a:xfrm>
-            <a:off x="10789920" y="4581144"/>
-            <a:ext cx="256032" cy="256032"/>
-          </a:xfrm>
-          <a:prstGeom prst="roundRect">
-            <a:avLst>
-              <a:gd name="adj" fmla="val 50000"/>
-            </a:avLst>
-          </a:prstGeom>
-          <a:noFill/>
-          <a:ln w="12700">
-            <a:solidFill>
-              <a:srgbClr val="AFC6F0"/>
-            </a:solidFill>
-          </a:ln>
-          <a:effectLst/>
-        </p:spPr>
-        <p:style>
-          <a:lnRef idx="1">
-            <a:schemeClr val="accent1"/>
-          </a:lnRef>
-          <a:fillRef idx="3">
-            <a:schemeClr val="accent1"/>
-          </a:fillRef>
-          <a:effectRef idx="2">
-            <a:schemeClr val="accent1"/>
-          </a:effectRef>
-          <a:fontRef idx="minor">
-            <a:schemeClr val="lt1"/>
-          </a:fontRef>
-        </p:style>
-        <p:txBody>
-          <a:bodyPr rtlCol="0" anchor="ctr"/>
-          <a:lstStyle/>
-          <a:p>
-            <a:pPr algn="ctr"/>
-          </a:p>
-        </p:txBody>
-      </p:sp>
-      <p:sp>
-        <p:nvSpPr>
-          <p:cNvPr id="99" name="TextBox 98"/>
-          <p:cNvSpPr txBox="1"/>
-          <p:nvPr/>
-        </p:nvSpPr>
-        <p:spPr>
-          <a:xfrm>
-            <a:off x="6144768" y="5102352"/>
-            <a:ext cx="4919472" cy="274320"/>
-          </a:xfrm>
-          <a:prstGeom prst="rect">
-            <a:avLst/>
-          </a:prstGeom>
-          <a:noFill/>
-        </p:spPr>
-        <p:txBody>
-          <a:bodyPr wrap="square" anchor="t" lIns="0" rIns="0" tIns="0" bIns="0">
-            <a:noAutofit/>
-          </a:bodyPr>
-          <a:lstStyle/>
-          <a:p>
-            <a:pPr algn="l">
-              <a:lnSpc>
-                <a:spcPct val="100000"/>
-              </a:lnSpc>
-              <a:spcBef>
-                <a:spcPts val="0"/>
-              </a:spcBef>
-              <a:spcAft>
-                <a:spcPts val="400"/>
-              </a:spcAft>
-            </a:pPr>
-            <a:r>
-              <a:rPr sz="850" b="0" i="1">
-                <a:solidFill>
-                  <a:srgbClr val="8A93A6"/>
-                </a:solidFill>
-                <a:latin typeface="JetBrains Mono"/>
-                <a:cs typeface="JetBrains Mono"/>
-              </a:rPr>
-              <a:t>Status: planning → reviewing → approved → compiled → archived</a:t>
-            </a:r>
-          </a:p>
-        </p:txBody>
-      </p:sp>
+      <p:pic>
+        <p:nvPicPr>
+          <p:cNvPr id="36" name="Picture 35" descr="g_05_guardrails.png"/>
+          <p:cNvPicPr>
+            <a:picLocks noChangeAspect="1"/>
+          </p:cNvPicPr>
+          <p:nvPr/>
+        </p:nvPicPr>
+        <p:blipFill>
+          <a:blip r:embed="rId3"/>
+          <a:stretch>
+            <a:fillRect/>
+          </a:stretch>
+        </p:blipFill>
+        <p:spPr>
+          <a:xfrm>
+            <a:off x="5870448" y="1930527"/>
+            <a:ext cx="5468112" cy="3417570"/>
+          </a:xfrm>
+          <a:prstGeom prst="rect">
+            <a:avLst/>
+          </a:prstGeom>
+        </p:spPr>
+      </p:pic>
     </p:spTree>
   </p:cSld>
   <p:clrMapOvr>
@@ -12946,558 +8391,6 @@
       </p:sp>
       <p:sp>
         <p:nvSpPr>
-          <p:cNvPr id="30" name="Rounded Rectangle 29"/>
-          <p:cNvSpPr/>
-          <p:nvPr/>
-        </p:nvSpPr>
-        <p:spPr>
-          <a:xfrm>
-            <a:off x="6583680" y="1783080"/>
-            <a:ext cx="4754880" cy="3913632"/>
-          </a:xfrm>
-          <a:prstGeom prst="roundRect">
-            <a:avLst>
-              <a:gd name="adj" fmla="val 6000"/>
-            </a:avLst>
-          </a:prstGeom>
-          <a:solidFill>
-            <a:srgbClr val="1E2761"/>
-          </a:solidFill>
-          <a:ln>
-            <a:noFill/>
-          </a:ln>
-          <a:effectLst/>
-        </p:spPr>
-        <p:style>
-          <a:lnRef idx="1">
-            <a:schemeClr val="accent1"/>
-          </a:lnRef>
-          <a:fillRef idx="3">
-            <a:schemeClr val="accent1"/>
-          </a:fillRef>
-          <a:effectRef idx="2">
-            <a:schemeClr val="accent1"/>
-          </a:effectRef>
-          <a:fontRef idx="minor">
-            <a:schemeClr val="lt1"/>
-          </a:fontRef>
-        </p:style>
-        <p:txBody>
-          <a:bodyPr rtlCol="0" anchor="ctr"/>
-          <a:lstStyle/>
-          <a:p>
-            <a:pPr algn="ctr"/>
-          </a:p>
-        </p:txBody>
-      </p:sp>
-      <p:sp>
-        <p:nvSpPr>
-          <p:cNvPr id="31" name="TextBox 30"/>
-          <p:cNvSpPr txBox="1"/>
-          <p:nvPr/>
-        </p:nvSpPr>
-        <p:spPr>
-          <a:xfrm>
-            <a:off x="6858000" y="1975104"/>
-            <a:ext cx="4206240" cy="320040"/>
-          </a:xfrm>
-          <a:prstGeom prst="rect">
-            <a:avLst/>
-          </a:prstGeom>
-          <a:noFill/>
-        </p:spPr>
-        <p:txBody>
-          <a:bodyPr wrap="square" anchor="t" lIns="0" rIns="0" tIns="0" bIns="0">
-            <a:noAutofit/>
-          </a:bodyPr>
-          <a:lstStyle/>
-          <a:p>
-            <a:pPr algn="l">
-              <a:lnSpc>
-                <a:spcPct val="100000"/>
-              </a:lnSpc>
-              <a:spcBef>
-                <a:spcPts val="0"/>
-              </a:spcBef>
-              <a:spcAft>
-                <a:spcPts val="400"/>
-              </a:spcAft>
-            </a:pPr>
-            <a:r>
-              <a:rPr sz="1450" b="1" i="0">
-                <a:solidFill>
-                  <a:srgbClr val="CADCFC"/>
-                </a:solidFill>
-                <a:latin typeface="Inter"/>
-                <a:cs typeface="Inter"/>
-              </a:rPr>
-              <a:t>Was geht: Software &amp; Konzepte</a:t>
-            </a:r>
-          </a:p>
-        </p:txBody>
-      </p:sp>
-      <p:sp>
-        <p:nvSpPr>
-          <p:cNvPr id="32" name="TextBox 31"/>
-          <p:cNvSpPr txBox="1"/>
-          <p:nvPr/>
-        </p:nvSpPr>
-        <p:spPr>
-          <a:xfrm>
-            <a:off x="6858000" y="2377440"/>
-            <a:ext cx="4206240" cy="457200"/>
-          </a:xfrm>
-          <a:prstGeom prst="rect">
-            <a:avLst/>
-          </a:prstGeom>
-          <a:noFill/>
-        </p:spPr>
-        <p:txBody>
-          <a:bodyPr wrap="square" anchor="t" lIns="0" rIns="0" tIns="0" bIns="0">
-            <a:noAutofit/>
-          </a:bodyPr>
-          <a:lstStyle/>
-          <a:p>
-            <a:pPr algn="l">
-              <a:lnSpc>
-                <a:spcPct val="112000"/>
-              </a:lnSpc>
-              <a:spcBef>
-                <a:spcPts val="0"/>
-              </a:spcBef>
-              <a:spcAft>
-                <a:spcPts val="400"/>
-              </a:spcAft>
-            </a:pPr>
-            <a:r>
-              <a:rPr sz="1100" b="0" i="0">
-                <a:solidFill>
-                  <a:srgbClr val="CADCFC"/>
-                </a:solidFill>
-                <a:latin typeface="Inter"/>
-                <a:cs typeface="Inter"/>
-              </a:rPr>
-              <a:t>Der Planner unterscheidet zu Beginn die Projektart — und passt die Skills daran an.</a:t>
-            </a:r>
-          </a:p>
-        </p:txBody>
-      </p:sp>
-      <p:sp>
-        <p:nvSpPr>
-          <p:cNvPr id="33" name="Rounded Rectangle 32"/>
-          <p:cNvSpPr/>
-          <p:nvPr/>
-        </p:nvSpPr>
-        <p:spPr>
-          <a:xfrm>
-            <a:off x="6858000" y="3063240"/>
-            <a:ext cx="4206240" cy="786384"/>
-          </a:xfrm>
-          <a:prstGeom prst="roundRect">
-            <a:avLst>
-              <a:gd name="adj" fmla="val 8000"/>
-            </a:avLst>
-          </a:prstGeom>
-          <a:solidFill>
-            <a:srgbClr val="162047"/>
-          </a:solidFill>
-          <a:ln>
-            <a:noFill/>
-          </a:ln>
-          <a:effectLst/>
-        </p:spPr>
-        <p:style>
-          <a:lnRef idx="1">
-            <a:schemeClr val="accent1"/>
-          </a:lnRef>
-          <a:fillRef idx="3">
-            <a:schemeClr val="accent1"/>
-          </a:fillRef>
-          <a:effectRef idx="2">
-            <a:schemeClr val="accent1"/>
-          </a:effectRef>
-          <a:fontRef idx="minor">
-            <a:schemeClr val="lt1"/>
-          </a:fontRef>
-        </p:style>
-        <p:txBody>
-          <a:bodyPr rtlCol="0" anchor="ctr"/>
-          <a:lstStyle/>
-          <a:p>
-            <a:pPr algn="ctr"/>
-          </a:p>
-        </p:txBody>
-      </p:sp>
-      <p:sp>
-        <p:nvSpPr>
-          <p:cNvPr id="34" name="TextBox 33"/>
-          <p:cNvSpPr txBox="1"/>
-          <p:nvPr/>
-        </p:nvSpPr>
-        <p:spPr>
-          <a:xfrm>
-            <a:off x="7059168" y="3154680"/>
-            <a:ext cx="1463040" cy="274320"/>
-          </a:xfrm>
-          <a:prstGeom prst="rect">
-            <a:avLst/>
-          </a:prstGeom>
-          <a:noFill/>
-        </p:spPr>
-        <p:txBody>
-          <a:bodyPr wrap="square" anchor="t" lIns="0" rIns="0" tIns="0" bIns="0">
-            <a:noAutofit/>
-          </a:bodyPr>
-          <a:lstStyle/>
-          <a:p>
-            <a:pPr algn="l">
-              <a:lnSpc>
-                <a:spcPct val="100000"/>
-              </a:lnSpc>
-              <a:spcBef>
-                <a:spcPts val="0"/>
-              </a:spcBef>
-              <a:spcAft>
-                <a:spcPts val="400"/>
-              </a:spcAft>
-            </a:pPr>
-            <a:r>
-              <a:rPr sz="1100" b="1" i="0">
-                <a:solidFill>
-                  <a:srgbClr val="E8703A"/>
-                </a:solidFill>
-                <a:latin typeface="Inter"/>
-                <a:cs typeface="Inter"/>
-              </a:rPr>
-              <a:t>KONZEPT</a:t>
-            </a:r>
-          </a:p>
-        </p:txBody>
-      </p:sp>
-      <p:sp>
-        <p:nvSpPr>
-          <p:cNvPr id="35" name="TextBox 34"/>
-          <p:cNvSpPr txBox="1"/>
-          <p:nvPr/>
-        </p:nvSpPr>
-        <p:spPr>
-          <a:xfrm>
-            <a:off x="7059168" y="3392424"/>
-            <a:ext cx="3840480" cy="411480"/>
-          </a:xfrm>
-          <a:prstGeom prst="rect">
-            <a:avLst/>
-          </a:prstGeom>
-          <a:noFill/>
-        </p:spPr>
-        <p:txBody>
-          <a:bodyPr wrap="square" anchor="t" lIns="0" rIns="0" tIns="0" bIns="0">
-            <a:noAutofit/>
-          </a:bodyPr>
-          <a:lstStyle/>
-          <a:p>
-            <a:pPr algn="l">
-              <a:lnSpc>
-                <a:spcPct val="105000"/>
-              </a:lnSpc>
-              <a:spcBef>
-                <a:spcPts val="0"/>
-              </a:spcBef>
-              <a:spcAft>
-                <a:spcPts val="400"/>
-              </a:spcAft>
-            </a:pPr>
-            <a:r>
-              <a:rPr sz="980" b="0" i="0">
-                <a:solidFill>
-                  <a:srgbClr val="CADCFC"/>
-                </a:solidFill>
-                <a:latin typeface="Inter"/>
-                <a:cs typeface="Inter"/>
-              </a:rPr>
-              <a:t>Methodik &amp; Dokumente: docx-, pptx-, markdown-, MECE- und Pyramid-Skills.</a:t>
-            </a:r>
-          </a:p>
-        </p:txBody>
-      </p:sp>
-      <p:sp>
-        <p:nvSpPr>
-          <p:cNvPr id="36" name="Rounded Rectangle 35"/>
-          <p:cNvSpPr/>
-          <p:nvPr/>
-        </p:nvSpPr>
-        <p:spPr>
-          <a:xfrm>
-            <a:off x="6858000" y="3941064"/>
-            <a:ext cx="4206240" cy="786384"/>
-          </a:xfrm>
-          <a:prstGeom prst="roundRect">
-            <a:avLst>
-              <a:gd name="adj" fmla="val 8000"/>
-            </a:avLst>
-          </a:prstGeom>
-          <a:solidFill>
-            <a:srgbClr val="162047"/>
-          </a:solidFill>
-          <a:ln>
-            <a:noFill/>
-          </a:ln>
-          <a:effectLst/>
-        </p:spPr>
-        <p:style>
-          <a:lnRef idx="1">
-            <a:schemeClr val="accent1"/>
-          </a:lnRef>
-          <a:fillRef idx="3">
-            <a:schemeClr val="accent1"/>
-          </a:fillRef>
-          <a:effectRef idx="2">
-            <a:schemeClr val="accent1"/>
-          </a:effectRef>
-          <a:fontRef idx="minor">
-            <a:schemeClr val="lt1"/>
-          </a:fontRef>
-        </p:style>
-        <p:txBody>
-          <a:bodyPr rtlCol="0" anchor="ctr"/>
-          <a:lstStyle/>
-          <a:p>
-            <a:pPr algn="ctr"/>
-          </a:p>
-        </p:txBody>
-      </p:sp>
-      <p:sp>
-        <p:nvSpPr>
-          <p:cNvPr id="37" name="TextBox 36"/>
-          <p:cNvSpPr txBox="1"/>
-          <p:nvPr/>
-        </p:nvSpPr>
-        <p:spPr>
-          <a:xfrm>
-            <a:off x="7059168" y="4032504"/>
-            <a:ext cx="1463040" cy="274320"/>
-          </a:xfrm>
-          <a:prstGeom prst="rect">
-            <a:avLst/>
-          </a:prstGeom>
-          <a:noFill/>
-        </p:spPr>
-        <p:txBody>
-          <a:bodyPr wrap="square" anchor="t" lIns="0" rIns="0" tIns="0" bIns="0">
-            <a:noAutofit/>
-          </a:bodyPr>
-          <a:lstStyle/>
-          <a:p>
-            <a:pPr algn="l">
-              <a:lnSpc>
-                <a:spcPct val="100000"/>
-              </a:lnSpc>
-              <a:spcBef>
-                <a:spcPts val="0"/>
-              </a:spcBef>
-              <a:spcAft>
-                <a:spcPts val="400"/>
-              </a:spcAft>
-            </a:pPr>
-            <a:r>
-              <a:rPr sz="1100" b="1" i="0">
-                <a:solidFill>
-                  <a:srgbClr val="E8703A"/>
-                </a:solidFill>
-                <a:latin typeface="Inter"/>
-                <a:cs typeface="Inter"/>
-              </a:rPr>
-              <a:t>TECHNIK</a:t>
-            </a:r>
-          </a:p>
-        </p:txBody>
-      </p:sp>
-      <p:sp>
-        <p:nvSpPr>
-          <p:cNvPr id="38" name="TextBox 37"/>
-          <p:cNvSpPr txBox="1"/>
-          <p:nvPr/>
-        </p:nvSpPr>
-        <p:spPr>
-          <a:xfrm>
-            <a:off x="7059168" y="4270248"/>
-            <a:ext cx="3840480" cy="411480"/>
-          </a:xfrm>
-          <a:prstGeom prst="rect">
-            <a:avLst/>
-          </a:prstGeom>
-          <a:noFill/>
-        </p:spPr>
-        <p:txBody>
-          <a:bodyPr wrap="square" anchor="t" lIns="0" rIns="0" tIns="0" bIns="0">
-            <a:noAutofit/>
-          </a:bodyPr>
-          <a:lstStyle/>
-          <a:p>
-            <a:pPr algn="l">
-              <a:lnSpc>
-                <a:spcPct val="105000"/>
-              </a:lnSpc>
-              <a:spcBef>
-                <a:spcPts val="0"/>
-              </a:spcBef>
-              <a:spcAft>
-                <a:spcPts val="400"/>
-              </a:spcAft>
-            </a:pPr>
-            <a:r>
-              <a:rPr sz="980" b="0" i="0">
-                <a:solidFill>
-                  <a:srgbClr val="CADCFC"/>
-                </a:solidFill>
-                <a:latin typeface="Inter"/>
-                <a:cs typeface="Inter"/>
-              </a:rPr>
-              <a:t>Architektur &amp; Code: Systemdesign, Tools, Schnittstellen, Tests.</a:t>
-            </a:r>
-          </a:p>
-        </p:txBody>
-      </p:sp>
-      <p:sp>
-        <p:nvSpPr>
-          <p:cNvPr id="39" name="Rounded Rectangle 38"/>
-          <p:cNvSpPr/>
-          <p:nvPr/>
-        </p:nvSpPr>
-        <p:spPr>
-          <a:xfrm>
-            <a:off x="6858000" y="4818888"/>
-            <a:ext cx="4206240" cy="786384"/>
-          </a:xfrm>
-          <a:prstGeom prst="roundRect">
-            <a:avLst>
-              <a:gd name="adj" fmla="val 8000"/>
-            </a:avLst>
-          </a:prstGeom>
-          <a:solidFill>
-            <a:srgbClr val="162047"/>
-          </a:solidFill>
-          <a:ln>
-            <a:noFill/>
-          </a:ln>
-          <a:effectLst/>
-        </p:spPr>
-        <p:style>
-          <a:lnRef idx="1">
-            <a:schemeClr val="accent1"/>
-          </a:lnRef>
-          <a:fillRef idx="3">
-            <a:schemeClr val="accent1"/>
-          </a:fillRef>
-          <a:effectRef idx="2">
-            <a:schemeClr val="accent1"/>
-          </a:effectRef>
-          <a:fontRef idx="minor">
-            <a:schemeClr val="lt1"/>
-          </a:fontRef>
-        </p:style>
-        <p:txBody>
-          <a:bodyPr rtlCol="0" anchor="ctr"/>
-          <a:lstStyle/>
-          <a:p>
-            <a:pPr algn="ctr"/>
-          </a:p>
-        </p:txBody>
-      </p:sp>
-      <p:sp>
-        <p:nvSpPr>
-          <p:cNvPr id="40" name="TextBox 39"/>
-          <p:cNvSpPr txBox="1"/>
-          <p:nvPr/>
-        </p:nvSpPr>
-        <p:spPr>
-          <a:xfrm>
-            <a:off x="7059168" y="4910328"/>
-            <a:ext cx="1463040" cy="274320"/>
-          </a:xfrm>
-          <a:prstGeom prst="rect">
-            <a:avLst/>
-          </a:prstGeom>
-          <a:noFill/>
-        </p:spPr>
-        <p:txBody>
-          <a:bodyPr wrap="square" anchor="t" lIns="0" rIns="0" tIns="0" bIns="0">
-            <a:noAutofit/>
-          </a:bodyPr>
-          <a:lstStyle/>
-          <a:p>
-            <a:pPr algn="l">
-              <a:lnSpc>
-                <a:spcPct val="100000"/>
-              </a:lnSpc>
-              <a:spcBef>
-                <a:spcPts val="0"/>
-              </a:spcBef>
-              <a:spcAft>
-                <a:spcPts val="400"/>
-              </a:spcAft>
-            </a:pPr>
-            <a:r>
-              <a:rPr sz="1100" b="1" i="0">
-                <a:solidFill>
-                  <a:srgbClr val="E8703A"/>
-                </a:solidFill>
-                <a:latin typeface="Inter"/>
-                <a:cs typeface="Inter"/>
-              </a:rPr>
-              <a:t>HYBRID</a:t>
-            </a:r>
-          </a:p>
-        </p:txBody>
-      </p:sp>
-      <p:sp>
-        <p:nvSpPr>
-          <p:cNvPr id="41" name="TextBox 40"/>
-          <p:cNvSpPr txBox="1"/>
-          <p:nvPr/>
-        </p:nvSpPr>
-        <p:spPr>
-          <a:xfrm>
-            <a:off x="7059168" y="5148072"/>
-            <a:ext cx="3840480" cy="411480"/>
-          </a:xfrm>
-          <a:prstGeom prst="rect">
-            <a:avLst/>
-          </a:prstGeom>
-          <a:noFill/>
-        </p:spPr>
-        <p:txBody>
-          <a:bodyPr wrap="square" anchor="t" lIns="0" rIns="0" tIns="0" bIns="0">
-            <a:noAutofit/>
-          </a:bodyPr>
-          <a:lstStyle/>
-          <a:p>
-            <a:pPr algn="l">
-              <a:lnSpc>
-                <a:spcPct val="105000"/>
-              </a:lnSpc>
-              <a:spcBef>
-                <a:spcPts val="0"/>
-              </a:spcBef>
-              <a:spcAft>
-                <a:spcPts val="400"/>
-              </a:spcAft>
-            </a:pPr>
-            <a:r>
-              <a:rPr sz="980" b="0" i="0">
-                <a:solidFill>
-                  <a:srgbClr val="CADCFC"/>
-                </a:solidFill>
-                <a:latin typeface="Inter"/>
-                <a:cs typeface="Inter"/>
-              </a:rPr>
-              <a:t>Beides kombiniert — wie im Newsletter-Beispiel.</a:t>
-            </a:r>
-          </a:p>
-        </p:txBody>
-      </p:sp>
-      <p:sp>
-        <p:nvSpPr>
           <p:cNvPr id="42" name="TextBox 41"/>
           <p:cNvSpPr txBox="1"/>
           <p:nvPr/>
@@ -14050,6 +8943,30 @@
           <a:xfrm>
             <a:off x="11393424" y="329184"/>
             <a:ext cx="310896" cy="310896"/>
+          </a:xfrm>
+          <a:prstGeom prst="rect">
+            <a:avLst/>
+          </a:prstGeom>
+        </p:spPr>
+      </p:pic>
+      <p:pic>
+        <p:nvPicPr>
+          <p:cNvPr id="55" name="Picture 54" descr="crop_g_06_plan.png"/>
+          <p:cNvPicPr>
+            <a:picLocks noChangeAspect="1"/>
+          </p:cNvPicPr>
+          <p:nvPr/>
+        </p:nvPicPr>
+        <p:blipFill>
+          <a:blip r:embed="rId3"/>
+          <a:stretch>
+            <a:fillRect/>
+          </a:stretch>
+        </p:blipFill>
+        <p:spPr>
+          <a:xfrm>
+            <a:off x="5870448" y="1828800"/>
+            <a:ext cx="5468112" cy="3621024"/>
           </a:xfrm>
           <a:prstGeom prst="rect">
             <a:avLst/>
@@ -18358,53 +13275,6 @@
       </p:sp>
       <p:sp>
         <p:nvSpPr>
-          <p:cNvPr id="24" name="TextBox 23"/>
-          <p:cNvSpPr txBox="1"/>
-          <p:nvPr/>
-        </p:nvSpPr>
-        <p:spPr>
-          <a:xfrm>
-            <a:off x="5971032" y="2487168"/>
-            <a:ext cx="1463040" cy="822960"/>
-          </a:xfrm>
-          <a:prstGeom prst="rect">
-            <a:avLst/>
-          </a:prstGeom>
-          <a:noFill/>
-        </p:spPr>
-        <p:txBody>
-          <a:bodyPr wrap="square" anchor="t" lIns="0" rIns="0" tIns="0" bIns="0">
-            <a:noAutofit/>
-          </a:bodyPr>
-          <a:lstStyle/>
-          <a:p>
-            <a:pPr algn="l">
-              <a:lnSpc>
-                <a:spcPct val="110000"/>
-              </a:lnSpc>
-              <a:spcBef>
-                <a:spcPts val="0"/>
-              </a:spcBef>
-              <a:spcAft>
-                <a:spcPts val="400"/>
-              </a:spcAft>
-            </a:pPr>
-            <a:r>
-              <a:rPr sz="900" b="0" i="0">
-                <a:solidFill>
-                  <a:srgbClr val="5B6B85"/>
-                </a:solidFill>
-                <a:latin typeface="Inter"/>
-                <a:cs typeface="Inter"/>
-              </a:rPr>
-              <a:t>Eintritt ×
-Auswirkung</a:t>
-            </a:r>
-          </a:p>
-        </p:txBody>
-      </p:sp>
-      <p:sp>
-        <p:nvSpPr>
           <p:cNvPr id="25" name="Rounded Rectangle 24"/>
           <p:cNvSpPr/>
           <p:nvPr/>
@@ -18453,650 +13323,6 @@
       </p:sp>
       <p:sp>
         <p:nvSpPr>
-          <p:cNvPr id="26" name="TextBox 25"/>
-          <p:cNvSpPr txBox="1"/>
-          <p:nvPr/>
-        </p:nvSpPr>
-        <p:spPr>
-          <a:xfrm>
-            <a:off x="8193024" y="1901952"/>
-            <a:ext cx="2980944" cy="274320"/>
-          </a:xfrm>
-          <a:prstGeom prst="rect">
-            <a:avLst/>
-          </a:prstGeom>
-          <a:noFill/>
-        </p:spPr>
-        <p:txBody>
-          <a:bodyPr wrap="square" anchor="t" lIns="0" rIns="0" tIns="0" bIns="0">
-            <a:noAutofit/>
-          </a:bodyPr>
-          <a:lstStyle/>
-          <a:p>
-            <a:pPr algn="l">
-              <a:lnSpc>
-                <a:spcPct val="100000"/>
-              </a:lnSpc>
-              <a:spcBef>
-                <a:spcPts val="0"/>
-              </a:spcBef>
-              <a:spcAft>
-                <a:spcPts val="400"/>
-              </a:spcAft>
-            </a:pPr>
-            <a:r>
-              <a:rPr sz="1150" b="1" i="0">
-                <a:solidFill>
-                  <a:srgbClr val="0E1735"/>
-                </a:solidFill>
-                <a:latin typeface="Inter"/>
-                <a:cs typeface="Inter"/>
-              </a:rPr>
-              <a:t>RACI / PVM</a:t>
-            </a:r>
-          </a:p>
-        </p:txBody>
-      </p:sp>
-      <p:sp>
-        <p:nvSpPr>
-          <p:cNvPr id="27" name="TextBox 26"/>
-          <p:cNvSpPr txBox="1"/>
-          <p:nvPr/>
-        </p:nvSpPr>
-        <p:spPr>
-          <a:xfrm>
-            <a:off x="8220456" y="2414016"/>
-            <a:ext cx="566928" cy="228600"/>
-          </a:xfrm>
-          <a:prstGeom prst="rect">
-            <a:avLst/>
-          </a:prstGeom>
-          <a:noFill/>
-        </p:spPr>
-        <p:txBody>
-          <a:bodyPr wrap="square" anchor="t" lIns="0" rIns="0" tIns="0" bIns="0">
-            <a:noAutofit/>
-          </a:bodyPr>
-          <a:lstStyle/>
-          <a:p>
-            <a:pPr algn="ctr">
-              <a:lnSpc>
-                <a:spcPct val="100000"/>
-              </a:lnSpc>
-              <a:spcBef>
-                <a:spcPts val="0"/>
-              </a:spcBef>
-              <a:spcAft>
-                <a:spcPts val="400"/>
-              </a:spcAft>
-            </a:pPr>
-            <a:r>
-              <a:rPr sz="850" b="1" i="0">
-                <a:solidFill>
-                  <a:srgbClr val="5B6B85"/>
-                </a:solidFill>
-                <a:latin typeface="JetBrains Mono"/>
-                <a:cs typeface="JetBrains Mono"/>
-              </a:rPr>
-              <a:t/>
-            </a:r>
-          </a:p>
-        </p:txBody>
-      </p:sp>
-      <p:sp>
-        <p:nvSpPr>
-          <p:cNvPr id="28" name="TextBox 27"/>
-          <p:cNvSpPr txBox="1"/>
-          <p:nvPr/>
-        </p:nvSpPr>
-        <p:spPr>
-          <a:xfrm>
-            <a:off x="8787384" y="2414016"/>
-            <a:ext cx="566928" cy="228600"/>
-          </a:xfrm>
-          <a:prstGeom prst="rect">
-            <a:avLst/>
-          </a:prstGeom>
-          <a:noFill/>
-        </p:spPr>
-        <p:txBody>
-          <a:bodyPr wrap="square" anchor="t" lIns="0" rIns="0" tIns="0" bIns="0">
-            <a:noAutofit/>
-          </a:bodyPr>
-          <a:lstStyle/>
-          <a:p>
-            <a:pPr algn="ctr">
-              <a:lnSpc>
-                <a:spcPct val="100000"/>
-              </a:lnSpc>
-              <a:spcBef>
-                <a:spcPts val="0"/>
-              </a:spcBef>
-              <a:spcAft>
-                <a:spcPts val="400"/>
-              </a:spcAft>
-            </a:pPr>
-            <a:r>
-              <a:rPr sz="850" b="1" i="0">
-                <a:solidFill>
-                  <a:srgbClr val="5B6B85"/>
-                </a:solidFill>
-                <a:latin typeface="JetBrains Mono"/>
-                <a:cs typeface="JetBrains Mono"/>
-              </a:rPr>
-              <a:t>Du</a:t>
-            </a:r>
-          </a:p>
-        </p:txBody>
-      </p:sp>
-      <p:sp>
-        <p:nvSpPr>
-          <p:cNvPr id="29" name="TextBox 28"/>
-          <p:cNvSpPr txBox="1"/>
-          <p:nvPr/>
-        </p:nvSpPr>
-        <p:spPr>
-          <a:xfrm>
-            <a:off x="9354312" y="2414016"/>
-            <a:ext cx="566928" cy="228600"/>
-          </a:xfrm>
-          <a:prstGeom prst="rect">
-            <a:avLst/>
-          </a:prstGeom>
-          <a:noFill/>
-        </p:spPr>
-        <p:txBody>
-          <a:bodyPr wrap="square" anchor="t" lIns="0" rIns="0" tIns="0" bIns="0">
-            <a:noAutofit/>
-          </a:bodyPr>
-          <a:lstStyle/>
-          <a:p>
-            <a:pPr algn="ctr">
-              <a:lnSpc>
-                <a:spcPct val="100000"/>
-              </a:lnSpc>
-              <a:spcBef>
-                <a:spcPts val="0"/>
-              </a:spcBef>
-              <a:spcAft>
-                <a:spcPts val="400"/>
-              </a:spcAft>
-            </a:pPr>
-            <a:r>
-              <a:rPr sz="850" b="1" i="0">
-                <a:solidFill>
-                  <a:srgbClr val="5B6B85"/>
-                </a:solidFill>
-                <a:latin typeface="JetBrains Mono"/>
-                <a:cs typeface="JetBrains Mono"/>
-              </a:rPr>
-              <a:t>PMO</a:t>
-            </a:r>
-          </a:p>
-        </p:txBody>
-      </p:sp>
-      <p:sp>
-        <p:nvSpPr>
-          <p:cNvPr id="30" name="TextBox 29"/>
-          <p:cNvSpPr txBox="1"/>
-          <p:nvPr/>
-        </p:nvSpPr>
-        <p:spPr>
-          <a:xfrm>
-            <a:off x="9921240" y="2414016"/>
-            <a:ext cx="566928" cy="228600"/>
-          </a:xfrm>
-          <a:prstGeom prst="rect">
-            <a:avLst/>
-          </a:prstGeom>
-          <a:noFill/>
-        </p:spPr>
-        <p:txBody>
-          <a:bodyPr wrap="square" anchor="t" lIns="0" rIns="0" tIns="0" bIns="0">
-            <a:noAutofit/>
-          </a:bodyPr>
-          <a:lstStyle/>
-          <a:p>
-            <a:pPr algn="ctr">
-              <a:lnSpc>
-                <a:spcPct val="100000"/>
-              </a:lnSpc>
-              <a:spcBef>
-                <a:spcPts val="0"/>
-              </a:spcBef>
-              <a:spcAft>
-                <a:spcPts val="400"/>
-              </a:spcAft>
-            </a:pPr>
-            <a:r>
-              <a:rPr sz="850" b="1" i="0">
-                <a:solidFill>
-                  <a:srgbClr val="5B6B85"/>
-                </a:solidFill>
-                <a:latin typeface="JetBrains Mono"/>
-                <a:cs typeface="JetBrains Mono"/>
-              </a:rPr>
-              <a:t>Risk</a:t>
-            </a:r>
-          </a:p>
-        </p:txBody>
-      </p:sp>
-      <p:sp>
-        <p:nvSpPr>
-          <p:cNvPr id="31" name="TextBox 30"/>
-          <p:cNvSpPr txBox="1"/>
-          <p:nvPr/>
-        </p:nvSpPr>
-        <p:spPr>
-          <a:xfrm>
-            <a:off x="8220456" y="2670048"/>
-            <a:ext cx="566928" cy="274320"/>
-          </a:xfrm>
-          <a:prstGeom prst="rect">
-            <a:avLst/>
-          </a:prstGeom>
-          <a:noFill/>
-        </p:spPr>
-        <p:txBody>
-          <a:bodyPr wrap="square" anchor="t" lIns="0" rIns="0" tIns="0" bIns="0">
-            <a:noAutofit/>
-          </a:bodyPr>
-          <a:lstStyle/>
-          <a:p>
-            <a:pPr algn="ctr">
-              <a:lnSpc>
-                <a:spcPct val="100000"/>
-              </a:lnSpc>
-              <a:spcBef>
-                <a:spcPts val="0"/>
-              </a:spcBef>
-              <a:spcAft>
-                <a:spcPts val="400"/>
-              </a:spcAft>
-            </a:pPr>
-            <a:r>
-              <a:rPr sz="950" b="0" i="0">
-                <a:solidFill>
-                  <a:srgbClr val="0E1735"/>
-                </a:solidFill>
-                <a:latin typeface="JetBrains Mono"/>
-                <a:cs typeface="JetBrains Mono"/>
-              </a:rPr>
-              <a:t>M1</a:t>
-            </a:r>
-          </a:p>
-        </p:txBody>
-      </p:sp>
-      <p:sp>
-        <p:nvSpPr>
-          <p:cNvPr id="32" name="TextBox 31"/>
-          <p:cNvSpPr txBox="1"/>
-          <p:nvPr/>
-        </p:nvSpPr>
-        <p:spPr>
-          <a:xfrm>
-            <a:off x="8787384" y="2670048"/>
-            <a:ext cx="566928" cy="274320"/>
-          </a:xfrm>
-          <a:prstGeom prst="rect">
-            <a:avLst/>
-          </a:prstGeom>
-          <a:noFill/>
-        </p:spPr>
-        <p:txBody>
-          <a:bodyPr wrap="square" anchor="t" lIns="0" rIns="0" tIns="0" bIns="0">
-            <a:noAutofit/>
-          </a:bodyPr>
-          <a:lstStyle/>
-          <a:p>
-            <a:pPr algn="ctr">
-              <a:lnSpc>
-                <a:spcPct val="100000"/>
-              </a:lnSpc>
-              <a:spcBef>
-                <a:spcPts val="0"/>
-              </a:spcBef>
-              <a:spcAft>
-                <a:spcPts val="400"/>
-              </a:spcAft>
-            </a:pPr>
-            <a:r>
-              <a:rPr sz="950" b="1" i="0">
-                <a:solidFill>
-                  <a:srgbClr val="E8703A"/>
-                </a:solidFill>
-                <a:latin typeface="JetBrains Mono"/>
-                <a:cs typeface="JetBrains Mono"/>
-              </a:rPr>
-              <a:t>E</a:t>
-            </a:r>
-          </a:p>
-        </p:txBody>
-      </p:sp>
-      <p:sp>
-        <p:nvSpPr>
-          <p:cNvPr id="33" name="TextBox 32"/>
-          <p:cNvSpPr txBox="1"/>
-          <p:nvPr/>
-        </p:nvSpPr>
-        <p:spPr>
-          <a:xfrm>
-            <a:off x="9354312" y="2670048"/>
-            <a:ext cx="566928" cy="274320"/>
-          </a:xfrm>
-          <a:prstGeom prst="rect">
-            <a:avLst/>
-          </a:prstGeom>
-          <a:noFill/>
-        </p:spPr>
-        <p:txBody>
-          <a:bodyPr wrap="square" anchor="t" lIns="0" rIns="0" tIns="0" bIns="0">
-            <a:noAutofit/>
-          </a:bodyPr>
-          <a:lstStyle/>
-          <a:p>
-            <a:pPr algn="ctr">
-              <a:lnSpc>
-                <a:spcPct val="100000"/>
-              </a:lnSpc>
-              <a:spcBef>
-                <a:spcPts val="0"/>
-              </a:spcBef>
-              <a:spcAft>
-                <a:spcPts val="400"/>
-              </a:spcAft>
-            </a:pPr>
-            <a:r>
-              <a:rPr sz="950" b="1" i="0">
-                <a:solidFill>
-                  <a:srgbClr val="1E2761"/>
-                </a:solidFill>
-                <a:latin typeface="JetBrains Mono"/>
-                <a:cs typeface="JetBrains Mono"/>
-              </a:rPr>
-              <a:t>A</a:t>
-            </a:r>
-          </a:p>
-        </p:txBody>
-      </p:sp>
-      <p:sp>
-        <p:nvSpPr>
-          <p:cNvPr id="34" name="TextBox 33"/>
-          <p:cNvSpPr txBox="1"/>
-          <p:nvPr/>
-        </p:nvSpPr>
-        <p:spPr>
-          <a:xfrm>
-            <a:off x="9921240" y="2670048"/>
-            <a:ext cx="566928" cy="274320"/>
-          </a:xfrm>
-          <a:prstGeom prst="rect">
-            <a:avLst/>
-          </a:prstGeom>
-          <a:noFill/>
-        </p:spPr>
-        <p:txBody>
-          <a:bodyPr wrap="square" anchor="t" lIns="0" rIns="0" tIns="0" bIns="0">
-            <a:noAutofit/>
-          </a:bodyPr>
-          <a:lstStyle/>
-          <a:p>
-            <a:pPr algn="ctr">
-              <a:lnSpc>
-                <a:spcPct val="100000"/>
-              </a:lnSpc>
-              <a:spcBef>
-                <a:spcPts val="0"/>
-              </a:spcBef>
-              <a:spcAft>
-                <a:spcPts val="400"/>
-              </a:spcAft>
-            </a:pPr>
-            <a:r>
-              <a:rPr sz="950" b="0" i="0">
-                <a:solidFill>
-                  <a:srgbClr val="5B6B85"/>
-                </a:solidFill>
-                <a:latin typeface="JetBrains Mono"/>
-                <a:cs typeface="JetBrains Mono"/>
-              </a:rPr>
-              <a:t>I</a:t>
-            </a:r>
-          </a:p>
-        </p:txBody>
-      </p:sp>
-      <p:sp>
-        <p:nvSpPr>
-          <p:cNvPr id="35" name="TextBox 34"/>
-          <p:cNvSpPr txBox="1"/>
-          <p:nvPr/>
-        </p:nvSpPr>
-        <p:spPr>
-          <a:xfrm>
-            <a:off x="8220456" y="3035808"/>
-            <a:ext cx="566928" cy="274320"/>
-          </a:xfrm>
-          <a:prstGeom prst="rect">
-            <a:avLst/>
-          </a:prstGeom>
-          <a:noFill/>
-        </p:spPr>
-        <p:txBody>
-          <a:bodyPr wrap="square" anchor="t" lIns="0" rIns="0" tIns="0" bIns="0">
-            <a:noAutofit/>
-          </a:bodyPr>
-          <a:lstStyle/>
-          <a:p>
-            <a:pPr algn="ctr">
-              <a:lnSpc>
-                <a:spcPct val="100000"/>
-              </a:lnSpc>
-              <a:spcBef>
-                <a:spcPts val="0"/>
-              </a:spcBef>
-              <a:spcAft>
-                <a:spcPts val="400"/>
-              </a:spcAft>
-            </a:pPr>
-            <a:r>
-              <a:rPr sz="950" b="0" i="0">
-                <a:solidFill>
-                  <a:srgbClr val="0E1735"/>
-                </a:solidFill>
-                <a:latin typeface="JetBrains Mono"/>
-                <a:cs typeface="JetBrains Mono"/>
-              </a:rPr>
-              <a:t>M2</a:t>
-            </a:r>
-          </a:p>
-        </p:txBody>
-      </p:sp>
-      <p:sp>
-        <p:nvSpPr>
-          <p:cNvPr id="36" name="TextBox 35"/>
-          <p:cNvSpPr txBox="1"/>
-          <p:nvPr/>
-        </p:nvSpPr>
-        <p:spPr>
-          <a:xfrm>
-            <a:off x="8787384" y="3035808"/>
-            <a:ext cx="566928" cy="274320"/>
-          </a:xfrm>
-          <a:prstGeom prst="rect">
-            <a:avLst/>
-          </a:prstGeom>
-          <a:noFill/>
-        </p:spPr>
-        <p:txBody>
-          <a:bodyPr wrap="square" anchor="t" lIns="0" rIns="0" tIns="0" bIns="0">
-            <a:noAutofit/>
-          </a:bodyPr>
-          <a:lstStyle/>
-          <a:p>
-            <a:pPr algn="ctr">
-              <a:lnSpc>
-                <a:spcPct val="100000"/>
-              </a:lnSpc>
-              <a:spcBef>
-                <a:spcPts val="0"/>
-              </a:spcBef>
-              <a:spcAft>
-                <a:spcPts val="400"/>
-              </a:spcAft>
-            </a:pPr>
-            <a:r>
-              <a:rPr sz="950" b="1" i="0">
-                <a:solidFill>
-                  <a:srgbClr val="E8703A"/>
-                </a:solidFill>
-                <a:latin typeface="JetBrains Mono"/>
-                <a:cs typeface="JetBrains Mono"/>
-              </a:rPr>
-              <a:t>E</a:t>
-            </a:r>
-          </a:p>
-        </p:txBody>
-      </p:sp>
-      <p:sp>
-        <p:nvSpPr>
-          <p:cNvPr id="37" name="TextBox 36"/>
-          <p:cNvSpPr txBox="1"/>
-          <p:nvPr/>
-        </p:nvSpPr>
-        <p:spPr>
-          <a:xfrm>
-            <a:off x="9354312" y="3035808"/>
-            <a:ext cx="566928" cy="274320"/>
-          </a:xfrm>
-          <a:prstGeom prst="rect">
-            <a:avLst/>
-          </a:prstGeom>
-          <a:noFill/>
-        </p:spPr>
-        <p:txBody>
-          <a:bodyPr wrap="square" anchor="t" lIns="0" rIns="0" tIns="0" bIns="0">
-            <a:noAutofit/>
-          </a:bodyPr>
-          <a:lstStyle/>
-          <a:p>
-            <a:pPr algn="ctr">
-              <a:lnSpc>
-                <a:spcPct val="100000"/>
-              </a:lnSpc>
-              <a:spcBef>
-                <a:spcPts val="0"/>
-              </a:spcBef>
-              <a:spcAft>
-                <a:spcPts val="400"/>
-              </a:spcAft>
-            </a:pPr>
-            <a:r>
-              <a:rPr sz="950" b="1" i="0">
-                <a:solidFill>
-                  <a:srgbClr val="E8703A"/>
-                </a:solidFill>
-                <a:latin typeface="JetBrains Mono"/>
-                <a:cs typeface="JetBrains Mono"/>
-              </a:rPr>
-              <a:t>L</a:t>
-            </a:r>
-          </a:p>
-        </p:txBody>
-      </p:sp>
-      <p:sp>
-        <p:nvSpPr>
-          <p:cNvPr id="38" name="TextBox 37"/>
-          <p:cNvSpPr txBox="1"/>
-          <p:nvPr/>
-        </p:nvSpPr>
-        <p:spPr>
-          <a:xfrm>
-            <a:off x="9921240" y="3035808"/>
-            <a:ext cx="566928" cy="274320"/>
-          </a:xfrm>
-          <a:prstGeom prst="rect">
-            <a:avLst/>
-          </a:prstGeom>
-          <a:noFill/>
-        </p:spPr>
-        <p:txBody>
-          <a:bodyPr wrap="square" anchor="t" lIns="0" rIns="0" tIns="0" bIns="0">
-            <a:noAutofit/>
-          </a:bodyPr>
-          <a:lstStyle/>
-          <a:p>
-            <a:pPr algn="ctr">
-              <a:lnSpc>
-                <a:spcPct val="100000"/>
-              </a:lnSpc>
-              <a:spcBef>
-                <a:spcPts val="0"/>
-              </a:spcBef>
-              <a:spcAft>
-                <a:spcPts val="400"/>
-              </a:spcAft>
-            </a:pPr>
-            <a:r>
-              <a:rPr sz="950" b="1" i="0">
-                <a:solidFill>
-                  <a:srgbClr val="1E2761"/>
-                </a:solidFill>
-                <a:latin typeface="JetBrains Mono"/>
-                <a:cs typeface="JetBrains Mono"/>
-              </a:rPr>
-              <a:t>A</a:t>
-            </a:r>
-          </a:p>
-        </p:txBody>
-      </p:sp>
-      <p:sp>
-        <p:nvSpPr>
-          <p:cNvPr id="39" name="TextBox 38"/>
-          <p:cNvSpPr txBox="1"/>
-          <p:nvPr/>
-        </p:nvSpPr>
-        <p:spPr>
-          <a:xfrm>
-            <a:off x="8220456" y="3401568"/>
-            <a:ext cx="2980944" cy="274320"/>
-          </a:xfrm>
-          <a:prstGeom prst="rect">
-            <a:avLst/>
-          </a:prstGeom>
-          <a:noFill/>
-        </p:spPr>
-        <p:txBody>
-          <a:bodyPr wrap="square" anchor="t" lIns="0" rIns="0" tIns="0" bIns="0">
-            <a:noAutofit/>
-          </a:bodyPr>
-          <a:lstStyle/>
-          <a:p>
-            <a:pPr algn="l">
-              <a:lnSpc>
-                <a:spcPct val="100000"/>
-              </a:lnSpc>
-              <a:spcBef>
-                <a:spcPts val="0"/>
-              </a:spcBef>
-              <a:spcAft>
-                <a:spcPts val="400"/>
-              </a:spcAft>
-            </a:pPr>
-            <a:r>
-              <a:rPr sz="780" b="0" i="0">
-                <a:solidFill>
-                  <a:srgbClr val="8A93A6"/>
-                </a:solidFill>
-                <a:latin typeface="Inter"/>
-                <a:cs typeface="Inter"/>
-              </a:rPr>
-              <a:t>E=entscheidet · A=führt aus · L=leitet</a:t>
-            </a:r>
-          </a:p>
-        </p:txBody>
-      </p:sp>
-      <p:sp>
-        <p:nvSpPr>
           <p:cNvPr id="40" name="Rounded Rectangle 39"/>
           <p:cNvSpPr/>
           <p:nvPr/>
@@ -19910,514 +14136,6 @@
       </p:sp>
       <p:sp>
         <p:nvSpPr>
-          <p:cNvPr id="58" name="Rounded Rectangle 57"/>
-          <p:cNvSpPr/>
-          <p:nvPr/>
-        </p:nvSpPr>
-        <p:spPr>
-          <a:xfrm>
-            <a:off x="7991856" y="3931920"/>
-            <a:ext cx="3346704" cy="1975104"/>
-          </a:xfrm>
-          <a:prstGeom prst="roundRect">
-            <a:avLst>
-              <a:gd name="adj" fmla="val 6000"/>
-            </a:avLst>
-          </a:prstGeom>
-          <a:solidFill>
-            <a:srgbClr val="FFFFFF"/>
-          </a:solidFill>
-          <a:ln w="12700">
-            <a:solidFill>
-              <a:srgbClr val="E3E6EC"/>
-            </a:solidFill>
-          </a:ln>
-          <a:effectLst/>
-        </p:spPr>
-        <p:style>
-          <a:lnRef idx="1">
-            <a:schemeClr val="accent1"/>
-          </a:lnRef>
-          <a:fillRef idx="3">
-            <a:schemeClr val="accent1"/>
-          </a:fillRef>
-          <a:effectRef idx="2">
-            <a:schemeClr val="accent1"/>
-          </a:effectRef>
-          <a:fontRef idx="minor">
-            <a:schemeClr val="lt1"/>
-          </a:fontRef>
-        </p:style>
-        <p:txBody>
-          <a:bodyPr rtlCol="0" anchor="ctr"/>
-          <a:lstStyle/>
-          <a:p>
-            <a:pPr algn="ctr"/>
-          </a:p>
-        </p:txBody>
-      </p:sp>
-      <p:sp>
-        <p:nvSpPr>
-          <p:cNvPr id="59" name="TextBox 58"/>
-          <p:cNvSpPr txBox="1"/>
-          <p:nvPr/>
-        </p:nvSpPr>
-        <p:spPr>
-          <a:xfrm>
-            <a:off x="8193024" y="4078224"/>
-            <a:ext cx="2980944" cy="274320"/>
-          </a:xfrm>
-          <a:prstGeom prst="rect">
-            <a:avLst/>
-          </a:prstGeom>
-          <a:noFill/>
-        </p:spPr>
-        <p:txBody>
-          <a:bodyPr wrap="square" anchor="t" lIns="0" rIns="0" tIns="0" bIns="0">
-            <a:noAutofit/>
-          </a:bodyPr>
-          <a:lstStyle/>
-          <a:p>
-            <a:pPr algn="l">
-              <a:lnSpc>
-                <a:spcPct val="100000"/>
-              </a:lnSpc>
-              <a:spcBef>
-                <a:spcPts val="0"/>
-              </a:spcBef>
-              <a:spcAft>
-                <a:spcPts val="400"/>
-              </a:spcAft>
-            </a:pPr>
-            <a:r>
-              <a:rPr sz="1150" b="1" i="0">
-                <a:solidFill>
-                  <a:srgbClr val="0E1735"/>
-                </a:solidFill>
-                <a:latin typeface="Inter"/>
-                <a:cs typeface="Inter"/>
-              </a:rPr>
-              <a:t>Agenten-Ressourcen</a:t>
-            </a:r>
-          </a:p>
-        </p:txBody>
-      </p:sp>
-      <p:sp>
-        <p:nvSpPr>
-          <p:cNvPr id="60" name="TextBox 59"/>
-          <p:cNvSpPr txBox="1"/>
-          <p:nvPr/>
-        </p:nvSpPr>
-        <p:spPr>
-          <a:xfrm>
-            <a:off x="8266176" y="4626864"/>
-            <a:ext cx="1280160" cy="228600"/>
-          </a:xfrm>
-          <a:prstGeom prst="rect">
-            <a:avLst/>
-          </a:prstGeom>
-          <a:noFill/>
-        </p:spPr>
-        <p:txBody>
-          <a:bodyPr wrap="square" anchor="t" lIns="0" rIns="0" tIns="0" bIns="0">
-            <a:noAutofit/>
-          </a:bodyPr>
-          <a:lstStyle/>
-          <a:p>
-            <a:pPr algn="l">
-              <a:lnSpc>
-                <a:spcPct val="100000"/>
-              </a:lnSpc>
-              <a:spcBef>
-                <a:spcPts val="0"/>
-              </a:spcBef>
-              <a:spcAft>
-                <a:spcPts val="400"/>
-              </a:spcAft>
-            </a:pPr>
-            <a:r>
-              <a:rPr sz="850" b="0" i="0">
-                <a:solidFill>
-                  <a:srgbClr val="0E1735"/>
-                </a:solidFill>
-                <a:latin typeface="Inter"/>
-                <a:cs typeface="Inter"/>
-              </a:rPr>
-              <a:t>PMO</a:t>
-            </a:r>
-          </a:p>
-        </p:txBody>
-      </p:sp>
-      <p:sp>
-        <p:nvSpPr>
-          <p:cNvPr id="61" name="Rounded Rectangle 60"/>
-          <p:cNvSpPr/>
-          <p:nvPr/>
-        </p:nvSpPr>
-        <p:spPr>
-          <a:xfrm>
-            <a:off x="9546336" y="4663440"/>
-            <a:ext cx="1280160" cy="146304"/>
-          </a:xfrm>
-          <a:prstGeom prst="roundRect">
-            <a:avLst>
-              <a:gd name="adj" fmla="val 50000"/>
-            </a:avLst>
-          </a:prstGeom>
-          <a:solidFill>
-            <a:srgbClr val="CADCFC"/>
-          </a:solidFill>
-          <a:ln>
-            <a:noFill/>
-          </a:ln>
-          <a:effectLst/>
-        </p:spPr>
-        <p:style>
-          <a:lnRef idx="1">
-            <a:schemeClr val="accent1"/>
-          </a:lnRef>
-          <a:fillRef idx="3">
-            <a:schemeClr val="accent1"/>
-          </a:fillRef>
-          <a:effectRef idx="2">
-            <a:schemeClr val="accent1"/>
-          </a:effectRef>
-          <a:fontRef idx="minor">
-            <a:schemeClr val="lt1"/>
-          </a:fontRef>
-        </p:style>
-        <p:txBody>
-          <a:bodyPr rtlCol="0" anchor="ctr"/>
-          <a:lstStyle/>
-          <a:p>
-            <a:pPr algn="ctr"/>
-          </a:p>
-        </p:txBody>
-      </p:sp>
-      <p:sp>
-        <p:nvSpPr>
-          <p:cNvPr id="62" name="Rounded Rectangle 61"/>
-          <p:cNvSpPr/>
-          <p:nvPr/>
-        </p:nvSpPr>
-        <p:spPr>
-          <a:xfrm>
-            <a:off x="9546336" y="4663440"/>
-            <a:ext cx="1152144" cy="146304"/>
-          </a:xfrm>
-          <a:prstGeom prst="roundRect">
-            <a:avLst>
-              <a:gd name="adj" fmla="val 50000"/>
-            </a:avLst>
-          </a:prstGeom>
-          <a:solidFill>
-            <a:srgbClr val="1E2761"/>
-          </a:solidFill>
-          <a:ln>
-            <a:noFill/>
-          </a:ln>
-          <a:effectLst/>
-        </p:spPr>
-        <p:style>
-          <a:lnRef idx="1">
-            <a:schemeClr val="accent1"/>
-          </a:lnRef>
-          <a:fillRef idx="3">
-            <a:schemeClr val="accent1"/>
-          </a:fillRef>
-          <a:effectRef idx="2">
-            <a:schemeClr val="accent1"/>
-          </a:effectRef>
-          <a:fontRef idx="minor">
-            <a:schemeClr val="lt1"/>
-          </a:fontRef>
-        </p:style>
-        <p:txBody>
-          <a:bodyPr rtlCol="0" anchor="ctr"/>
-          <a:lstStyle/>
-          <a:p>
-            <a:pPr algn="ctr"/>
-          </a:p>
-        </p:txBody>
-      </p:sp>
-      <p:sp>
-        <p:nvSpPr>
-          <p:cNvPr id="63" name="TextBox 62"/>
-          <p:cNvSpPr txBox="1"/>
-          <p:nvPr/>
-        </p:nvSpPr>
-        <p:spPr>
-          <a:xfrm>
-            <a:off x="8266176" y="4992624"/>
-            <a:ext cx="1280160" cy="228600"/>
-          </a:xfrm>
-          <a:prstGeom prst="rect">
-            <a:avLst/>
-          </a:prstGeom>
-          <a:noFill/>
-        </p:spPr>
-        <p:txBody>
-          <a:bodyPr wrap="square" anchor="t" lIns="0" rIns="0" tIns="0" bIns="0">
-            <a:noAutofit/>
-          </a:bodyPr>
-          <a:lstStyle/>
-          <a:p>
-            <a:pPr algn="l">
-              <a:lnSpc>
-                <a:spcPct val="100000"/>
-              </a:lnSpc>
-              <a:spcBef>
-                <a:spcPts val="0"/>
-              </a:spcBef>
-              <a:spcAft>
-                <a:spcPts val="400"/>
-              </a:spcAft>
-            </a:pPr>
-            <a:r>
-              <a:rPr sz="850" b="0" i="0">
-                <a:solidFill>
-                  <a:srgbClr val="0E1735"/>
-                </a:solidFill>
-                <a:latin typeface="Inter"/>
-                <a:cs typeface="Inter"/>
-              </a:rPr>
-              <a:t>Architecture</a:t>
-            </a:r>
-          </a:p>
-        </p:txBody>
-      </p:sp>
-      <p:sp>
-        <p:nvSpPr>
-          <p:cNvPr id="64" name="Rounded Rectangle 63"/>
-          <p:cNvSpPr/>
-          <p:nvPr/>
-        </p:nvSpPr>
-        <p:spPr>
-          <a:xfrm>
-            <a:off x="9546336" y="5029200"/>
-            <a:ext cx="1280160" cy="146304"/>
-          </a:xfrm>
-          <a:prstGeom prst="roundRect">
-            <a:avLst>
-              <a:gd name="adj" fmla="val 50000"/>
-            </a:avLst>
-          </a:prstGeom>
-          <a:solidFill>
-            <a:srgbClr val="CADCFC"/>
-          </a:solidFill>
-          <a:ln>
-            <a:noFill/>
-          </a:ln>
-          <a:effectLst/>
-        </p:spPr>
-        <p:style>
-          <a:lnRef idx="1">
-            <a:schemeClr val="accent1"/>
-          </a:lnRef>
-          <a:fillRef idx="3">
-            <a:schemeClr val="accent1"/>
-          </a:fillRef>
-          <a:effectRef idx="2">
-            <a:schemeClr val="accent1"/>
-          </a:effectRef>
-          <a:fontRef idx="minor">
-            <a:schemeClr val="lt1"/>
-          </a:fontRef>
-        </p:style>
-        <p:txBody>
-          <a:bodyPr rtlCol="0" anchor="ctr"/>
-          <a:lstStyle/>
-          <a:p>
-            <a:pPr algn="ctr"/>
-          </a:p>
-        </p:txBody>
-      </p:sp>
-      <p:sp>
-        <p:nvSpPr>
-          <p:cNvPr id="65" name="Rounded Rectangle 64"/>
-          <p:cNvSpPr/>
-          <p:nvPr/>
-        </p:nvSpPr>
-        <p:spPr>
-          <a:xfrm>
-            <a:off x="9546336" y="5029200"/>
-            <a:ext cx="768096" cy="146304"/>
-          </a:xfrm>
-          <a:prstGeom prst="roundRect">
-            <a:avLst>
-              <a:gd name="adj" fmla="val 50000"/>
-            </a:avLst>
-          </a:prstGeom>
-          <a:solidFill>
-            <a:srgbClr val="1E2761"/>
-          </a:solidFill>
-          <a:ln>
-            <a:noFill/>
-          </a:ln>
-          <a:effectLst/>
-        </p:spPr>
-        <p:style>
-          <a:lnRef idx="1">
-            <a:schemeClr val="accent1"/>
-          </a:lnRef>
-          <a:fillRef idx="3">
-            <a:schemeClr val="accent1"/>
-          </a:fillRef>
-          <a:effectRef idx="2">
-            <a:schemeClr val="accent1"/>
-          </a:effectRef>
-          <a:fontRef idx="minor">
-            <a:schemeClr val="lt1"/>
-          </a:fontRef>
-        </p:style>
-        <p:txBody>
-          <a:bodyPr rtlCol="0" anchor="ctr"/>
-          <a:lstStyle/>
-          <a:p>
-            <a:pPr algn="ctr"/>
-          </a:p>
-        </p:txBody>
-      </p:sp>
-      <p:sp>
-        <p:nvSpPr>
-          <p:cNvPr id="66" name="TextBox 65"/>
-          <p:cNvSpPr txBox="1"/>
-          <p:nvPr/>
-        </p:nvSpPr>
-        <p:spPr>
-          <a:xfrm>
-            <a:off x="8266176" y="5358384"/>
-            <a:ext cx="1280160" cy="228600"/>
-          </a:xfrm>
-          <a:prstGeom prst="rect">
-            <a:avLst/>
-          </a:prstGeom>
-          <a:noFill/>
-        </p:spPr>
-        <p:txBody>
-          <a:bodyPr wrap="square" anchor="t" lIns="0" rIns="0" tIns="0" bIns="0">
-            <a:noAutofit/>
-          </a:bodyPr>
-          <a:lstStyle/>
-          <a:p>
-            <a:pPr algn="l">
-              <a:lnSpc>
-                <a:spcPct val="100000"/>
-              </a:lnSpc>
-              <a:spcBef>
-                <a:spcPts val="0"/>
-              </a:spcBef>
-              <a:spcAft>
-                <a:spcPts val="400"/>
-              </a:spcAft>
-            </a:pPr>
-            <a:r>
-              <a:rPr sz="850" b="0" i="0">
-                <a:solidFill>
-                  <a:srgbClr val="0E1735"/>
-                </a:solidFill>
-                <a:latin typeface="Inter"/>
-                <a:cs typeface="Inter"/>
-              </a:rPr>
-              <a:t>Risk</a:t>
-            </a:r>
-          </a:p>
-        </p:txBody>
-      </p:sp>
-      <p:sp>
-        <p:nvSpPr>
-          <p:cNvPr id="67" name="Rounded Rectangle 66"/>
-          <p:cNvSpPr/>
-          <p:nvPr/>
-        </p:nvSpPr>
-        <p:spPr>
-          <a:xfrm>
-            <a:off x="9546336" y="5394960"/>
-            <a:ext cx="1280160" cy="146304"/>
-          </a:xfrm>
-          <a:prstGeom prst="roundRect">
-            <a:avLst>
-              <a:gd name="adj" fmla="val 50000"/>
-            </a:avLst>
-          </a:prstGeom>
-          <a:solidFill>
-            <a:srgbClr val="CADCFC"/>
-          </a:solidFill>
-          <a:ln>
-            <a:noFill/>
-          </a:ln>
-          <a:effectLst/>
-        </p:spPr>
-        <p:style>
-          <a:lnRef idx="1">
-            <a:schemeClr val="accent1"/>
-          </a:lnRef>
-          <a:fillRef idx="3">
-            <a:schemeClr val="accent1"/>
-          </a:fillRef>
-          <a:effectRef idx="2">
-            <a:schemeClr val="accent1"/>
-          </a:effectRef>
-          <a:fontRef idx="minor">
-            <a:schemeClr val="lt1"/>
-          </a:fontRef>
-        </p:style>
-        <p:txBody>
-          <a:bodyPr rtlCol="0" anchor="ctr"/>
-          <a:lstStyle/>
-          <a:p>
-            <a:pPr algn="ctr"/>
-          </a:p>
-        </p:txBody>
-      </p:sp>
-      <p:sp>
-        <p:nvSpPr>
-          <p:cNvPr id="68" name="Rounded Rectangle 67"/>
-          <p:cNvSpPr/>
-          <p:nvPr/>
-        </p:nvSpPr>
-        <p:spPr>
-          <a:xfrm>
-            <a:off x="9546336" y="5394960"/>
-            <a:ext cx="512063" cy="146304"/>
-          </a:xfrm>
-          <a:prstGeom prst="roundRect">
-            <a:avLst>
-              <a:gd name="adj" fmla="val 50000"/>
-            </a:avLst>
-          </a:prstGeom>
-          <a:solidFill>
-            <a:srgbClr val="1E2761"/>
-          </a:solidFill>
-          <a:ln>
-            <a:noFill/>
-          </a:ln>
-          <a:effectLst/>
-        </p:spPr>
-        <p:style>
-          <a:lnRef idx="1">
-            <a:schemeClr val="accent1"/>
-          </a:lnRef>
-          <a:fillRef idx="3">
-            <a:schemeClr val="accent1"/>
-          </a:fillRef>
-          <a:effectRef idx="2">
-            <a:schemeClr val="accent1"/>
-          </a:effectRef>
-          <a:fontRef idx="minor">
-            <a:schemeClr val="lt1"/>
-          </a:fontRef>
-        </p:style>
-        <p:txBody>
-          <a:bodyPr rtlCol="0" anchor="ctr"/>
-          <a:lstStyle/>
-          <a:p>
-            <a:pPr algn="ctr"/>
-          </a:p>
-        </p:txBody>
-      </p:sp>
-      <p:sp>
-        <p:nvSpPr>
           <p:cNvPr id="69" name="TextBox 68"/>
           <p:cNvSpPr txBox="1"/>
           <p:nvPr/>
@@ -20970,6 +14688,30 @@
           <a:xfrm>
             <a:off x="11393424" y="329184"/>
             <a:ext cx="310896" cy="310896"/>
+          </a:xfrm>
+          <a:prstGeom prst="rect">
+            <a:avLst/>
+          </a:prstGeom>
+        </p:spPr>
+      </p:pic>
+      <p:pic>
+        <p:nvPicPr>
+          <p:cNvPr id="82" name="Picture 81" descr="crop_g_07_review.png"/>
+          <p:cNvPicPr>
+            <a:picLocks noChangeAspect="1"/>
+          </p:cNvPicPr>
+          <p:nvPr/>
+        </p:nvPicPr>
+        <p:blipFill>
+          <a:blip r:embed="rId3"/>
+          <a:stretch>
+            <a:fillRect/>
+          </a:stretch>
+        </p:blipFill>
+        <p:spPr>
+          <a:xfrm>
+            <a:off x="5870448" y="1828800"/>
+            <a:ext cx="5468112" cy="3621024"/>
           </a:xfrm>
           <a:prstGeom prst="rect">
             <a:avLst/>
@@ -64395,282 +58137,6 @@
       </p:sp>
       <p:sp>
         <p:nvSpPr>
-          <p:cNvPr id="18" name="Rounded Rectangle 17"/>
-          <p:cNvSpPr/>
-          <p:nvPr/>
-        </p:nvSpPr>
-        <p:spPr>
-          <a:xfrm>
-            <a:off x="7973568" y="2286000"/>
-            <a:ext cx="3346704" cy="2057400"/>
-          </a:xfrm>
-          <a:prstGeom prst="roundRect">
-            <a:avLst>
-              <a:gd name="adj" fmla="val 6000"/>
-            </a:avLst>
-          </a:prstGeom>
-          <a:solidFill>
-            <a:srgbClr val="FFFFFF"/>
-          </a:solidFill>
-          <a:ln w="12700">
-            <a:solidFill>
-              <a:srgbClr val="E3E6EC"/>
-            </a:solidFill>
-          </a:ln>
-          <a:effectLst/>
-        </p:spPr>
-        <p:style>
-          <a:lnRef idx="1">
-            <a:schemeClr val="accent1"/>
-          </a:lnRef>
-          <a:fillRef idx="3">
-            <a:schemeClr val="accent1"/>
-          </a:fillRef>
-          <a:effectRef idx="2">
-            <a:schemeClr val="accent1"/>
-          </a:effectRef>
-          <a:fontRef idx="minor">
-            <a:schemeClr val="lt1"/>
-          </a:fontRef>
-        </p:style>
-        <p:txBody>
-          <a:bodyPr rtlCol="0" anchor="ctr"/>
-          <a:lstStyle/>
-          <a:p>
-            <a:pPr algn="ctr"/>
-          </a:p>
-        </p:txBody>
-      </p:sp>
-      <p:sp>
-        <p:nvSpPr>
-          <p:cNvPr id="19" name="Rounded Rectangle 18"/>
-          <p:cNvSpPr/>
-          <p:nvPr/>
-        </p:nvSpPr>
-        <p:spPr>
-          <a:xfrm>
-            <a:off x="7973568" y="2286000"/>
-            <a:ext cx="3346704" cy="109728"/>
-          </a:xfrm>
-          <a:prstGeom prst="roundRect">
-            <a:avLst>
-              <a:gd name="adj" fmla="val 50000"/>
-            </a:avLst>
-          </a:prstGeom>
-          <a:solidFill>
-            <a:srgbClr val="1E2761"/>
-          </a:solidFill>
-          <a:ln>
-            <a:noFill/>
-          </a:ln>
-          <a:effectLst/>
-        </p:spPr>
-        <p:style>
-          <a:lnRef idx="1">
-            <a:schemeClr val="accent1"/>
-          </a:lnRef>
-          <a:fillRef idx="3">
-            <a:schemeClr val="accent1"/>
-          </a:fillRef>
-          <a:effectRef idx="2">
-            <a:schemeClr val="accent1"/>
-          </a:effectRef>
-          <a:fontRef idx="minor">
-            <a:schemeClr val="lt1"/>
-          </a:fontRef>
-        </p:style>
-        <p:txBody>
-          <a:bodyPr rtlCol="0" anchor="ctr"/>
-          <a:lstStyle/>
-          <a:p>
-            <a:pPr algn="ctr"/>
-          </a:p>
-        </p:txBody>
-      </p:sp>
-      <p:sp>
-        <p:nvSpPr>
-          <p:cNvPr id="20" name="Oval 19"/>
-          <p:cNvSpPr/>
-          <p:nvPr/>
-        </p:nvSpPr>
-        <p:spPr>
-          <a:xfrm>
-            <a:off x="8247888" y="2606040"/>
-            <a:ext cx="512064" cy="512064"/>
-          </a:xfrm>
-          <a:prstGeom prst="ellipse">
-            <a:avLst/>
-          </a:prstGeom>
-          <a:solidFill>
-            <a:srgbClr val="1E2761"/>
-          </a:solidFill>
-          <a:ln>
-            <a:noFill/>
-          </a:ln>
-          <a:effectLst/>
-        </p:spPr>
-        <p:style>
-          <a:lnRef idx="1">
-            <a:schemeClr val="accent1"/>
-          </a:lnRef>
-          <a:fillRef idx="3">
-            <a:schemeClr val="accent1"/>
-          </a:fillRef>
-          <a:effectRef idx="2">
-            <a:schemeClr val="accent1"/>
-          </a:effectRef>
-          <a:fontRef idx="minor">
-            <a:schemeClr val="lt1"/>
-          </a:fontRef>
-        </p:style>
-        <p:txBody>
-          <a:bodyPr rtlCol="0" anchor="ctr"/>
-          <a:lstStyle/>
-          <a:p>
-            <a:pPr algn="ctr"/>
-          </a:p>
-        </p:txBody>
-      </p:sp>
-      <p:sp>
-        <p:nvSpPr>
-          <p:cNvPr id="21" name="TextBox 20"/>
-          <p:cNvSpPr txBox="1"/>
-          <p:nvPr/>
-        </p:nvSpPr>
-        <p:spPr>
-          <a:xfrm>
-            <a:off x="8247888" y="2606040"/>
-            <a:ext cx="512064" cy="512064"/>
-          </a:xfrm>
-          <a:prstGeom prst="rect">
-            <a:avLst/>
-          </a:prstGeom>
-          <a:noFill/>
-        </p:spPr>
-        <p:txBody>
-          <a:bodyPr wrap="square" anchor="ctr" lIns="0" rIns="0" tIns="0" bIns="0">
-            <a:noAutofit/>
-          </a:bodyPr>
-          <a:lstStyle/>
-          <a:p>
-            <a:pPr algn="ctr">
-              <a:lnSpc>
-                <a:spcPct val="100000"/>
-              </a:lnSpc>
-              <a:spcBef>
-                <a:spcPts val="0"/>
-              </a:spcBef>
-              <a:spcAft>
-                <a:spcPts val="400"/>
-              </a:spcAft>
-            </a:pPr>
-            <a:r>
-              <a:rPr sz="2000" b="1" i="0">
-                <a:solidFill>
-                  <a:srgbClr val="FFFFFF"/>
-                </a:solidFill>
-                <a:latin typeface="Inter"/>
-                <a:cs typeface="Inter"/>
-              </a:rPr>
-              <a:t>◆</a:t>
-            </a:r>
-          </a:p>
-        </p:txBody>
-      </p:sp>
-      <p:sp>
-        <p:nvSpPr>
-          <p:cNvPr id="22" name="TextBox 21"/>
-          <p:cNvSpPr txBox="1"/>
-          <p:nvPr/>
-        </p:nvSpPr>
-        <p:spPr>
-          <a:xfrm>
-            <a:off x="8247888" y="3246120"/>
-            <a:ext cx="2798064" cy="457200"/>
-          </a:xfrm>
-          <a:prstGeom prst="rect">
-            <a:avLst/>
-          </a:prstGeom>
-          <a:noFill/>
-        </p:spPr>
-        <p:txBody>
-          <a:bodyPr wrap="square" anchor="t" lIns="0" rIns="0" tIns="0" bIns="0">
-            <a:noAutofit/>
-          </a:bodyPr>
-          <a:lstStyle/>
-          <a:p>
-            <a:pPr algn="l">
-              <a:lnSpc>
-                <a:spcPct val="100000"/>
-              </a:lnSpc>
-              <a:spcBef>
-                <a:spcPts val="0"/>
-              </a:spcBef>
-              <a:spcAft>
-                <a:spcPts val="400"/>
-              </a:spcAft>
-            </a:pPr>
-            <a:r>
-              <a:rPr sz="1500" b="1" i="0">
-                <a:solidFill>
-                  <a:srgbClr val="0E1735"/>
-                </a:solidFill>
-                <a:latin typeface="Inter"/>
-                <a:cs typeface="Inter"/>
-              </a:rPr>
-              <a:t>Skill-Aufnahme</a:t>
-            </a:r>
-          </a:p>
-        </p:txBody>
-      </p:sp>
-      <p:sp>
-        <p:nvSpPr>
-          <p:cNvPr id="23" name="TextBox 22"/>
-          <p:cNvSpPr txBox="1"/>
-          <p:nvPr/>
-        </p:nvSpPr>
-        <p:spPr>
-          <a:xfrm>
-            <a:off x="8247888" y="3657600"/>
-            <a:ext cx="2843784" cy="640080"/>
-          </a:xfrm>
-          <a:prstGeom prst="rect">
-            <a:avLst/>
-          </a:prstGeom>
-          <a:noFill/>
-        </p:spPr>
-        <p:txBody>
-          <a:bodyPr wrap="square" anchor="t" lIns="0" rIns="0" tIns="0" bIns="0">
-            <a:noAutofit/>
-          </a:bodyPr>
-          <a:lstStyle/>
-          <a:p>
-            <a:pPr algn="l">
-              <a:lnSpc>
-                <a:spcPct val="112000"/>
-              </a:lnSpc>
-              <a:spcBef>
-                <a:spcPts val="0"/>
-              </a:spcBef>
-              <a:spcAft>
-                <a:spcPts val="400"/>
-              </a:spcAft>
-            </a:pPr>
-            <a:r>
-              <a:rPr sz="1200" b="0" i="0">
-                <a:solidFill>
-                  <a:srgbClr val="5B6B85"/>
-                </a:solidFill>
-                <a:latin typeface="Inter"/>
-                <a:cs typeface="Inter"/>
-              </a:rPr>
-              <a:t>Jede neue SKILL.md, die ins Harness kommt, braucht deinen Review.</a:t>
-            </a:r>
-          </a:p>
-        </p:txBody>
-      </p:sp>
-      <p:sp>
-        <p:nvSpPr>
           <p:cNvPr id="24" name="Rounded Rectangle 23"/>
           <p:cNvSpPr/>
           <p:nvPr/>
@@ -64803,144 +58269,6 @@
                 <a:cs typeface="Inter"/>
               </a:rPr>
               <a:t>Du siehst die Agenten live denken und arbeiten — kein Spinner, der etwas verbirgt. Jede Aktion landet im Audit-Trail.</a:t>
-            </a:r>
-          </a:p>
-        </p:txBody>
-      </p:sp>
-      <p:sp>
-        <p:nvSpPr>
-          <p:cNvPr id="27" name="Rounded Rectangle 26"/>
-          <p:cNvSpPr/>
-          <p:nvPr/>
-        </p:nvSpPr>
-        <p:spPr>
-          <a:xfrm>
-            <a:off x="6199632" y="4617720"/>
-            <a:ext cx="5138928" cy="1417320"/>
-          </a:xfrm>
-          <a:prstGeom prst="roundRect">
-            <a:avLst>
-              <a:gd name="adj" fmla="val 6000"/>
-            </a:avLst>
-          </a:prstGeom>
-          <a:solidFill>
-            <a:srgbClr val="CADCFC"/>
-          </a:solidFill>
-          <a:ln>
-            <a:noFill/>
-          </a:ln>
-          <a:effectLst/>
-        </p:spPr>
-        <p:style>
-          <a:lnRef idx="1">
-            <a:schemeClr val="accent1"/>
-          </a:lnRef>
-          <a:fillRef idx="3">
-            <a:schemeClr val="accent1"/>
-          </a:fillRef>
-          <a:effectRef idx="2">
-            <a:schemeClr val="accent1"/>
-          </a:effectRef>
-          <a:fontRef idx="minor">
-            <a:schemeClr val="lt1"/>
-          </a:fontRef>
-        </p:style>
-        <p:txBody>
-          <a:bodyPr rtlCol="0" anchor="ctr"/>
-          <a:lstStyle/>
-          <a:p>
-            <a:pPr algn="ctr"/>
-          </a:p>
-        </p:txBody>
-      </p:sp>
-      <p:sp>
-        <p:nvSpPr>
-          <p:cNvPr id="28" name="TextBox 27"/>
-          <p:cNvSpPr txBox="1"/>
-          <p:nvPr/>
-        </p:nvSpPr>
-        <p:spPr>
-          <a:xfrm>
-            <a:off x="6455664" y="4773168"/>
-            <a:ext cx="4663440" cy="365760"/>
-          </a:xfrm>
-          <a:prstGeom prst="rect">
-            <a:avLst/>
-          </a:prstGeom>
-          <a:noFill/>
-        </p:spPr>
-        <p:txBody>
-          <a:bodyPr wrap="square" anchor="t" lIns="0" rIns="0" tIns="0" bIns="0">
-            <a:noAutofit/>
-          </a:bodyPr>
-          <a:lstStyle/>
-          <a:p>
-            <a:pPr algn="l">
-              <a:lnSpc>
-                <a:spcPct val="100000"/>
-              </a:lnSpc>
-              <a:spcBef>
-                <a:spcPts val="0"/>
-              </a:spcBef>
-              <a:spcAft>
-                <a:spcPts val="400"/>
-              </a:spcAft>
-            </a:pPr>
-            <a:r>
-              <a:rPr sz="1400" b="1" i="0">
-                <a:solidFill>
-                  <a:srgbClr val="1E2761"/>
-                </a:solidFill>
-                <a:latin typeface="Inter"/>
-                <a:cs typeface="Inter"/>
-              </a:rPr>
-              <a:t>Umkehrbarkeit</a:t>
-            </a:r>
-          </a:p>
-        </p:txBody>
-      </p:sp>
-      <p:sp>
-        <p:nvSpPr>
-          <p:cNvPr id="29" name="TextBox 28"/>
-          <p:cNvSpPr txBox="1"/>
-          <p:nvPr/>
-        </p:nvSpPr>
-        <p:spPr>
-          <a:xfrm>
-            <a:off x="6455664" y="5120640"/>
-            <a:ext cx="4663440" cy="822960"/>
-          </a:xfrm>
-          <a:prstGeom prst="rect">
-            <a:avLst/>
-          </a:prstGeom>
-          <a:noFill/>
-        </p:spPr>
-        <p:txBody>
-          <a:bodyPr wrap="square" anchor="t" lIns="0" rIns="0" tIns="0" bIns="0">
-            <a:noAutofit/>
-          </a:bodyPr>
-          <a:lstStyle/>
-          <a:p>
-            <a:pPr algn="l">
-              <a:lnSpc>
-                <a:spcPct val="114000"/>
-              </a:lnSpc>
-              <a:spcBef>
-                <a:spcPts val="0"/>
-              </a:spcBef>
-              <a:spcAft>
-                <a:spcPts val="400"/>
-              </a:spcAft>
-            </a:pPr>
-            <a:r>
-              <a:rPr sz="1200" b="0" i="0">
-                <a:solidFill>
-                  <a:srgbClr val="0E1735"/>
-                </a:solidFill>
-                <a:latin typeface="Inter"/>
-                <a:cs typeface="Inter"/>
-              </a:rPr>
-              <a:t>Jede Planversion bleibt erhalten. Du kannst zurück, vergleichen und neu planen — nichts wird unwiderruflich überschrieben.</a:t>
             </a:r>
           </a:p>
         </p:txBody>
@@ -65055,6 +58383,30 @@
           <a:xfrm>
             <a:off x="11393424" y="329184"/>
             <a:ext cx="310896" cy="310896"/>
+          </a:xfrm>
+          <a:prstGeom prst="rect">
+            <a:avLst/>
+          </a:prstGeom>
+        </p:spPr>
+      </p:pic>
+      <p:pic>
+        <p:nvPicPr>
+          <p:cNvPr id="33" name="Picture 32" descr="g_02_new.png"/>
+          <p:cNvPicPr>
+            <a:picLocks noChangeAspect="1"/>
+          </p:cNvPicPr>
+          <p:nvPr/>
+        </p:nvPicPr>
+        <p:blipFill>
+          <a:blip r:embed="rId3"/>
+          <a:stretch>
+            <a:fillRect/>
+          </a:stretch>
+        </p:blipFill>
+        <p:spPr>
+          <a:xfrm>
+            <a:off x="5870448" y="1930527"/>
+            <a:ext cx="5468112" cy="3417570"/>
           </a:xfrm>
           <a:prstGeom prst="rect">
             <a:avLst/>
@@ -66601,692 +59953,30 @@
           </a:prstGeom>
         </p:spPr>
       </p:pic>
-      <p:sp>
-        <p:nvSpPr>
-          <p:cNvPr id="36" name="Rounded Rectangle 35"/>
-          <p:cNvSpPr/>
-          <p:nvPr/>
-        </p:nvSpPr>
+      <p:pic>
+        <p:nvPicPr>
+          <p:cNvPr id="36" name="Picture 35" descr="crop_g_03_interview.png"/>
+          <p:cNvPicPr>
+            <a:picLocks noChangeAspect="1"/>
+          </p:cNvPicPr>
+          <p:nvPr/>
+        </p:nvPicPr>
+        <p:blipFill>
+          <a:blip r:embed="rId3"/>
+          <a:stretch>
+            <a:fillRect/>
+          </a:stretch>
+        </p:blipFill>
         <p:spPr>
           <a:xfrm>
             <a:off x="5870448" y="1828800"/>
             <a:ext cx="5468112" cy="3621024"/>
           </a:xfrm>
-          <a:prstGeom prst="roundRect">
-            <a:avLst>
-              <a:gd name="adj" fmla="val 3500"/>
-            </a:avLst>
-          </a:prstGeom>
-          <a:solidFill>
-            <a:srgbClr val="FFFFFF"/>
-          </a:solidFill>
-          <a:ln w="15875">
-            <a:solidFill>
-              <a:srgbClr val="AFC6F0"/>
-            </a:solidFill>
-          </a:ln>
-          <a:effectLst/>
-        </p:spPr>
-        <p:style>
-          <a:lnRef idx="1">
-            <a:schemeClr val="accent1"/>
-          </a:lnRef>
-          <a:fillRef idx="3">
-            <a:schemeClr val="accent1"/>
-          </a:fillRef>
-          <a:effectRef idx="2">
-            <a:schemeClr val="accent1"/>
-          </a:effectRef>
-          <a:fontRef idx="minor">
-            <a:schemeClr val="lt1"/>
-          </a:fontRef>
-        </p:style>
-        <p:txBody>
-          <a:bodyPr rtlCol="0" anchor="ctr"/>
-          <a:lstStyle/>
-          <a:p>
-            <a:pPr algn="ctr"/>
-          </a:p>
-        </p:txBody>
-      </p:sp>
-      <p:sp>
-        <p:nvSpPr>
-          <p:cNvPr id="37" name="Rounded Rectangle 36"/>
-          <p:cNvSpPr/>
-          <p:nvPr/>
-        </p:nvSpPr>
-        <p:spPr>
-          <a:xfrm>
-            <a:off x="5870448" y="1828800"/>
-            <a:ext cx="5468112" cy="365760"/>
-          </a:xfrm>
-          <a:prstGeom prst="roundRect">
-            <a:avLst>
-              <a:gd name="adj" fmla="val 12000"/>
-            </a:avLst>
-          </a:prstGeom>
-          <a:solidFill>
-            <a:srgbClr val="1E2761"/>
-          </a:solidFill>
-          <a:ln>
-            <a:noFill/>
-          </a:ln>
-          <a:effectLst/>
-        </p:spPr>
-        <p:style>
-          <a:lnRef idx="1">
-            <a:schemeClr val="accent1"/>
-          </a:lnRef>
-          <a:fillRef idx="3">
-            <a:schemeClr val="accent1"/>
-          </a:fillRef>
-          <a:effectRef idx="2">
-            <a:schemeClr val="accent1"/>
-          </a:effectRef>
-          <a:fontRef idx="minor">
-            <a:schemeClr val="lt1"/>
-          </a:fontRef>
-        </p:style>
-        <p:txBody>
-          <a:bodyPr rtlCol="0" anchor="ctr"/>
-          <a:lstStyle/>
-          <a:p>
-            <a:pPr algn="ctr"/>
-          </a:p>
-        </p:txBody>
-      </p:sp>
-      <p:sp>
-        <p:nvSpPr>
-          <p:cNvPr id="38" name="Rectangle 37"/>
-          <p:cNvSpPr/>
-          <p:nvPr/>
-        </p:nvSpPr>
-        <p:spPr>
-          <a:xfrm>
-            <a:off x="5870448" y="2011680"/>
-            <a:ext cx="5468112" cy="182880"/>
-          </a:xfrm>
-          <a:prstGeom prst="rect">
-            <a:avLst/>
-          </a:prstGeom>
-          <a:solidFill>
-            <a:srgbClr val="1E2761"/>
-          </a:solidFill>
-          <a:ln>
-            <a:noFill/>
-          </a:ln>
-          <a:effectLst/>
-        </p:spPr>
-        <p:style>
-          <a:lnRef idx="1">
-            <a:schemeClr val="accent1"/>
-          </a:lnRef>
-          <a:fillRef idx="3">
-            <a:schemeClr val="accent1"/>
-          </a:fillRef>
-          <a:effectRef idx="2">
-            <a:schemeClr val="accent1"/>
-          </a:effectRef>
-          <a:fontRef idx="minor">
-            <a:schemeClr val="lt1"/>
-          </a:fontRef>
-        </p:style>
-        <p:txBody>
-          <a:bodyPr rtlCol="0" anchor="ctr"/>
-          <a:lstStyle/>
-          <a:p>
-            <a:pPr algn="ctr"/>
-          </a:p>
-        </p:txBody>
-      </p:sp>
-      <p:sp>
-        <p:nvSpPr>
-          <p:cNvPr id="39" name="Oval 38"/>
-          <p:cNvSpPr/>
-          <p:nvPr/>
-        </p:nvSpPr>
-        <p:spPr>
-          <a:xfrm>
-            <a:off x="6035040" y="1961388"/>
-            <a:ext cx="100584" cy="100584"/>
-          </a:xfrm>
-          <a:prstGeom prst="ellipse">
-            <a:avLst/>
-          </a:prstGeom>
-          <a:solidFill>
-            <a:srgbClr val="C3423F"/>
-          </a:solidFill>
-          <a:ln>
-            <a:noFill/>
-          </a:ln>
-          <a:effectLst/>
-        </p:spPr>
-        <p:style>
-          <a:lnRef idx="1">
-            <a:schemeClr val="accent1"/>
-          </a:lnRef>
-          <a:fillRef idx="3">
-            <a:schemeClr val="accent1"/>
-          </a:fillRef>
-          <a:effectRef idx="2">
-            <a:schemeClr val="accent1"/>
-          </a:effectRef>
-          <a:fontRef idx="minor">
-            <a:schemeClr val="lt1"/>
-          </a:fontRef>
-        </p:style>
-        <p:txBody>
-          <a:bodyPr rtlCol="0" anchor="ctr"/>
-          <a:lstStyle/>
-          <a:p>
-            <a:pPr algn="ctr"/>
-          </a:p>
-        </p:txBody>
-      </p:sp>
-      <p:sp>
-        <p:nvSpPr>
-          <p:cNvPr id="40" name="Oval 39"/>
-          <p:cNvSpPr/>
-          <p:nvPr/>
-        </p:nvSpPr>
-        <p:spPr>
-          <a:xfrm>
-            <a:off x="6217920" y="1961388"/>
-            <a:ext cx="100584" cy="100584"/>
-          </a:xfrm>
-          <a:prstGeom prst="ellipse">
-            <a:avLst/>
-          </a:prstGeom>
-          <a:solidFill>
-            <a:srgbClr val="F2B33D"/>
-          </a:solidFill>
-          <a:ln>
-            <a:noFill/>
-          </a:ln>
-          <a:effectLst/>
-        </p:spPr>
-        <p:style>
-          <a:lnRef idx="1">
-            <a:schemeClr val="accent1"/>
-          </a:lnRef>
-          <a:fillRef idx="3">
-            <a:schemeClr val="accent1"/>
-          </a:fillRef>
-          <a:effectRef idx="2">
-            <a:schemeClr val="accent1"/>
-          </a:effectRef>
-          <a:fontRef idx="minor">
-            <a:schemeClr val="lt1"/>
-          </a:fontRef>
-        </p:style>
-        <p:txBody>
-          <a:bodyPr rtlCol="0" anchor="ctr"/>
-          <a:lstStyle/>
-          <a:p>
-            <a:pPr algn="ctr"/>
-          </a:p>
-        </p:txBody>
-      </p:sp>
-      <p:sp>
-        <p:nvSpPr>
-          <p:cNvPr id="41" name="Oval 40"/>
-          <p:cNvSpPr/>
-          <p:nvPr/>
-        </p:nvSpPr>
-        <p:spPr>
-          <a:xfrm>
-            <a:off x="6400800" y="1961388"/>
-            <a:ext cx="100584" cy="100584"/>
-          </a:xfrm>
-          <a:prstGeom prst="ellipse">
-            <a:avLst/>
-          </a:prstGeom>
-          <a:solidFill>
-            <a:srgbClr val="5A9367"/>
-          </a:solidFill>
-          <a:ln>
-            <a:noFill/>
-          </a:ln>
-          <a:effectLst/>
-        </p:spPr>
-        <p:style>
-          <a:lnRef idx="1">
-            <a:schemeClr val="accent1"/>
-          </a:lnRef>
-          <a:fillRef idx="3">
-            <a:schemeClr val="accent1"/>
-          </a:fillRef>
-          <a:effectRef idx="2">
-            <a:schemeClr val="accent1"/>
-          </a:effectRef>
-          <a:fontRef idx="minor">
-            <a:schemeClr val="lt1"/>
-          </a:fontRef>
-        </p:style>
-        <p:txBody>
-          <a:bodyPr rtlCol="0" anchor="ctr"/>
-          <a:lstStyle/>
-          <a:p>
-            <a:pPr algn="ctr"/>
-          </a:p>
-        </p:txBody>
-      </p:sp>
-      <p:sp>
-        <p:nvSpPr>
-          <p:cNvPr id="42" name="Rounded Rectangle 41"/>
-          <p:cNvSpPr/>
-          <p:nvPr/>
-        </p:nvSpPr>
-        <p:spPr>
-          <a:xfrm>
-            <a:off x="6739128" y="1920240"/>
-            <a:ext cx="2926080" cy="182880"/>
-          </a:xfrm>
-          <a:prstGeom prst="roundRect">
-            <a:avLst>
-              <a:gd name="adj" fmla="val 50000"/>
-            </a:avLst>
-          </a:prstGeom>
-          <a:solidFill>
-            <a:srgbClr val="FFFFFF"/>
-          </a:solidFill>
-          <a:ln>
-            <a:noFill/>
-          </a:ln>
-          <a:effectLst/>
-        </p:spPr>
-        <p:style>
-          <a:lnRef idx="1">
-            <a:schemeClr val="accent1"/>
-          </a:lnRef>
-          <a:fillRef idx="3">
-            <a:schemeClr val="accent1"/>
-          </a:fillRef>
-          <a:effectRef idx="2">
-            <a:schemeClr val="accent1"/>
-          </a:effectRef>
-          <a:fontRef idx="minor">
-            <a:schemeClr val="lt1"/>
-          </a:fontRef>
-        </p:style>
-        <p:txBody>
-          <a:bodyPr rtlCol="0" anchor="ctr"/>
-          <a:lstStyle/>
-          <a:p>
-            <a:pPr algn="ctr"/>
-          </a:p>
-        </p:txBody>
-      </p:sp>
-      <p:sp>
-        <p:nvSpPr>
-          <p:cNvPr id="43" name="TextBox 42"/>
-          <p:cNvSpPr txBox="1"/>
-          <p:nvPr/>
-        </p:nvSpPr>
-        <p:spPr>
-          <a:xfrm>
-            <a:off x="6830568" y="1897380"/>
-            <a:ext cx="2834640" cy="201168"/>
-          </a:xfrm>
-          <a:prstGeom prst="rect">
-            <a:avLst/>
-          </a:prstGeom>
-          <a:noFill/>
-        </p:spPr>
-        <p:txBody>
-          <a:bodyPr wrap="square" anchor="ctr" lIns="0" rIns="0" tIns="0" bIns="0">
-            <a:noAutofit/>
-          </a:bodyPr>
-          <a:lstStyle/>
-          <a:p>
-            <a:pPr algn="l">
-              <a:lnSpc>
-                <a:spcPct val="100000"/>
-              </a:lnSpc>
-              <a:spcBef>
-                <a:spcPts val="0"/>
-              </a:spcBef>
-              <a:spcAft>
-                <a:spcPts val="400"/>
-              </a:spcAft>
-            </a:pPr>
-            <a:r>
-              <a:rPr sz="900" b="0" i="0">
-                <a:solidFill>
-                  <a:srgbClr val="5B6B85"/>
-                </a:solidFill>
-                <a:latin typeface="JetBrains Mono"/>
-                <a:cs typeface="JetBrains Mono"/>
-              </a:rPr>
-              <a:t>zgpm.aegira.ai/projects/neu</a:t>
-            </a:r>
-          </a:p>
-        </p:txBody>
-      </p:sp>
-      <p:sp>
-        <p:nvSpPr>
-          <p:cNvPr id="44" name="TextBox 43"/>
-          <p:cNvSpPr txBox="1"/>
-          <p:nvPr/>
-        </p:nvSpPr>
-        <p:spPr>
-          <a:xfrm>
-            <a:off x="6144768" y="2395728"/>
-            <a:ext cx="4919472" cy="274320"/>
-          </a:xfrm>
-          <a:prstGeom prst="rect">
-            <a:avLst/>
-          </a:prstGeom>
-          <a:noFill/>
-        </p:spPr>
-        <p:txBody>
-          <a:bodyPr wrap="square" anchor="t" lIns="0" rIns="0" tIns="0" bIns="0">
-            <a:noAutofit/>
-          </a:bodyPr>
-          <a:lstStyle/>
-          <a:p>
-            <a:pPr algn="l">
-              <a:lnSpc>
-                <a:spcPct val="100000"/>
-              </a:lnSpc>
-              <a:spcBef>
-                <a:spcPts val="0"/>
-              </a:spcBef>
-              <a:spcAft>
-                <a:spcPts val="400"/>
-              </a:spcAft>
-            </a:pPr>
-            <a:r>
-              <a:rPr sz="1300" b="1" i="0">
-                <a:solidFill>
-                  <a:srgbClr val="0E1735"/>
-                </a:solidFill>
-                <a:latin typeface="Inter"/>
-                <a:cs typeface="Inter"/>
-              </a:rPr>
-              <a:t>Neues Projekt</a:t>
-            </a:r>
-          </a:p>
-        </p:txBody>
-      </p:sp>
-      <p:sp>
-        <p:nvSpPr>
-          <p:cNvPr id="45" name="TextBox 44"/>
-          <p:cNvSpPr txBox="1"/>
-          <p:nvPr/>
-        </p:nvSpPr>
-        <p:spPr>
-          <a:xfrm>
-            <a:off x="6144768" y="2697480"/>
-            <a:ext cx="4919472" cy="274320"/>
-          </a:xfrm>
-          <a:prstGeom prst="rect">
-            <a:avLst/>
-          </a:prstGeom>
-          <a:noFill/>
-        </p:spPr>
-        <p:txBody>
-          <a:bodyPr wrap="square" anchor="t" lIns="0" rIns="0" tIns="0" bIns="0">
-            <a:noAutofit/>
-          </a:bodyPr>
-          <a:lstStyle/>
-          <a:p>
-            <a:pPr algn="l">
-              <a:lnSpc>
-                <a:spcPct val="100000"/>
-              </a:lnSpc>
-              <a:spcBef>
-                <a:spcPts val="0"/>
-              </a:spcBef>
-              <a:spcAft>
-                <a:spcPts val="400"/>
-              </a:spcAft>
-            </a:pPr>
-            <a:r>
-              <a:rPr sz="1000" b="0" i="0">
-                <a:solidFill>
-                  <a:srgbClr val="5B6B85"/>
-                </a:solidFill>
-                <a:latin typeface="Inter"/>
-                <a:cs typeface="Inter"/>
-              </a:rPr>
-              <a:t>Erzähl in eigenen Worten, was entstehen soll.</a:t>
-            </a:r>
-          </a:p>
-        </p:txBody>
-      </p:sp>
-      <p:sp>
-        <p:nvSpPr>
-          <p:cNvPr id="46" name="Rounded Rectangle 45"/>
-          <p:cNvSpPr/>
-          <p:nvPr/>
-        </p:nvSpPr>
-        <p:spPr>
-          <a:xfrm>
-            <a:off x="6144768" y="3063239"/>
-            <a:ext cx="4919472" cy="1600200"/>
-          </a:xfrm>
-          <a:prstGeom prst="roundRect">
-            <a:avLst>
-              <a:gd name="adj" fmla="val 5000"/>
-            </a:avLst>
-          </a:prstGeom>
-          <a:solidFill>
-            <a:srgbClr val="F2F6FD"/>
-          </a:solidFill>
-          <a:ln w="12700">
-            <a:solidFill>
-              <a:srgbClr val="AFC6F0"/>
-            </a:solidFill>
-          </a:ln>
-          <a:effectLst/>
-        </p:spPr>
-        <p:style>
-          <a:lnRef idx="1">
-            <a:schemeClr val="accent1"/>
-          </a:lnRef>
-          <a:fillRef idx="3">
-            <a:schemeClr val="accent1"/>
-          </a:fillRef>
-          <a:effectRef idx="2">
-            <a:schemeClr val="accent1"/>
-          </a:effectRef>
-          <a:fontRef idx="minor">
-            <a:schemeClr val="lt1"/>
-          </a:fontRef>
-        </p:style>
-        <p:txBody>
-          <a:bodyPr rtlCol="0" anchor="ctr"/>
-          <a:lstStyle/>
-          <a:p>
-            <a:pPr algn="ctr"/>
-          </a:p>
-        </p:txBody>
-      </p:sp>
-      <p:sp>
-        <p:nvSpPr>
-          <p:cNvPr id="47" name="TextBox 46"/>
-          <p:cNvSpPr txBox="1"/>
-          <p:nvPr/>
-        </p:nvSpPr>
-        <p:spPr>
-          <a:xfrm>
-            <a:off x="6327648" y="3218688"/>
-            <a:ext cx="4553712" cy="1371600"/>
-          </a:xfrm>
-          <a:prstGeom prst="rect">
-            <a:avLst/>
-          </a:prstGeom>
-          <a:noFill/>
-        </p:spPr>
-        <p:txBody>
-          <a:bodyPr wrap="square" anchor="t" lIns="0" rIns="0" tIns="0" bIns="0">
-            <a:noAutofit/>
-          </a:bodyPr>
-          <a:lstStyle/>
-          <a:p>
-            <a:pPr algn="l">
-              <a:lnSpc>
-                <a:spcPct val="118000"/>
-              </a:lnSpc>
-              <a:spcBef>
-                <a:spcPts val="0"/>
-              </a:spcBef>
-              <a:spcAft>
-                <a:spcPts val="400"/>
-              </a:spcAft>
-            </a:pPr>
-            <a:r>
-              <a:rPr sz="1100" b="0" i="0">
-                <a:solidFill>
-                  <a:srgbClr val="0E1735"/>
-                </a:solidFill>
-                <a:latin typeface="Inter"/>
-                <a:cs typeface="Inter"/>
-              </a:rPr>
-              <a:t>Ich möchte einen Newsletter automatisieren: Themen sammeln, Entwürfe schreiben, freigeben lassen und wöchentlich versenden. Qualität und Tonalität sollen stimmen, und ich will am Ende selbst freigeben.</a:t>
-            </a:r>
-          </a:p>
-        </p:txBody>
-      </p:sp>
-      <p:sp>
-        <p:nvSpPr>
-          <p:cNvPr id="48" name="TextBox 47"/>
-          <p:cNvSpPr txBox="1"/>
-          <p:nvPr/>
-        </p:nvSpPr>
-        <p:spPr>
-          <a:xfrm>
-            <a:off x="6144768" y="4773168"/>
-            <a:ext cx="3200400" cy="274320"/>
-          </a:xfrm>
-          <a:prstGeom prst="rect">
-            <a:avLst/>
-          </a:prstGeom>
-          <a:noFill/>
-        </p:spPr>
-        <p:txBody>
-          <a:bodyPr wrap="square" anchor="t" lIns="0" rIns="0" tIns="0" bIns="0">
-            <a:noAutofit/>
-          </a:bodyPr>
-          <a:lstStyle/>
-          <a:p>
-            <a:pPr algn="l">
-              <a:lnSpc>
-                <a:spcPct val="100000"/>
-              </a:lnSpc>
-              <a:spcBef>
-                <a:spcPts val="0"/>
-              </a:spcBef>
-              <a:spcAft>
-                <a:spcPts val="400"/>
-              </a:spcAft>
-            </a:pPr>
-            <a:r>
-              <a:rPr sz="900" b="0" i="1">
-                <a:solidFill>
-                  <a:srgbClr val="8A93A6"/>
-                </a:solidFill>
-                <a:latin typeface="Inter"/>
-                <a:cs typeface="Inter"/>
-              </a:rPr>
-              <a:t>Beispielprojekt „Newsletter-Automatisierung“</a:t>
-            </a:r>
-          </a:p>
-        </p:txBody>
-      </p:sp>
-      <p:sp>
-        <p:nvSpPr>
-          <p:cNvPr id="49" name="Rounded Rectangle 48"/>
-          <p:cNvSpPr/>
-          <p:nvPr/>
-        </p:nvSpPr>
-        <p:spPr>
-          <a:xfrm>
-            <a:off x="9738360" y="4736592"/>
-            <a:ext cx="1325880" cy="329184"/>
-          </a:xfrm>
-          <a:prstGeom prst="roundRect">
-            <a:avLst>
-              <a:gd name="adj" fmla="val 50000"/>
-            </a:avLst>
-          </a:prstGeom>
-          <a:solidFill>
-            <a:srgbClr val="E8703A"/>
-          </a:solidFill>
-          <a:ln>
-            <a:noFill/>
-          </a:ln>
-          <a:effectLst/>
-        </p:spPr>
-        <p:style>
-          <a:lnRef idx="1">
-            <a:schemeClr val="accent1"/>
-          </a:lnRef>
-          <a:fillRef idx="3">
-            <a:schemeClr val="accent1"/>
-          </a:fillRef>
-          <a:effectRef idx="2">
-            <a:schemeClr val="accent1"/>
-          </a:effectRef>
-          <a:fontRef idx="minor">
-            <a:schemeClr val="lt1"/>
-          </a:fontRef>
-        </p:style>
-        <p:txBody>
-          <a:bodyPr rtlCol="0" anchor="ctr"/>
-          <a:lstStyle/>
-          <a:p>
-            <a:pPr algn="ctr"/>
-          </a:p>
-        </p:txBody>
-      </p:sp>
-      <p:sp>
-        <p:nvSpPr>
-          <p:cNvPr id="50" name="TextBox 49"/>
-          <p:cNvSpPr txBox="1"/>
-          <p:nvPr/>
-        </p:nvSpPr>
-        <p:spPr>
-          <a:xfrm>
-            <a:off x="9738360" y="4732020"/>
-            <a:ext cx="1325880" cy="329184"/>
-          </a:xfrm>
-          <a:prstGeom prst="rect">
-            <a:avLst/>
-          </a:prstGeom>
-          <a:noFill/>
-        </p:spPr>
-        <p:txBody>
-          <a:bodyPr wrap="square" anchor="ctr" lIns="0" rIns="0" tIns="0" bIns="0">
-            <a:noAutofit/>
-          </a:bodyPr>
-          <a:lstStyle/>
-          <a:p>
-            <a:pPr algn="ctr">
-              <a:lnSpc>
-                <a:spcPct val="100000"/>
-              </a:lnSpc>
-              <a:spcBef>
-                <a:spcPts val="0"/>
-              </a:spcBef>
-              <a:spcAft>
-                <a:spcPts val="400"/>
-              </a:spcAft>
-            </a:pPr>
-            <a:r>
-              <a:rPr sz="1100" b="1" i="0">
-                <a:solidFill>
-                  <a:srgbClr val="FFFFFF"/>
-                </a:solidFill>
-                <a:latin typeface="Inter"/>
-                <a:cs typeface="Inter"/>
-              </a:rPr>
-              <a:t>Weiter  →</a:t>
-            </a:r>
-          </a:p>
-        </p:txBody>
-      </p:sp>
+          <a:prstGeom prst="rect">
+            <a:avLst/>
+          </a:prstGeom>
+        </p:spPr>
+      </p:pic>
     </p:spTree>
   </p:cSld>
   <p:clrMapOvr>
@@ -68827,1092 +61517,30 @@
           </a:prstGeom>
         </p:spPr>
       </p:pic>
-      <p:sp>
-        <p:nvSpPr>
-          <p:cNvPr id="36" name="Rounded Rectangle 35"/>
-          <p:cNvSpPr/>
-          <p:nvPr/>
-        </p:nvSpPr>
-        <p:spPr>
-          <a:xfrm>
-            <a:off x="5870448" y="1828800"/>
-            <a:ext cx="5468112" cy="3621024"/>
-          </a:xfrm>
-          <a:prstGeom prst="roundRect">
-            <a:avLst>
-              <a:gd name="adj" fmla="val 3500"/>
-            </a:avLst>
-          </a:prstGeom>
-          <a:solidFill>
-            <a:srgbClr val="FFFFFF"/>
-          </a:solidFill>
-          <a:ln w="15875">
-            <a:solidFill>
-              <a:srgbClr val="AFC6F0"/>
-            </a:solidFill>
-          </a:ln>
-          <a:effectLst/>
-        </p:spPr>
-        <p:style>
-          <a:lnRef idx="1">
-            <a:schemeClr val="accent1"/>
-          </a:lnRef>
-          <a:fillRef idx="3">
-            <a:schemeClr val="accent1"/>
-          </a:fillRef>
-          <a:effectRef idx="2">
-            <a:schemeClr val="accent1"/>
-          </a:effectRef>
-          <a:fontRef idx="minor">
-            <a:schemeClr val="lt1"/>
-          </a:fontRef>
-        </p:style>
-        <p:txBody>
-          <a:bodyPr rtlCol="0" anchor="ctr"/>
-          <a:lstStyle/>
-          <a:p>
-            <a:pPr algn="ctr"/>
-          </a:p>
-        </p:txBody>
-      </p:sp>
-      <p:sp>
-        <p:nvSpPr>
-          <p:cNvPr id="37" name="Rounded Rectangle 36"/>
-          <p:cNvSpPr/>
-          <p:nvPr/>
-        </p:nvSpPr>
-        <p:spPr>
-          <a:xfrm>
-            <a:off x="5870448" y="1828800"/>
-            <a:ext cx="5468112" cy="365760"/>
-          </a:xfrm>
-          <a:prstGeom prst="roundRect">
-            <a:avLst>
-              <a:gd name="adj" fmla="val 12000"/>
-            </a:avLst>
-          </a:prstGeom>
-          <a:solidFill>
-            <a:srgbClr val="1E2761"/>
-          </a:solidFill>
-          <a:ln>
-            <a:noFill/>
-          </a:ln>
-          <a:effectLst/>
-        </p:spPr>
-        <p:style>
-          <a:lnRef idx="1">
-            <a:schemeClr val="accent1"/>
-          </a:lnRef>
-          <a:fillRef idx="3">
-            <a:schemeClr val="accent1"/>
-          </a:fillRef>
-          <a:effectRef idx="2">
-            <a:schemeClr val="accent1"/>
-          </a:effectRef>
-          <a:fontRef idx="minor">
-            <a:schemeClr val="lt1"/>
-          </a:fontRef>
-        </p:style>
-        <p:txBody>
-          <a:bodyPr rtlCol="0" anchor="ctr"/>
-          <a:lstStyle/>
-          <a:p>
-            <a:pPr algn="ctr"/>
-          </a:p>
-        </p:txBody>
-      </p:sp>
-      <p:sp>
-        <p:nvSpPr>
-          <p:cNvPr id="38" name="Rectangle 37"/>
-          <p:cNvSpPr/>
-          <p:nvPr/>
-        </p:nvSpPr>
-        <p:spPr>
-          <a:xfrm>
-            <a:off x="5870448" y="2011680"/>
-            <a:ext cx="5468112" cy="182880"/>
-          </a:xfrm>
-          <a:prstGeom prst="rect">
-            <a:avLst/>
-          </a:prstGeom>
-          <a:solidFill>
-            <a:srgbClr val="1E2761"/>
-          </a:solidFill>
-          <a:ln>
-            <a:noFill/>
-          </a:ln>
-          <a:effectLst/>
-        </p:spPr>
-        <p:style>
-          <a:lnRef idx="1">
-            <a:schemeClr val="accent1"/>
-          </a:lnRef>
-          <a:fillRef idx="3">
-            <a:schemeClr val="accent1"/>
-          </a:fillRef>
-          <a:effectRef idx="2">
-            <a:schemeClr val="accent1"/>
-          </a:effectRef>
-          <a:fontRef idx="minor">
-            <a:schemeClr val="lt1"/>
-          </a:fontRef>
-        </p:style>
-        <p:txBody>
-          <a:bodyPr rtlCol="0" anchor="ctr"/>
-          <a:lstStyle/>
-          <a:p>
-            <a:pPr algn="ctr"/>
-          </a:p>
-        </p:txBody>
-      </p:sp>
-      <p:sp>
-        <p:nvSpPr>
-          <p:cNvPr id="39" name="Oval 38"/>
-          <p:cNvSpPr/>
-          <p:nvPr/>
-        </p:nvSpPr>
-        <p:spPr>
-          <a:xfrm>
-            <a:off x="6035040" y="1961388"/>
-            <a:ext cx="100584" cy="100584"/>
-          </a:xfrm>
-          <a:prstGeom prst="ellipse">
-            <a:avLst/>
-          </a:prstGeom>
-          <a:solidFill>
-            <a:srgbClr val="C3423F"/>
-          </a:solidFill>
-          <a:ln>
-            <a:noFill/>
-          </a:ln>
-          <a:effectLst/>
-        </p:spPr>
-        <p:style>
-          <a:lnRef idx="1">
-            <a:schemeClr val="accent1"/>
-          </a:lnRef>
-          <a:fillRef idx="3">
-            <a:schemeClr val="accent1"/>
-          </a:fillRef>
-          <a:effectRef idx="2">
-            <a:schemeClr val="accent1"/>
-          </a:effectRef>
-          <a:fontRef idx="minor">
-            <a:schemeClr val="lt1"/>
-          </a:fontRef>
-        </p:style>
-        <p:txBody>
-          <a:bodyPr rtlCol="0" anchor="ctr"/>
-          <a:lstStyle/>
-          <a:p>
-            <a:pPr algn="ctr"/>
-          </a:p>
-        </p:txBody>
-      </p:sp>
-      <p:sp>
-        <p:nvSpPr>
-          <p:cNvPr id="40" name="Oval 39"/>
-          <p:cNvSpPr/>
-          <p:nvPr/>
-        </p:nvSpPr>
-        <p:spPr>
-          <a:xfrm>
-            <a:off x="6217920" y="1961388"/>
-            <a:ext cx="100584" cy="100584"/>
-          </a:xfrm>
-          <a:prstGeom prst="ellipse">
-            <a:avLst/>
-          </a:prstGeom>
-          <a:solidFill>
-            <a:srgbClr val="F2B33D"/>
-          </a:solidFill>
-          <a:ln>
-            <a:noFill/>
-          </a:ln>
-          <a:effectLst/>
-        </p:spPr>
-        <p:style>
-          <a:lnRef idx="1">
-            <a:schemeClr val="accent1"/>
-          </a:lnRef>
-          <a:fillRef idx="3">
-            <a:schemeClr val="accent1"/>
-          </a:fillRef>
-          <a:effectRef idx="2">
-            <a:schemeClr val="accent1"/>
-          </a:effectRef>
-          <a:fontRef idx="minor">
-            <a:schemeClr val="lt1"/>
-          </a:fontRef>
-        </p:style>
-        <p:txBody>
-          <a:bodyPr rtlCol="0" anchor="ctr"/>
-          <a:lstStyle/>
-          <a:p>
-            <a:pPr algn="ctr"/>
-          </a:p>
-        </p:txBody>
-      </p:sp>
-      <p:sp>
-        <p:nvSpPr>
-          <p:cNvPr id="41" name="Oval 40"/>
-          <p:cNvSpPr/>
-          <p:nvPr/>
-        </p:nvSpPr>
-        <p:spPr>
-          <a:xfrm>
-            <a:off x="6400800" y="1961388"/>
-            <a:ext cx="100584" cy="100584"/>
-          </a:xfrm>
-          <a:prstGeom prst="ellipse">
-            <a:avLst/>
-          </a:prstGeom>
-          <a:solidFill>
-            <a:srgbClr val="5A9367"/>
-          </a:solidFill>
-          <a:ln>
-            <a:noFill/>
-          </a:ln>
-          <a:effectLst/>
-        </p:spPr>
-        <p:style>
-          <a:lnRef idx="1">
-            <a:schemeClr val="accent1"/>
-          </a:lnRef>
-          <a:fillRef idx="3">
-            <a:schemeClr val="accent1"/>
-          </a:fillRef>
-          <a:effectRef idx="2">
-            <a:schemeClr val="accent1"/>
-          </a:effectRef>
-          <a:fontRef idx="minor">
-            <a:schemeClr val="lt1"/>
-          </a:fontRef>
-        </p:style>
-        <p:txBody>
-          <a:bodyPr rtlCol="0" anchor="ctr"/>
-          <a:lstStyle/>
-          <a:p>
-            <a:pPr algn="ctr"/>
-          </a:p>
-        </p:txBody>
-      </p:sp>
-      <p:sp>
-        <p:nvSpPr>
-          <p:cNvPr id="42" name="Rounded Rectangle 41"/>
-          <p:cNvSpPr/>
-          <p:nvPr/>
-        </p:nvSpPr>
-        <p:spPr>
-          <a:xfrm>
-            <a:off x="6739128" y="1920240"/>
-            <a:ext cx="2926080" cy="182880"/>
-          </a:xfrm>
-          <a:prstGeom prst="roundRect">
-            <a:avLst>
-              <a:gd name="adj" fmla="val 50000"/>
-            </a:avLst>
-          </a:prstGeom>
-          <a:solidFill>
-            <a:srgbClr val="FFFFFF"/>
-          </a:solidFill>
-          <a:ln>
-            <a:noFill/>
-          </a:ln>
-          <a:effectLst/>
-        </p:spPr>
-        <p:style>
-          <a:lnRef idx="1">
-            <a:schemeClr val="accent1"/>
-          </a:lnRef>
-          <a:fillRef idx="3">
-            <a:schemeClr val="accent1"/>
-          </a:fillRef>
-          <a:effectRef idx="2">
-            <a:schemeClr val="accent1"/>
-          </a:effectRef>
-          <a:fontRef idx="minor">
-            <a:schemeClr val="lt1"/>
-          </a:fontRef>
-        </p:style>
-        <p:txBody>
-          <a:bodyPr rtlCol="0" anchor="ctr"/>
-          <a:lstStyle/>
-          <a:p>
-            <a:pPr algn="ctr"/>
-          </a:p>
-        </p:txBody>
-      </p:sp>
-      <p:sp>
-        <p:nvSpPr>
-          <p:cNvPr id="43" name="TextBox 42"/>
-          <p:cNvSpPr txBox="1"/>
-          <p:nvPr/>
-        </p:nvSpPr>
-        <p:spPr>
-          <a:xfrm>
-            <a:off x="6830568" y="1897380"/>
-            <a:ext cx="2834640" cy="201168"/>
-          </a:xfrm>
-          <a:prstGeom prst="rect">
-            <a:avLst/>
-          </a:prstGeom>
-          <a:noFill/>
-        </p:spPr>
-        <p:txBody>
-          <a:bodyPr wrap="square" anchor="ctr" lIns="0" rIns="0" tIns="0" bIns="0">
-            <a:noAutofit/>
-          </a:bodyPr>
-          <a:lstStyle/>
-          <a:p>
-            <a:pPr algn="l">
-              <a:lnSpc>
-                <a:spcPct val="100000"/>
-              </a:lnSpc>
-              <a:spcBef>
-                <a:spcPts val="0"/>
-              </a:spcBef>
-              <a:spcAft>
-                <a:spcPts val="400"/>
-              </a:spcAft>
-            </a:pPr>
-            <a:r>
-              <a:rPr sz="900" b="0" i="0">
-                <a:solidFill>
-                  <a:srgbClr val="5B6B85"/>
-                </a:solidFill>
-                <a:latin typeface="JetBrains Mono"/>
-                <a:cs typeface="JetBrains Mono"/>
-              </a:rPr>
-              <a:t>zgpm.aegira.ai/projects/…/interview</a:t>
-            </a:r>
-          </a:p>
-        </p:txBody>
-      </p:sp>
-      <p:sp>
-        <p:nvSpPr>
-          <p:cNvPr id="44" name="Rounded Rectangle 43"/>
-          <p:cNvSpPr/>
-          <p:nvPr/>
-        </p:nvSpPr>
-        <p:spPr>
-          <a:xfrm>
-            <a:off x="6144768" y="2423160"/>
-            <a:ext cx="4005072" cy="713232"/>
-          </a:xfrm>
-          <a:prstGeom prst="roundRect">
-            <a:avLst>
-              <a:gd name="adj" fmla="val 14000"/>
-            </a:avLst>
-          </a:prstGeom>
-          <a:solidFill>
-            <a:srgbClr val="1E2761"/>
-          </a:solidFill>
-          <a:ln>
-            <a:noFill/>
-          </a:ln>
-          <a:effectLst/>
-        </p:spPr>
-        <p:style>
-          <a:lnRef idx="1">
-            <a:schemeClr val="accent1"/>
-          </a:lnRef>
-          <a:fillRef idx="3">
-            <a:schemeClr val="accent1"/>
-          </a:fillRef>
-          <a:effectRef idx="2">
-            <a:schemeClr val="accent1"/>
-          </a:effectRef>
-          <a:fontRef idx="minor">
-            <a:schemeClr val="lt1"/>
-          </a:fontRef>
-        </p:style>
-        <p:txBody>
-          <a:bodyPr rtlCol="0" anchor="ctr"/>
-          <a:lstStyle/>
-          <a:p>
-            <a:pPr algn="ctr"/>
-          </a:p>
-        </p:txBody>
-      </p:sp>
-      <p:sp>
-        <p:nvSpPr>
-          <p:cNvPr id="45" name="TextBox 44"/>
-          <p:cNvSpPr txBox="1"/>
-          <p:nvPr/>
-        </p:nvSpPr>
-        <p:spPr>
-          <a:xfrm>
-            <a:off x="6327648" y="2505456"/>
-            <a:ext cx="3685032" cy="566928"/>
-          </a:xfrm>
-          <a:prstGeom prst="rect">
-            <a:avLst/>
-          </a:prstGeom>
-          <a:noFill/>
-        </p:spPr>
-        <p:txBody>
-          <a:bodyPr wrap="square" anchor="t" lIns="0" rIns="0" tIns="0" bIns="0">
-            <a:noAutofit/>
-          </a:bodyPr>
-          <a:lstStyle/>
-          <a:p>
-            <a:pPr algn="l">
-              <a:lnSpc>
-                <a:spcPct val="105000"/>
-              </a:lnSpc>
-              <a:spcBef>
-                <a:spcPts val="0"/>
-              </a:spcBef>
-              <a:spcAft>
-                <a:spcPts val="400"/>
-              </a:spcAft>
-            </a:pPr>
-            <a:r>
-              <a:rPr sz="1050" b="0" i="0">
-                <a:solidFill>
-                  <a:srgbClr val="FFFFFF"/>
-                </a:solidFill>
-                <a:latin typeface="Inter"/>
-                <a:cs typeface="Inter"/>
-              </a:rPr>
-              <a:t>Soll der Versand vollautomatisch laufen oder erst nach deiner Freigabe?</a:t>
-            </a:r>
-          </a:p>
-        </p:txBody>
-      </p:sp>
-      <p:sp>
-        <p:nvSpPr>
-          <p:cNvPr id="46" name="Rounded Rectangle 45"/>
-          <p:cNvSpPr/>
-          <p:nvPr/>
-        </p:nvSpPr>
-        <p:spPr>
-          <a:xfrm>
-            <a:off x="6144768" y="3182112"/>
-            <a:ext cx="868680" cy="237744"/>
-          </a:xfrm>
-          <a:prstGeom prst="roundRect">
-            <a:avLst>
-              <a:gd name="adj" fmla="val 50000"/>
-            </a:avLst>
-          </a:prstGeom>
-          <a:solidFill>
-            <a:srgbClr val="CADCFC"/>
-          </a:solidFill>
-          <a:ln>
-            <a:noFill/>
-          </a:ln>
-          <a:effectLst/>
-        </p:spPr>
-        <p:style>
-          <a:lnRef idx="1">
-            <a:schemeClr val="accent1"/>
-          </a:lnRef>
-          <a:fillRef idx="3">
-            <a:schemeClr val="accent1"/>
-          </a:fillRef>
-          <a:effectRef idx="2">
-            <a:schemeClr val="accent1"/>
-          </a:effectRef>
-          <a:fontRef idx="minor">
-            <a:schemeClr val="lt1"/>
-          </a:fontRef>
-        </p:style>
-        <p:txBody>
-          <a:bodyPr rtlCol="0" anchor="ctr"/>
-          <a:lstStyle/>
-          <a:p>
-            <a:pPr algn="ctr"/>
-          </a:p>
-        </p:txBody>
-      </p:sp>
-      <p:sp>
-        <p:nvSpPr>
-          <p:cNvPr id="47" name="TextBox 46"/>
-          <p:cNvSpPr txBox="1"/>
-          <p:nvPr/>
-        </p:nvSpPr>
-        <p:spPr>
-          <a:xfrm>
-            <a:off x="6144768" y="3177540"/>
-            <a:ext cx="868680" cy="237744"/>
-          </a:xfrm>
-          <a:prstGeom prst="rect">
-            <a:avLst/>
-          </a:prstGeom>
-          <a:noFill/>
-        </p:spPr>
-        <p:txBody>
-          <a:bodyPr wrap="square" anchor="ctr" lIns="0" rIns="0" tIns="0" bIns="0">
-            <a:noAutofit/>
-          </a:bodyPr>
-          <a:lstStyle/>
-          <a:p>
-            <a:pPr algn="ctr">
-              <a:lnSpc>
-                <a:spcPct val="100000"/>
-              </a:lnSpc>
-              <a:spcBef>
-                <a:spcPts val="0"/>
-              </a:spcBef>
-              <a:spcAft>
-                <a:spcPts val="400"/>
-              </a:spcAft>
-            </a:pPr>
-            <a:r>
-              <a:rPr sz="850" b="1" i="0">
-                <a:solidFill>
-                  <a:srgbClr val="1E2761"/>
-                </a:solidFill>
-                <a:latin typeface="Inter"/>
-                <a:cs typeface="Inter"/>
-              </a:rPr>
-              <a:t>MECE</a:t>
-            </a:r>
-          </a:p>
-        </p:txBody>
-      </p:sp>
-      <p:sp>
-        <p:nvSpPr>
-          <p:cNvPr id="48" name="Rounded Rectangle 47"/>
-          <p:cNvSpPr/>
-          <p:nvPr/>
-        </p:nvSpPr>
-        <p:spPr>
-          <a:xfrm>
-            <a:off x="7077456" y="3182112"/>
-            <a:ext cx="1234440" cy="237744"/>
-          </a:xfrm>
-          <a:prstGeom prst="roundRect">
-            <a:avLst>
-              <a:gd name="adj" fmla="val 50000"/>
-            </a:avLst>
-          </a:prstGeom>
-          <a:solidFill>
-            <a:srgbClr val="CADCFC"/>
-          </a:solidFill>
-          <a:ln>
-            <a:noFill/>
-          </a:ln>
-          <a:effectLst/>
-        </p:spPr>
-        <p:style>
-          <a:lnRef idx="1">
-            <a:schemeClr val="accent1"/>
-          </a:lnRef>
-          <a:fillRef idx="3">
-            <a:schemeClr val="accent1"/>
-          </a:fillRef>
-          <a:effectRef idx="2">
-            <a:schemeClr val="accent1"/>
-          </a:effectRef>
-          <a:fontRef idx="minor">
-            <a:schemeClr val="lt1"/>
-          </a:fontRef>
-        </p:style>
-        <p:txBody>
-          <a:bodyPr rtlCol="0" anchor="ctr"/>
-          <a:lstStyle/>
-          <a:p>
-            <a:pPr algn="ctr"/>
-          </a:p>
-        </p:txBody>
-      </p:sp>
-      <p:sp>
-        <p:nvSpPr>
-          <p:cNvPr id="49" name="TextBox 48"/>
-          <p:cNvSpPr txBox="1"/>
-          <p:nvPr/>
-        </p:nvSpPr>
-        <p:spPr>
-          <a:xfrm>
-            <a:off x="7077456" y="3177540"/>
-            <a:ext cx="1234440" cy="237744"/>
-          </a:xfrm>
-          <a:prstGeom prst="rect">
-            <a:avLst/>
-          </a:prstGeom>
-          <a:noFill/>
-        </p:spPr>
-        <p:txBody>
-          <a:bodyPr wrap="square" anchor="ctr" lIns="0" rIns="0" tIns="0" bIns="0">
-            <a:noAutofit/>
-          </a:bodyPr>
-          <a:lstStyle/>
-          <a:p>
-            <a:pPr algn="ctr">
-              <a:lnSpc>
-                <a:spcPct val="100000"/>
-              </a:lnSpc>
-              <a:spcBef>
-                <a:spcPts val="0"/>
-              </a:spcBef>
-              <a:spcAft>
-                <a:spcPts val="400"/>
-              </a:spcAft>
-            </a:pPr>
-            <a:r>
-              <a:rPr sz="850" b="1" i="0">
-                <a:solidFill>
-                  <a:srgbClr val="1E2761"/>
-                </a:solidFill>
-                <a:latin typeface="Inter"/>
-                <a:cs typeface="Inter"/>
-              </a:rPr>
-              <a:t>Hypothese</a:t>
-            </a:r>
-          </a:p>
-        </p:txBody>
-      </p:sp>
-      <p:sp>
-        <p:nvSpPr>
-          <p:cNvPr id="50" name="Rounded Rectangle 49"/>
-          <p:cNvSpPr/>
-          <p:nvPr/>
-        </p:nvSpPr>
-        <p:spPr>
-          <a:xfrm>
-            <a:off x="7973567" y="3520439"/>
-            <a:ext cx="3090672" cy="457200"/>
-          </a:xfrm>
-          <a:prstGeom prst="roundRect">
-            <a:avLst>
-              <a:gd name="adj" fmla="val 20000"/>
-            </a:avLst>
-          </a:prstGeom>
-          <a:solidFill>
-            <a:srgbClr val="EEF1F7"/>
-          </a:solidFill>
-          <a:ln>
-            <a:noFill/>
-          </a:ln>
-          <a:effectLst/>
-        </p:spPr>
-        <p:style>
-          <a:lnRef idx="1">
-            <a:schemeClr val="accent1"/>
-          </a:lnRef>
-          <a:fillRef idx="3">
-            <a:schemeClr val="accent1"/>
-          </a:fillRef>
-          <a:effectRef idx="2">
-            <a:schemeClr val="accent1"/>
-          </a:effectRef>
-          <a:fontRef idx="minor">
-            <a:schemeClr val="lt1"/>
-          </a:fontRef>
-        </p:style>
-        <p:txBody>
-          <a:bodyPr rtlCol="0" anchor="ctr"/>
-          <a:lstStyle/>
-          <a:p>
-            <a:pPr algn="ctr"/>
-          </a:p>
-        </p:txBody>
-      </p:sp>
-      <p:sp>
-        <p:nvSpPr>
-          <p:cNvPr id="51" name="TextBox 50"/>
-          <p:cNvSpPr txBox="1"/>
-          <p:nvPr/>
-        </p:nvSpPr>
-        <p:spPr>
-          <a:xfrm>
-            <a:off x="8110728" y="3520439"/>
-            <a:ext cx="2816352" cy="457200"/>
-          </a:xfrm>
-          <a:prstGeom prst="rect">
-            <a:avLst/>
-          </a:prstGeom>
-          <a:noFill/>
-        </p:spPr>
-        <p:txBody>
-          <a:bodyPr wrap="square" anchor="ctr" lIns="0" rIns="0" tIns="0" bIns="0">
-            <a:noAutofit/>
-          </a:bodyPr>
-          <a:lstStyle/>
-          <a:p>
-            <a:pPr algn="l">
-              <a:lnSpc>
-                <a:spcPct val="100000"/>
-              </a:lnSpc>
-              <a:spcBef>
-                <a:spcPts val="0"/>
-              </a:spcBef>
-              <a:spcAft>
-                <a:spcPts val="400"/>
-              </a:spcAft>
-            </a:pPr>
-            <a:r>
-              <a:rPr sz="1000" b="0" i="0">
-                <a:solidFill>
-                  <a:srgbClr val="0E1735"/>
-                </a:solidFill>
-                <a:latin typeface="Inter"/>
-                <a:cs typeface="Inter"/>
-              </a:rPr>
-              <a:t>Erst nach meiner Freigabe.</a:t>
-            </a:r>
-          </a:p>
-        </p:txBody>
-      </p:sp>
-      <p:sp>
-        <p:nvSpPr>
-          <p:cNvPr id="52" name="Rounded Rectangle 51"/>
-          <p:cNvSpPr/>
-          <p:nvPr/>
-        </p:nvSpPr>
-        <p:spPr>
-          <a:xfrm>
-            <a:off x="6144768" y="4096512"/>
-            <a:ext cx="4919472" cy="1280160"/>
-          </a:xfrm>
-          <a:prstGeom prst="roundRect">
-            <a:avLst>
-              <a:gd name="adj" fmla="val 6000"/>
-            </a:avLst>
-          </a:prstGeom>
-          <a:solidFill>
-            <a:srgbClr val="FBF1EA"/>
-          </a:solidFill>
-          <a:ln w="12700">
-            <a:solidFill>
-              <a:srgbClr val="E8703A"/>
-            </a:solidFill>
-          </a:ln>
-          <a:effectLst/>
-        </p:spPr>
-        <p:style>
-          <a:lnRef idx="1">
-            <a:schemeClr val="accent1"/>
-          </a:lnRef>
-          <a:fillRef idx="3">
-            <a:schemeClr val="accent1"/>
-          </a:fillRef>
-          <a:effectRef idx="2">
-            <a:schemeClr val="accent1"/>
-          </a:effectRef>
-          <a:fontRef idx="minor">
-            <a:schemeClr val="lt1"/>
-          </a:fontRef>
-        </p:style>
-        <p:txBody>
-          <a:bodyPr rtlCol="0" anchor="ctr"/>
-          <a:lstStyle/>
-          <a:p>
-            <a:pPr algn="ctr"/>
-          </a:p>
-        </p:txBody>
-      </p:sp>
-      <p:sp>
-        <p:nvSpPr>
-          <p:cNvPr id="53" name="TextBox 52"/>
-          <p:cNvSpPr txBox="1"/>
-          <p:nvPr/>
-        </p:nvSpPr>
-        <p:spPr>
-          <a:xfrm>
-            <a:off x="6327648" y="4206240"/>
-            <a:ext cx="4553712" cy="274320"/>
-          </a:xfrm>
-          <a:prstGeom prst="rect">
-            <a:avLst/>
-          </a:prstGeom>
-          <a:noFill/>
-        </p:spPr>
-        <p:txBody>
-          <a:bodyPr wrap="square" anchor="t" lIns="0" rIns="0" tIns="0" bIns="0">
-            <a:noAutofit/>
-          </a:bodyPr>
-          <a:lstStyle/>
-          <a:p>
-            <a:pPr algn="l">
-              <a:lnSpc>
-                <a:spcPct val="100000"/>
-              </a:lnSpc>
-              <a:spcBef>
-                <a:spcPts val="0"/>
-              </a:spcBef>
-              <a:spcAft>
-                <a:spcPts val="400"/>
-              </a:spcAft>
-            </a:pPr>
-            <a:r>
-              <a:rPr sz="900" b="1" i="0">
-                <a:solidFill>
-                  <a:srgbClr val="E8703A"/>
-                </a:solidFill>
-                <a:latin typeface="Inter"/>
-                <a:cs typeface="Inter"/>
-              </a:rPr>
-              <a:t>VORSCHLAG DES SYSTEMS</a:t>
-            </a:r>
-          </a:p>
-        </p:txBody>
-      </p:sp>
-      <p:sp>
-        <p:nvSpPr>
-          <p:cNvPr id="54" name="TextBox 53"/>
-          <p:cNvSpPr txBox="1"/>
-          <p:nvPr/>
-        </p:nvSpPr>
-        <p:spPr>
-          <a:xfrm>
-            <a:off x="6327648" y="4443983"/>
-            <a:ext cx="4553712" cy="822960"/>
-          </a:xfrm>
-          <a:prstGeom prst="rect">
-            <a:avLst/>
-          </a:prstGeom>
-          <a:noFill/>
-        </p:spPr>
-        <p:txBody>
-          <a:bodyPr wrap="square" anchor="t" lIns="0" rIns="0" tIns="0" bIns="0">
-            <a:noAutofit/>
-          </a:bodyPr>
-          <a:lstStyle/>
-          <a:p>
-            <a:pPr algn="l">
-              <a:lnSpc>
-                <a:spcPct val="116000"/>
-              </a:lnSpc>
-              <a:spcBef>
-                <a:spcPts val="0"/>
-              </a:spcBef>
-              <a:spcAft>
-                <a:spcPts val="400"/>
-              </a:spcAft>
-            </a:pPr>
-            <a:r>
-              <a:rPr sz="1050" b="1" i="0">
-                <a:solidFill>
-                  <a:srgbClr val="0E1735"/>
-                </a:solidFill>
-                <a:latin typeface="Inter"/>
-                <a:cs typeface="Inter"/>
-              </a:rPr>
-              <a:t>Projektart: </a:t>
-            </a:r>
-            <a:r>
-              <a:rPr sz="1050" b="0" i="0">
-                <a:solidFill>
-                  <a:srgbClr val="0E1735"/>
-                </a:solidFill>
-                <a:latin typeface="Inter"/>
-                <a:cs typeface="Inter"/>
-              </a:rPr>
-              <a:t>Hybrid (Konzept + Technik). </a:t>
-            </a:r>
-            <a:r>
-              <a:rPr sz="1050" b="1" i="0">
-                <a:solidFill>
-                  <a:srgbClr val="0E1735"/>
-                </a:solidFill>
-                <a:latin typeface="Inter"/>
-                <a:cs typeface="Inter"/>
-              </a:rPr>
-              <a:t>Skills: </a:t>
-            </a:r>
-            <a:r>
-              <a:rPr sz="1050" b="0" i="0">
-                <a:solidFill>
-                  <a:srgbClr val="0E1735"/>
-                </a:solidFill>
-                <a:latin typeface="Inter"/>
-                <a:cs typeface="Inter"/>
-              </a:rPr>
-              <a:t>Themen-Research, Text-Entwurf, Tonalitäts-Check, Freigabe-Workflow, Versand.</a:t>
-            </a:r>
-          </a:p>
-        </p:txBody>
-      </p:sp>
-      <p:sp>
-        <p:nvSpPr>
-          <p:cNvPr id="55" name="Rounded Rectangle 54"/>
-          <p:cNvSpPr/>
-          <p:nvPr/>
-        </p:nvSpPr>
-        <p:spPr>
-          <a:xfrm>
-            <a:off x="6327648" y="5047488"/>
-            <a:ext cx="1188720" cy="274320"/>
-          </a:xfrm>
-          <a:prstGeom prst="roundRect">
-            <a:avLst>
-              <a:gd name="adj" fmla="val 50000"/>
-            </a:avLst>
-          </a:prstGeom>
-          <a:solidFill>
-            <a:srgbClr val="E8703A"/>
-          </a:solidFill>
-          <a:ln>
-            <a:noFill/>
-          </a:ln>
-          <a:effectLst/>
-        </p:spPr>
-        <p:style>
-          <a:lnRef idx="1">
-            <a:schemeClr val="accent1"/>
-          </a:lnRef>
-          <a:fillRef idx="3">
-            <a:schemeClr val="accent1"/>
-          </a:fillRef>
-          <a:effectRef idx="2">
-            <a:schemeClr val="accent1"/>
-          </a:effectRef>
-          <a:fontRef idx="minor">
-            <a:schemeClr val="lt1"/>
-          </a:fontRef>
-        </p:style>
-        <p:txBody>
-          <a:bodyPr rtlCol="0" anchor="ctr"/>
-          <a:lstStyle/>
-          <a:p>
-            <a:pPr algn="ctr"/>
-          </a:p>
-        </p:txBody>
-      </p:sp>
-      <p:sp>
-        <p:nvSpPr>
-          <p:cNvPr id="56" name="TextBox 55"/>
-          <p:cNvSpPr txBox="1"/>
-          <p:nvPr/>
-        </p:nvSpPr>
-        <p:spPr>
-          <a:xfrm>
-            <a:off x="6327648" y="5042916"/>
-            <a:ext cx="1188720" cy="274320"/>
-          </a:xfrm>
-          <a:prstGeom prst="rect">
-            <a:avLst/>
-          </a:prstGeom>
-          <a:noFill/>
-        </p:spPr>
-        <p:txBody>
-          <a:bodyPr wrap="square" anchor="ctr" lIns="0" rIns="0" tIns="0" bIns="0">
-            <a:noAutofit/>
-          </a:bodyPr>
-          <a:lstStyle/>
-          <a:p>
-            <a:pPr algn="ctr">
-              <a:lnSpc>
-                <a:spcPct val="100000"/>
-              </a:lnSpc>
-              <a:spcBef>
-                <a:spcPts val="0"/>
-              </a:spcBef>
-              <a:spcAft>
-                <a:spcPts val="400"/>
-              </a:spcAft>
-            </a:pPr>
-            <a:r>
-              <a:rPr sz="950" b="1" i="0">
-                <a:solidFill>
-                  <a:srgbClr val="FFFFFF"/>
-                </a:solidFill>
-                <a:latin typeface="Inter"/>
-                <a:cs typeface="Inter"/>
-              </a:rPr>
-              <a:t>Annehmen</a:t>
-            </a:r>
-          </a:p>
-        </p:txBody>
-      </p:sp>
-      <p:sp>
-        <p:nvSpPr>
-          <p:cNvPr id="57" name="Rounded Rectangle 56"/>
-          <p:cNvSpPr/>
-          <p:nvPr/>
-        </p:nvSpPr>
-        <p:spPr>
-          <a:xfrm>
-            <a:off x="7607808" y="5047488"/>
-            <a:ext cx="1051560" cy="274320"/>
-          </a:xfrm>
-          <a:prstGeom prst="roundRect">
-            <a:avLst>
-              <a:gd name="adj" fmla="val 50000"/>
-            </a:avLst>
-          </a:prstGeom>
-          <a:solidFill>
-            <a:srgbClr val="FFFFFF"/>
-          </a:solidFill>
-          <a:ln w="12700">
-            <a:solidFill>
-              <a:srgbClr val="AFC6F0"/>
-            </a:solidFill>
-          </a:ln>
-          <a:effectLst/>
-        </p:spPr>
-        <p:style>
-          <a:lnRef idx="1">
-            <a:schemeClr val="accent1"/>
-          </a:lnRef>
-          <a:fillRef idx="3">
-            <a:schemeClr val="accent1"/>
-          </a:fillRef>
-          <a:effectRef idx="2">
-            <a:schemeClr val="accent1"/>
-          </a:effectRef>
-          <a:fontRef idx="minor">
-            <a:schemeClr val="lt1"/>
-          </a:fontRef>
-        </p:style>
-        <p:txBody>
-          <a:bodyPr rtlCol="0" anchor="ctr"/>
-          <a:lstStyle/>
-          <a:p>
-            <a:pPr algn="ctr"/>
-          </a:p>
-        </p:txBody>
-      </p:sp>
-      <p:sp>
-        <p:nvSpPr>
-          <p:cNvPr id="58" name="TextBox 57"/>
-          <p:cNvSpPr txBox="1"/>
-          <p:nvPr/>
-        </p:nvSpPr>
-        <p:spPr>
-          <a:xfrm>
-            <a:off x="7607808" y="5042916"/>
-            <a:ext cx="1051560" cy="274320"/>
-          </a:xfrm>
-          <a:prstGeom prst="rect">
-            <a:avLst/>
-          </a:prstGeom>
-          <a:noFill/>
-        </p:spPr>
-        <p:txBody>
-          <a:bodyPr wrap="square" anchor="ctr" lIns="0" rIns="0" tIns="0" bIns="0">
-            <a:noAutofit/>
-          </a:bodyPr>
-          <a:lstStyle/>
-          <a:p>
-            <a:pPr algn="ctr">
-              <a:lnSpc>
-                <a:spcPct val="100000"/>
-              </a:lnSpc>
-              <a:spcBef>
-                <a:spcPts val="0"/>
-              </a:spcBef>
-              <a:spcAft>
-                <a:spcPts val="400"/>
-              </a:spcAft>
-            </a:pPr>
-            <a:r>
-              <a:rPr sz="950" b="1" i="0">
-                <a:solidFill>
-                  <a:srgbClr val="1E2761"/>
-                </a:solidFill>
-                <a:latin typeface="Inter"/>
-                <a:cs typeface="Inter"/>
-              </a:rPr>
-              <a:t>Ändern</a:t>
-            </a:r>
-          </a:p>
-        </p:txBody>
-      </p:sp>
+      <p:pic>
+        <p:nvPicPr>
+          <p:cNvPr id="36" name="Picture 35" descr="g_04_understanding.png"/>
+          <p:cNvPicPr>
+            <a:picLocks noChangeAspect="1"/>
+          </p:cNvPicPr>
+          <p:nvPr/>
+        </p:nvPicPr>
+        <p:blipFill>
+          <a:blip r:embed="rId3"/>
+          <a:stretch>
+            <a:fillRect/>
+          </a:stretch>
+        </p:blipFill>
+        <p:spPr>
+          <a:xfrm>
+            <a:off x="5870448" y="1930527"/>
+            <a:ext cx="5468112" cy="3417570"/>
+          </a:xfrm>
+          <a:prstGeom prst="rect">
+            <a:avLst/>
+          </a:prstGeom>
+        </p:spPr>
+      </p:pic>
     </p:spTree>
   </p:cSld>
   <p:clrMapOvr>
